--- a/docs/Desafio Indicium AI - BanVic Apresentação Final - Luiz Eduardo Ferreira.pptx
+++ b/docs/Desafio Indicium AI - BanVic Apresentação Final - Luiz Eduardo Ferreira.pptx
@@ -11,12 +11,12 @@
     <p:sldId id="256" r:id="rId2"/>
     <p:sldId id="266" r:id="rId3"/>
     <p:sldId id="258" r:id="rId4"/>
-    <p:sldId id="260" r:id="rId5"/>
-    <p:sldId id="259" r:id="rId6"/>
-    <p:sldId id="261" r:id="rId7"/>
-    <p:sldId id="262" r:id="rId8"/>
-    <p:sldId id="263" r:id="rId9"/>
-    <p:sldId id="264" r:id="rId10"/>
+    <p:sldId id="262" r:id="rId5"/>
+    <p:sldId id="263" r:id="rId6"/>
+    <p:sldId id="264" r:id="rId7"/>
+    <p:sldId id="260" r:id="rId8"/>
+    <p:sldId id="259" r:id="rId9"/>
+    <p:sldId id="261" r:id="rId10"/>
     <p:sldId id="265" r:id="rId11"/>
   </p:sldIdLst>
   <p:sldSz cx="12192000" cy="6858000"/>
@@ -4094,7 +4094,7 @@
         <p:spPr>
           <a:xfrm>
             <a:off x="1051560" y="1801368"/>
-            <a:ext cx="4692182" cy="851515"/>
+            <a:ext cx="4370107" cy="595035"/>
           </a:xfrm>
           <a:prstGeom prst="rect">
             <a:avLst/>
@@ -4147,52 +4147,7 @@
             </a:r>
             <a:r>
               <a:rPr dirty="0"/>
-              <a:t> churn e </a:t>
-            </a:r>
-            <a:r>
-              <a:rPr dirty="0" err="1"/>
-              <a:t>clientes</a:t>
-            </a:r>
-            <a:r>
-              <a:rPr dirty="0"/>
-              <a:t> </a:t>
-            </a:r>
-            <a:r>
-              <a:rPr dirty="0" err="1"/>
-              <a:t>sem</a:t>
-            </a:r>
-            <a:r>
-              <a:rPr dirty="0"/>
-              <a:t> </a:t>
-            </a:r>
-            <a:r>
-              <a:rPr dirty="0" err="1"/>
-              <a:t>transações</a:t>
-            </a:r>
-            <a:r>
-              <a:rPr dirty="0"/>
-              <a:t> </a:t>
-            </a:r>
-            <a:r>
-              <a:rPr lang="pt-BR" dirty="0"/>
-              <a:t>e propostas de crédito</a:t>
-            </a:r>
-          </a:p>
-          <a:p>
-            <a:pPr>
-              <a:spcBef>
-                <a:spcPts val="500"/>
-              </a:spcBef>
-              <a:defRPr sz="1250">
-                <a:solidFill>
-                  <a:srgbClr val="FFFFFF"/>
-                </a:solidFill>
-                <a:latin typeface="Aptos"/>
-              </a:defRPr>
-            </a:pPr>
-            <a:r>
-              <a:rPr dirty="0"/>
-              <a:t>para </a:t>
+              <a:t> churn para </a:t>
             </a:r>
             <a:r>
               <a:rPr dirty="0" err="1"/>
@@ -4276,7 +4231,7 @@
         <p:spPr>
           <a:xfrm>
             <a:off x="6629400" y="1801368"/>
-            <a:ext cx="4805675" cy="851515"/>
+            <a:ext cx="4114781" cy="595035"/>
           </a:xfrm>
           <a:prstGeom prst="rect">
             <a:avLst/>
@@ -4340,74 +4295,13 @@
             </a:r>
             <a:r>
               <a:rPr dirty="0"/>
-              <a:t> do Pix </a:t>
-            </a:r>
-            <a:r>
-              <a:rPr dirty="0" err="1"/>
-              <a:t>em</a:t>
-            </a:r>
-            <a:r>
-              <a:rPr dirty="0"/>
-              <a:t> </a:t>
-            </a:r>
-            <a:r>
-              <a:rPr dirty="0" err="1"/>
-              <a:t>ações</a:t>
-            </a:r>
-            <a:r>
-              <a:rPr dirty="0"/>
-              <a:t> </a:t>
-            </a:r>
-            <a:endParaRPr lang="pt-BR" dirty="0"/>
-          </a:p>
-          <a:p>
-            <a:pPr>
-              <a:spcBef>
-                <a:spcPts val="500"/>
-              </a:spcBef>
-              <a:defRPr sz="1250">
-                <a:solidFill>
-                  <a:srgbClr val="FFFFFF"/>
-                </a:solidFill>
-                <a:latin typeface="Aptos"/>
-              </a:defRPr>
-            </a:pPr>
-            <a:r>
-              <a:rPr dirty="0"/>
-              <a:t>de </a:t>
-            </a:r>
-            <a:r>
-              <a:rPr dirty="0" err="1"/>
-              <a:t>relacionamento</a:t>
-            </a:r>
-            <a:r>
-              <a:rPr dirty="0"/>
-              <a:t> </a:t>
+              <a:t> do Pix</a:t>
             </a:r>
             <a:r>
               <a:rPr lang="pt-BR" dirty="0"/>
-              <a:t>, bonificação </a:t>
-            </a:r>
-            <a:r>
-              <a:rPr dirty="0"/>
-              <a:t>e </a:t>
-            </a:r>
-            <a:r>
-              <a:rPr dirty="0" err="1"/>
-              <a:t>uso</a:t>
-            </a:r>
-            <a:r>
-              <a:rPr dirty="0"/>
-              <a:t> </a:t>
-            </a:r>
-            <a:r>
-              <a:rPr dirty="0" err="1"/>
-              <a:t>recorrente</a:t>
-            </a:r>
-            <a:r>
-              <a:rPr dirty="0"/>
               <a:t>.</a:t>
             </a:r>
+            <a:endParaRPr dirty="0"/>
           </a:p>
         </p:txBody>
       </p:sp>
@@ -4466,7 +4360,7 @@
         <p:spPr>
           <a:xfrm>
             <a:off x="1051560" y="3675887"/>
-            <a:ext cx="4127797" cy="851515"/>
+            <a:ext cx="3644075" cy="595035"/>
           </a:xfrm>
           <a:prstGeom prst="rect">
             <a:avLst/>
@@ -4542,47 +4436,10 @@
               <a:t>contínuo</a:t>
             </a:r>
             <a:r>
-              <a:rPr dirty="0"/>
-              <a:t> de </a:t>
-            </a:r>
-            <a:endParaRPr lang="pt-BR" dirty="0"/>
-          </a:p>
-          <a:p>
-            <a:pPr>
-              <a:spcBef>
-                <a:spcPts val="500"/>
-              </a:spcBef>
-              <a:defRPr sz="1250">
-                <a:solidFill>
-                  <a:srgbClr val="FFFFFF"/>
-                </a:solidFill>
-                <a:latin typeface="Aptos"/>
-              </a:defRPr>
-            </a:pPr>
-            <a:r>
-              <a:rPr dirty="0" err="1"/>
-              <a:t>acompanhamento</a:t>
-            </a:r>
-            <a:r>
-              <a:rPr dirty="0"/>
-              <a:t> dos KPIs e </a:t>
-            </a:r>
-            <a:r>
-              <a:rPr dirty="0" err="1"/>
-              <a:t>comparação</a:t>
-            </a:r>
-            <a:r>
-              <a:rPr dirty="0"/>
-              <a:t> de </a:t>
-            </a:r>
-            <a:r>
-              <a:rPr dirty="0" err="1"/>
-              <a:t>resultados</a:t>
-            </a:r>
-            <a:r>
-              <a:rPr dirty="0"/>
+              <a:rPr lang="pt-BR" dirty="0"/>
               <a:t>.</a:t>
             </a:r>
+            <a:endParaRPr dirty="0"/>
           </a:p>
         </p:txBody>
       </p:sp>
@@ -4641,7 +4498,7 @@
         <p:spPr>
           <a:xfrm>
             <a:off x="6629400" y="3675887"/>
-            <a:ext cx="4925194" cy="851515"/>
+            <a:ext cx="4312078" cy="851515"/>
           </a:xfrm>
           <a:prstGeom prst="rect">
             <a:avLst/>
@@ -4736,39 +4593,7 @@
             </a:r>
             <a:r>
               <a:rPr dirty="0"/>
-              <a:t>/2022 antes de </a:t>
-            </a:r>
-            <a:r>
-              <a:rPr dirty="0" err="1"/>
-              <a:t>utilizá</a:t>
-            </a:r>
-            <a:r>
-              <a:rPr dirty="0"/>
-              <a:t>-lo </a:t>
-            </a:r>
-            <a:r>
-              <a:rPr dirty="0" err="1"/>
-              <a:t>como</a:t>
-            </a:r>
-            <a:r>
-              <a:rPr dirty="0"/>
-              <a:t> </a:t>
-            </a:r>
-            <a:r>
-              <a:rPr dirty="0" err="1"/>
-              <a:t>referência</a:t>
-            </a:r>
-            <a:r>
-              <a:rPr dirty="0"/>
-              <a:t> de </a:t>
-            </a:r>
-            <a:r>
-              <a:rPr dirty="0" err="1"/>
-              <a:t>planejamento</a:t>
-            </a:r>
-            <a:r>
-              <a:rPr dirty="0"/>
-              <a:t>.</a:t>
+              <a:t>/2022.</a:t>
             </a:r>
           </a:p>
         </p:txBody>
@@ -5205,7 +5030,7 @@
         <p:spPr>
           <a:xfrm>
             <a:off x="914400" y="1783080"/>
-            <a:ext cx="2103120" cy="1184940"/>
+            <a:ext cx="2103120" cy="1007968"/>
           </a:xfrm>
           <a:prstGeom prst="rect">
             <a:avLst/>
@@ -5248,38 +5073,6 @@
                 <a:latin typeface="Aptos"/>
               </a:defRPr>
             </a:pPr>
-            <a:r>
-              <a:rPr dirty="0" err="1"/>
-              <a:t>Objetivos</a:t>
-            </a:r>
-            <a:r>
-              <a:rPr dirty="0"/>
-              <a:t> </a:t>
-            </a:r>
-            <a:r>
-              <a:rPr dirty="0" err="1"/>
-              <a:t>comerciais</a:t>
-            </a:r>
-            <a:r>
-              <a:rPr dirty="0"/>
-              <a:t> e</a:t>
-            </a:r>
-            <a:r>
-              <a:rPr lang="pt-BR" dirty="0"/>
-              <a:t> </a:t>
-            </a:r>
-            <a:r>
-              <a:rPr dirty="0" err="1"/>
-              <a:t>perguntas</a:t>
-            </a:r>
-            <a:r>
-              <a:rPr dirty="0"/>
-              <a:t> de </a:t>
-            </a:r>
-            <a:r>
-              <a:rPr dirty="0" err="1"/>
-              <a:t>negócio</a:t>
-            </a:r>
             <a:endParaRPr lang="pt-BR" dirty="0"/>
           </a:p>
           <a:p>
@@ -5618,7 +5411,7 @@
         <p:spPr>
           <a:xfrm>
             <a:off x="6492240" y="1783080"/>
-            <a:ext cx="2103120" cy="931024"/>
+            <a:ext cx="2103120" cy="1184940"/>
           </a:xfrm>
           <a:prstGeom prst="rect">
             <a:avLst/>
@@ -5641,8 +5434,22 @@
             </a:pPr>
             <a:r>
               <a:rPr lang="pt-BR" dirty="0"/>
-              <a:t>4. EDA e estatística</a:t>
-            </a:r>
+              <a:t>3. EDA </a:t>
+            </a:r>
+          </a:p>
+          <a:p>
+            <a:pPr>
+              <a:spcBef>
+                <a:spcPts val="600"/>
+              </a:spcBef>
+              <a:defRPr sz="1150">
+                <a:solidFill>
+                  <a:srgbClr val="1F2937"/>
+                </a:solidFill>
+                <a:latin typeface="Aptos"/>
+              </a:defRPr>
+            </a:pPr>
+            <a:endParaRPr lang="pt-BR" dirty="0"/>
           </a:p>
           <a:p>
             <a:pPr>
@@ -5677,7 +5484,7 @@
         </p:nvSpPr>
         <p:spPr>
           <a:xfrm>
-            <a:off x="9052559" y="1600200"/>
+            <a:off x="704088" y="3646672"/>
             <a:ext cx="2514600" cy="1508760"/>
           </a:xfrm>
           <a:prstGeom prst="roundRect">
@@ -5729,7 +5536,7 @@
         </p:nvSpPr>
         <p:spPr>
           <a:xfrm>
-            <a:off x="9052559" y="1600200"/>
+            <a:off x="704088" y="3646672"/>
             <a:ext cx="73152" cy="1508760"/>
           </a:xfrm>
           <a:prstGeom prst="rect">
@@ -5779,8 +5586,8 @@
         </p:nvSpPr>
         <p:spPr>
           <a:xfrm>
-            <a:off x="9281159" y="1783080"/>
-            <a:ext cx="2103120" cy="931024"/>
+            <a:off x="932688" y="3829552"/>
+            <a:ext cx="2103120" cy="830997"/>
           </a:xfrm>
           <a:prstGeom prst="rect">
             <a:avLst/>
@@ -5803,7 +5610,7 @@
             </a:pPr>
             <a:r>
               <a:rPr lang="pt-BR" dirty="0"/>
-              <a:t>3. PostgreSQL</a:t>
+              <a:t>4. PostgreSQL</a:t>
             </a:r>
           </a:p>
           <a:p>
@@ -5818,9 +5625,23 @@
                 <a:latin typeface="Aptos"/>
               </a:defRPr>
             </a:pPr>
+            <a:endParaRPr lang="pt-BR" dirty="0"/>
+          </a:p>
+          <a:p>
+            <a:pPr>
+              <a:spcBef>
+                <a:spcPts val="600"/>
+              </a:spcBef>
+              <a:defRPr sz="1150">
+                <a:solidFill>
+                  <a:srgbClr val="1F2937"/>
+                </a:solidFill>
+                <a:latin typeface="Aptos"/>
+              </a:defRPr>
+            </a:pPr>
             <a:r>
               <a:rPr lang="pt-BR" dirty="0"/>
-              <a:t>Estruturação e carregamento da fonte analítica em uma SGBD comercial</a:t>
+              <a:t>SGBD comercial</a:t>
             </a:r>
           </a:p>
         </p:txBody>
@@ -5839,7 +5660,7 @@
         </p:nvSpPr>
         <p:spPr>
           <a:xfrm>
-            <a:off x="685800" y="3657600"/>
+            <a:off x="3493008" y="3657600"/>
             <a:ext cx="2514600" cy="1508760"/>
           </a:xfrm>
           <a:prstGeom prst="roundRect">
@@ -5891,7 +5712,7 @@
         </p:nvSpPr>
         <p:spPr>
           <a:xfrm>
-            <a:off x="685800" y="3657600"/>
+            <a:off x="3493008" y="3657600"/>
             <a:ext cx="73152" cy="1508760"/>
           </a:xfrm>
           <a:prstGeom prst="rect">
@@ -5941,7 +5762,7 @@
         </p:nvSpPr>
         <p:spPr>
           <a:xfrm>
-            <a:off x="914400" y="3840480"/>
+            <a:off x="3721608" y="3840480"/>
             <a:ext cx="2103120" cy="1107996"/>
           </a:xfrm>
           <a:prstGeom prst="rect">
@@ -6042,7 +5863,7 @@
         </p:nvSpPr>
         <p:spPr>
           <a:xfrm>
-            <a:off x="3474720" y="3657600"/>
+            <a:off x="6281928" y="3657600"/>
             <a:ext cx="2514600" cy="1508760"/>
           </a:xfrm>
           <a:prstGeom prst="roundRect">
@@ -6094,7 +5915,7 @@
         </p:nvSpPr>
         <p:spPr>
           <a:xfrm>
-            <a:off x="3474720" y="3657600"/>
+            <a:off x="6281928" y="3657600"/>
             <a:ext cx="73152" cy="1508760"/>
           </a:xfrm>
           <a:prstGeom prst="rect">
@@ -6144,7 +5965,7 @@
         </p:nvSpPr>
         <p:spPr>
           <a:xfrm>
-            <a:off x="3703320" y="3840480"/>
+            <a:off x="6510528" y="3840480"/>
             <a:ext cx="2103120" cy="1188719"/>
           </a:xfrm>
           <a:prstGeom prst="rect">
@@ -6184,166 +6005,6 @@
             </a:pPr>
             <a:r>
               <a:t>Dashboard interativo para acompanhamento</a:t>
-            </a:r>
-          </a:p>
-        </p:txBody>
-      </p:sp>
-      <p:sp>
-        <p:nvSpPr>
-          <p:cNvPr id="25" name="Rounded Rectangle 24">
-            <a:extLst>
-              <a:ext uri="{FF2B5EF4-FFF2-40B4-BE49-F238E27FC236}">
-                <a16:creationId xmlns:a16="http://schemas.microsoft.com/office/drawing/2014/main" id="{BECCE4DE-7926-D846-A6B6-52B0E785E7DE}"/>
-              </a:ext>
-            </a:extLst>
-          </p:cNvPr>
-          <p:cNvSpPr/>
-          <p:nvPr/>
-        </p:nvSpPr>
-        <p:spPr>
-          <a:xfrm>
-            <a:off x="6263640" y="3657600"/>
-            <a:ext cx="2514600" cy="1508760"/>
-          </a:xfrm>
-          <a:prstGeom prst="roundRect">
-            <a:avLst/>
-          </a:prstGeom>
-          <a:solidFill>
-            <a:srgbClr val="FFFFFF"/>
-          </a:solidFill>
-          <a:ln>
-            <a:solidFill>
-              <a:srgbClr val="DCE1E8"/>
-            </a:solidFill>
-          </a:ln>
-        </p:spPr>
-        <p:style>
-          <a:lnRef idx="1">
-            <a:schemeClr val="accent1"/>
-          </a:lnRef>
-          <a:fillRef idx="3">
-            <a:schemeClr val="accent1"/>
-          </a:fillRef>
-          <a:effectRef idx="2">
-            <a:schemeClr val="accent1"/>
-          </a:effectRef>
-          <a:fontRef idx="minor">
-            <a:schemeClr val="lt1"/>
-          </a:fontRef>
-        </p:style>
-        <p:txBody>
-          <a:bodyPr rtlCol="0" anchor="ctr"/>
-          <a:lstStyle/>
-          <a:p>
-            <a:pPr algn="ctr"/>
-            <a:endParaRPr/>
-          </a:p>
-        </p:txBody>
-      </p:sp>
-      <p:sp>
-        <p:nvSpPr>
-          <p:cNvPr id="26" name="Rectangle 25">
-            <a:extLst>
-              <a:ext uri="{FF2B5EF4-FFF2-40B4-BE49-F238E27FC236}">
-                <a16:creationId xmlns:a16="http://schemas.microsoft.com/office/drawing/2014/main" id="{1607875B-3BB7-DB7C-8BEF-28C8DE976B1E}"/>
-              </a:ext>
-            </a:extLst>
-          </p:cNvPr>
-          <p:cNvSpPr/>
-          <p:nvPr/>
-        </p:nvSpPr>
-        <p:spPr>
-          <a:xfrm>
-            <a:off x="6263640" y="3657600"/>
-            <a:ext cx="73152" cy="1508760"/>
-          </a:xfrm>
-          <a:prstGeom prst="rect">
-            <a:avLst/>
-          </a:prstGeom>
-          <a:solidFill>
-            <a:srgbClr val="76528E"/>
-          </a:solidFill>
-          <a:ln>
-            <a:noFill/>
-          </a:ln>
-        </p:spPr>
-        <p:style>
-          <a:lnRef idx="1">
-            <a:schemeClr val="accent1"/>
-          </a:lnRef>
-          <a:fillRef idx="3">
-            <a:schemeClr val="accent1"/>
-          </a:fillRef>
-          <a:effectRef idx="2">
-            <a:schemeClr val="accent1"/>
-          </a:effectRef>
-          <a:fontRef idx="minor">
-            <a:schemeClr val="lt1"/>
-          </a:fontRef>
-        </p:style>
-        <p:txBody>
-          <a:bodyPr rtlCol="0" anchor="ctr"/>
-          <a:lstStyle/>
-          <a:p>
-            <a:pPr algn="ctr"/>
-            <a:endParaRPr/>
-          </a:p>
-        </p:txBody>
-      </p:sp>
-      <p:sp>
-        <p:nvSpPr>
-          <p:cNvPr id="27" name="TextBox 26">
-            <a:extLst>
-              <a:ext uri="{FF2B5EF4-FFF2-40B4-BE49-F238E27FC236}">
-                <a16:creationId xmlns:a16="http://schemas.microsoft.com/office/drawing/2014/main" id="{4C0C38FD-FF6E-B6E7-4A0B-9769DE47EAE2}"/>
-              </a:ext>
-            </a:extLst>
-          </p:cNvPr>
-          <p:cNvSpPr txBox="1"/>
-          <p:nvPr/>
-        </p:nvSpPr>
-        <p:spPr>
-          <a:xfrm>
-            <a:off x="6492240" y="3840480"/>
-            <a:ext cx="2103120" cy="1188719"/>
-          </a:xfrm>
-          <a:prstGeom prst="rect">
-            <a:avLst/>
-          </a:prstGeom>
-          <a:noFill/>
-        </p:spPr>
-        <p:txBody>
-          <a:bodyPr wrap="square">
-            <a:spAutoFit/>
-          </a:bodyPr>
-          <a:lstStyle/>
-          <a:p>
-            <a:pPr>
-              <a:defRPr sz="1500" b="1">
-                <a:solidFill>
-                  <a:srgbClr val="0F2747"/>
-                </a:solidFill>
-                <a:latin typeface="Aptos"/>
-              </a:defRPr>
-            </a:pPr>
-            <a:r>
-              <a:t>7. Recomendações</a:t>
-            </a:r>
-          </a:p>
-          <a:p>
-            <a:pPr>
-              <a:spcBef>
-                <a:spcPts val="600"/>
-              </a:spcBef>
-              <a:defRPr sz="1150">
-                <a:solidFill>
-                  <a:srgbClr val="1F2937"/>
-                </a:solidFill>
-                <a:latin typeface="Aptos"/>
-              </a:defRPr>
-            </a:pPr>
-            <a:r>
-              <a:t>Conversão das evidências em iniciativas acionáveis</a:t>
             </a:r>
           </a:p>
         </p:txBody>
@@ -7962,6 +7623,3092 @@
 </file>
 
 <file path=ppt/slides/slide4.xml><?xml version="1.0" encoding="utf-8"?>
+<p:sld xmlns:a="http://schemas.openxmlformats.org/drawingml/2006/main" xmlns:r="http://schemas.openxmlformats.org/officeDocument/2006/relationships" xmlns:p="http://schemas.openxmlformats.org/presentationml/2006/main" show="0">
+  <p:cSld>
+    <p:spTree>
+      <p:nvGrpSpPr>
+        <p:cNvPr id="1" name=""/>
+        <p:cNvGrpSpPr/>
+        <p:nvPr/>
+      </p:nvGrpSpPr>
+      <p:grpSpPr>
+        <a:xfrm>
+          <a:off x="0" y="0"/>
+          <a:ext cx="0" cy="0"/>
+          <a:chOff x="0" y="0"/>
+          <a:chExt cx="0" cy="0"/>
+        </a:xfrm>
+      </p:grpSpPr>
+      <p:sp>
+        <p:nvSpPr>
+          <p:cNvPr id="2" name="Rectangle 1"/>
+          <p:cNvSpPr/>
+          <p:nvPr/>
+        </p:nvSpPr>
+        <p:spPr>
+          <a:xfrm>
+            <a:off x="0" y="0"/>
+            <a:ext cx="12191695" cy="6858000"/>
+          </a:xfrm>
+          <a:prstGeom prst="rect">
+            <a:avLst/>
+          </a:prstGeom>
+          <a:solidFill>
+            <a:srgbClr val="F7F9FC"/>
+          </a:solidFill>
+          <a:ln>
+            <a:noFill/>
+          </a:ln>
+        </p:spPr>
+        <p:style>
+          <a:lnRef idx="1">
+            <a:schemeClr val="accent1"/>
+          </a:lnRef>
+          <a:fillRef idx="3">
+            <a:schemeClr val="accent1"/>
+          </a:fillRef>
+          <a:effectRef idx="2">
+            <a:schemeClr val="accent1"/>
+          </a:effectRef>
+          <a:fontRef idx="minor">
+            <a:schemeClr val="lt1"/>
+          </a:fontRef>
+        </p:style>
+        <p:txBody>
+          <a:bodyPr rtlCol="0" anchor="ctr"/>
+          <a:lstStyle/>
+          <a:p>
+            <a:pPr algn="ctr"/>
+            <a:endParaRPr/>
+          </a:p>
+        </p:txBody>
+      </p:sp>
+      <p:sp>
+        <p:nvSpPr>
+          <p:cNvPr id="3" name="Rectangle 2"/>
+          <p:cNvSpPr/>
+          <p:nvPr/>
+        </p:nvSpPr>
+        <p:spPr>
+          <a:xfrm>
+            <a:off x="502920" y="502920"/>
+            <a:ext cx="109728" cy="685800"/>
+          </a:xfrm>
+          <a:prstGeom prst="rect">
+            <a:avLst/>
+          </a:prstGeom>
+          <a:solidFill>
+            <a:srgbClr val="245B91"/>
+          </a:solidFill>
+          <a:ln>
+            <a:noFill/>
+          </a:ln>
+        </p:spPr>
+        <p:style>
+          <a:lnRef idx="1">
+            <a:schemeClr val="accent1"/>
+          </a:lnRef>
+          <a:fillRef idx="3">
+            <a:schemeClr val="accent1"/>
+          </a:fillRef>
+          <a:effectRef idx="2">
+            <a:schemeClr val="accent1"/>
+          </a:effectRef>
+          <a:fontRef idx="minor">
+            <a:schemeClr val="lt1"/>
+          </a:fontRef>
+        </p:style>
+        <p:txBody>
+          <a:bodyPr rtlCol="0" anchor="ctr"/>
+          <a:lstStyle/>
+          <a:p>
+            <a:pPr algn="ctr"/>
+            <a:endParaRPr/>
+          </a:p>
+        </p:txBody>
+      </p:sp>
+      <p:sp>
+        <p:nvSpPr>
+          <p:cNvPr id="4" name="TextBox 3"/>
+          <p:cNvSpPr txBox="1"/>
+          <p:nvPr/>
+        </p:nvSpPr>
+        <p:spPr>
+          <a:xfrm>
+            <a:off x="777240" y="475488"/>
+            <a:ext cx="3784754" cy="507831"/>
+          </a:xfrm>
+          <a:prstGeom prst="rect">
+            <a:avLst/>
+          </a:prstGeom>
+          <a:noFill/>
+        </p:spPr>
+        <p:txBody>
+          <a:bodyPr wrap="none">
+            <a:spAutoFit/>
+          </a:bodyPr>
+          <a:lstStyle/>
+          <a:p>
+            <a:pPr>
+              <a:defRPr sz="2700" b="1">
+                <a:solidFill>
+                  <a:srgbClr val="0F2747"/>
+                </a:solidFill>
+                <a:latin typeface="Aptos Display"/>
+              </a:defRPr>
+            </a:pPr>
+            <a:r>
+              <a:rPr dirty="0" err="1"/>
+              <a:t>Clientes</a:t>
+            </a:r>
+            <a:r>
+              <a:rPr dirty="0"/>
+              <a:t> e </a:t>
+            </a:r>
+            <a:r>
+              <a:rPr lang="pt-BR" dirty="0"/>
+              <a:t>a</a:t>
+            </a:r>
+            <a:r>
+              <a:rPr dirty="0" err="1"/>
+              <a:t>doção</a:t>
+            </a:r>
+            <a:r>
+              <a:rPr dirty="0"/>
+              <a:t> </a:t>
+            </a:r>
+            <a:r>
+              <a:rPr lang="pt-BR" dirty="0"/>
+              <a:t>d</a:t>
+            </a:r>
+            <a:r>
+              <a:rPr dirty="0" err="1"/>
+              <a:t>igital</a:t>
+            </a:r>
+            <a:endParaRPr dirty="0"/>
+          </a:p>
+        </p:txBody>
+      </p:sp>
+      <p:sp>
+        <p:nvSpPr>
+          <p:cNvPr id="5" name="TextBox 4"/>
+          <p:cNvSpPr txBox="1"/>
+          <p:nvPr/>
+        </p:nvSpPr>
+        <p:spPr>
+          <a:xfrm>
+            <a:off x="786384" y="1024128"/>
+            <a:ext cx="10424160" cy="411480"/>
+          </a:xfrm>
+          <a:prstGeom prst="rect">
+            <a:avLst/>
+          </a:prstGeom>
+          <a:noFill/>
+        </p:spPr>
+        <p:txBody>
+          <a:bodyPr wrap="none">
+            <a:spAutoFit/>
+          </a:bodyPr>
+          <a:lstStyle/>
+          <a:p>
+            <a:pPr>
+              <a:defRPr sz="1200">
+                <a:solidFill>
+                  <a:srgbClr val="5D6978"/>
+                </a:solidFill>
+                <a:latin typeface="Aptos"/>
+              </a:defRPr>
+            </a:pPr>
+            <a:r>
+              <a:t>Evolução da atividade da base e expansão do canal digital</a:t>
+            </a:r>
+          </a:p>
+        </p:txBody>
+      </p:sp>
+      <p:sp>
+        <p:nvSpPr>
+          <p:cNvPr id="6" name="TextBox 5"/>
+          <p:cNvSpPr txBox="1"/>
+          <p:nvPr/>
+        </p:nvSpPr>
+        <p:spPr>
+          <a:xfrm>
+            <a:off x="11155680" y="502920"/>
+            <a:ext cx="457200" cy="365760"/>
+          </a:xfrm>
+          <a:prstGeom prst="rect">
+            <a:avLst/>
+          </a:prstGeom>
+          <a:noFill/>
+        </p:spPr>
+        <p:txBody>
+          <a:bodyPr wrap="none">
+            <a:spAutoFit/>
+          </a:bodyPr>
+          <a:lstStyle/>
+          <a:p>
+            <a:pPr algn="r">
+              <a:defRPr sz="1100" b="1">
+                <a:solidFill>
+                  <a:srgbClr val="5D6978"/>
+                </a:solidFill>
+                <a:latin typeface="Aptos"/>
+              </a:defRPr>
+            </a:pPr>
+            <a:r>
+              <a:t>07</a:t>
+            </a:r>
+          </a:p>
+        </p:txBody>
+      </p:sp>
+      <p:sp>
+        <p:nvSpPr>
+          <p:cNvPr id="7" name="Rounded Rectangle 6"/>
+          <p:cNvSpPr/>
+          <p:nvPr/>
+        </p:nvSpPr>
+        <p:spPr>
+          <a:xfrm>
+            <a:off x="822960" y="1508760"/>
+            <a:ext cx="3383280" cy="1920240"/>
+          </a:xfrm>
+          <a:prstGeom prst="roundRect">
+            <a:avLst/>
+          </a:prstGeom>
+          <a:solidFill>
+            <a:srgbClr val="FFFFFF"/>
+          </a:solidFill>
+          <a:ln>
+            <a:solidFill>
+              <a:srgbClr val="DCE1E8"/>
+            </a:solidFill>
+          </a:ln>
+        </p:spPr>
+        <p:style>
+          <a:lnRef idx="1">
+            <a:schemeClr val="accent1"/>
+          </a:lnRef>
+          <a:fillRef idx="3">
+            <a:schemeClr val="accent1"/>
+          </a:fillRef>
+          <a:effectRef idx="2">
+            <a:schemeClr val="accent1"/>
+          </a:effectRef>
+          <a:fontRef idx="minor">
+            <a:schemeClr val="lt1"/>
+          </a:fontRef>
+        </p:style>
+        <p:txBody>
+          <a:bodyPr rtlCol="0" anchor="ctr"/>
+          <a:lstStyle/>
+          <a:p>
+            <a:pPr algn="ctr"/>
+            <a:endParaRPr/>
+          </a:p>
+        </p:txBody>
+      </p:sp>
+      <p:sp>
+        <p:nvSpPr>
+          <p:cNvPr id="8" name="Rectangle 7"/>
+          <p:cNvSpPr/>
+          <p:nvPr/>
+        </p:nvSpPr>
+        <p:spPr>
+          <a:xfrm>
+            <a:off x="822960" y="1508760"/>
+            <a:ext cx="73152" cy="1920240"/>
+          </a:xfrm>
+          <a:prstGeom prst="rect">
+            <a:avLst/>
+          </a:prstGeom>
+          <a:solidFill>
+            <a:srgbClr val="245B91"/>
+          </a:solidFill>
+          <a:ln>
+            <a:noFill/>
+          </a:ln>
+        </p:spPr>
+        <p:style>
+          <a:lnRef idx="1">
+            <a:schemeClr val="accent1"/>
+          </a:lnRef>
+          <a:fillRef idx="3">
+            <a:schemeClr val="accent1"/>
+          </a:fillRef>
+          <a:effectRef idx="2">
+            <a:schemeClr val="accent1"/>
+          </a:effectRef>
+          <a:fontRef idx="minor">
+            <a:schemeClr val="lt1"/>
+          </a:fontRef>
+        </p:style>
+        <p:txBody>
+          <a:bodyPr rtlCol="0" anchor="ctr"/>
+          <a:lstStyle/>
+          <a:p>
+            <a:pPr algn="ctr"/>
+            <a:endParaRPr/>
+          </a:p>
+        </p:txBody>
+      </p:sp>
+      <p:sp>
+        <p:nvSpPr>
+          <p:cNvPr id="9" name="TextBox 8"/>
+          <p:cNvSpPr txBox="1"/>
+          <p:nvPr/>
+        </p:nvSpPr>
+        <p:spPr>
+          <a:xfrm>
+            <a:off x="1051560" y="1691639"/>
+            <a:ext cx="2971800" cy="1600200"/>
+          </a:xfrm>
+          <a:prstGeom prst="rect">
+            <a:avLst/>
+          </a:prstGeom>
+          <a:noFill/>
+        </p:spPr>
+        <p:txBody>
+          <a:bodyPr wrap="square">
+            <a:spAutoFit/>
+          </a:bodyPr>
+          <a:lstStyle/>
+          <a:p>
+            <a:pPr>
+              <a:defRPr sz="1500" b="1">
+                <a:solidFill>
+                  <a:srgbClr val="0F2747"/>
+                </a:solidFill>
+                <a:latin typeface="Aptos"/>
+              </a:defRPr>
+            </a:pPr>
+            <a:r>
+              <a:t>Atividade</a:t>
+            </a:r>
+          </a:p>
+          <a:p>
+            <a:pPr>
+              <a:spcBef>
+                <a:spcPts val="600"/>
+              </a:spcBef>
+              <a:defRPr sz="1150">
+                <a:solidFill>
+                  <a:srgbClr val="1F2937"/>
+                </a:solidFill>
+                <a:latin typeface="Aptos"/>
+              </a:defRPr>
+            </a:pPr>
+            <a:r>
+              <a:t>58,7% em 2020</a:t>
+            </a:r>
+            <a:br/>
+            <a:r>
+              <a:t>66,2% em 2021</a:t>
+            </a:r>
+            <a:br/>
+            <a:r>
+              <a:t>78,4% em 2022</a:t>
+            </a:r>
+          </a:p>
+        </p:txBody>
+      </p:sp>
+      <p:sp>
+        <p:nvSpPr>
+          <p:cNvPr id="10" name="Rounded Rectangle 9"/>
+          <p:cNvSpPr/>
+          <p:nvPr/>
+        </p:nvSpPr>
+        <p:spPr>
+          <a:xfrm>
+            <a:off x="4407408" y="1508760"/>
+            <a:ext cx="3383280" cy="1920240"/>
+          </a:xfrm>
+          <a:prstGeom prst="roundRect">
+            <a:avLst/>
+          </a:prstGeom>
+          <a:solidFill>
+            <a:srgbClr val="FFFFFF"/>
+          </a:solidFill>
+          <a:ln>
+            <a:solidFill>
+              <a:srgbClr val="DCE1E8"/>
+            </a:solidFill>
+          </a:ln>
+        </p:spPr>
+        <p:style>
+          <a:lnRef idx="1">
+            <a:schemeClr val="accent1"/>
+          </a:lnRef>
+          <a:fillRef idx="3">
+            <a:schemeClr val="accent1"/>
+          </a:fillRef>
+          <a:effectRef idx="2">
+            <a:schemeClr val="accent1"/>
+          </a:effectRef>
+          <a:fontRef idx="minor">
+            <a:schemeClr val="lt1"/>
+          </a:fontRef>
+        </p:style>
+        <p:txBody>
+          <a:bodyPr rtlCol="0" anchor="ctr"/>
+          <a:lstStyle/>
+          <a:p>
+            <a:pPr algn="ctr"/>
+            <a:endParaRPr/>
+          </a:p>
+        </p:txBody>
+      </p:sp>
+      <p:sp>
+        <p:nvSpPr>
+          <p:cNvPr id="11" name="Rectangle 10"/>
+          <p:cNvSpPr/>
+          <p:nvPr/>
+        </p:nvSpPr>
+        <p:spPr>
+          <a:xfrm>
+            <a:off x="4407408" y="1508760"/>
+            <a:ext cx="73152" cy="1920240"/>
+          </a:xfrm>
+          <a:prstGeom prst="rect">
+            <a:avLst/>
+          </a:prstGeom>
+          <a:solidFill>
+            <a:srgbClr val="E58F40"/>
+          </a:solidFill>
+          <a:ln>
+            <a:noFill/>
+          </a:ln>
+        </p:spPr>
+        <p:style>
+          <a:lnRef idx="1">
+            <a:schemeClr val="accent1"/>
+          </a:lnRef>
+          <a:fillRef idx="3">
+            <a:schemeClr val="accent1"/>
+          </a:fillRef>
+          <a:effectRef idx="2">
+            <a:schemeClr val="accent1"/>
+          </a:effectRef>
+          <a:fontRef idx="minor">
+            <a:schemeClr val="lt1"/>
+          </a:fontRef>
+        </p:style>
+        <p:txBody>
+          <a:bodyPr rtlCol="0" anchor="ctr"/>
+          <a:lstStyle/>
+          <a:p>
+            <a:pPr algn="ctr"/>
+            <a:endParaRPr/>
+          </a:p>
+        </p:txBody>
+      </p:sp>
+      <p:sp>
+        <p:nvSpPr>
+          <p:cNvPr id="12" name="TextBox 11"/>
+          <p:cNvSpPr txBox="1"/>
+          <p:nvPr/>
+        </p:nvSpPr>
+        <p:spPr>
+          <a:xfrm>
+            <a:off x="4636008" y="1691639"/>
+            <a:ext cx="2971800" cy="754053"/>
+          </a:xfrm>
+          <a:prstGeom prst="rect">
+            <a:avLst/>
+          </a:prstGeom>
+          <a:noFill/>
+        </p:spPr>
+        <p:txBody>
+          <a:bodyPr wrap="square">
+            <a:spAutoFit/>
+          </a:bodyPr>
+          <a:lstStyle/>
+          <a:p>
+            <a:pPr>
+              <a:defRPr sz="1500" b="1">
+                <a:solidFill>
+                  <a:srgbClr val="0F2747"/>
+                </a:solidFill>
+                <a:latin typeface="Aptos"/>
+              </a:defRPr>
+            </a:pPr>
+            <a:r>
+              <a:rPr dirty="0"/>
+              <a:t>Base </a:t>
+            </a:r>
+            <a:r>
+              <a:rPr lang="pt-BR" dirty="0"/>
+              <a:t>d</a:t>
+            </a:r>
+            <a:r>
+              <a:rPr dirty="0" err="1"/>
+              <a:t>igital</a:t>
+            </a:r>
+            <a:r>
+              <a:rPr dirty="0"/>
+              <a:t> </a:t>
+            </a:r>
+            <a:r>
+              <a:rPr dirty="0" err="1"/>
+              <a:t>em</a:t>
+            </a:r>
+            <a:r>
+              <a:rPr dirty="0"/>
+              <a:t> 2022</a:t>
+            </a:r>
+          </a:p>
+          <a:p>
+            <a:pPr>
+              <a:spcBef>
+                <a:spcPts val="600"/>
+              </a:spcBef>
+              <a:defRPr sz="1150">
+                <a:solidFill>
+                  <a:srgbClr val="1F2937"/>
+                </a:solidFill>
+                <a:latin typeface="Aptos"/>
+              </a:defRPr>
+            </a:pPr>
+            <a:r>
+              <a:rPr dirty="0"/>
+              <a:t>460 </a:t>
+            </a:r>
+            <a:r>
+              <a:rPr dirty="0" err="1"/>
+              <a:t>contas</a:t>
+            </a:r>
+            <a:r>
+              <a:rPr dirty="0"/>
+              <a:t> </a:t>
+            </a:r>
+            <a:r>
+              <a:rPr dirty="0" err="1"/>
+              <a:t>digitais</a:t>
+            </a:r>
+            <a:r>
+              <a:rPr dirty="0"/>
+              <a:t> </a:t>
+            </a:r>
+            <a:r>
+              <a:rPr dirty="0" err="1"/>
+              <a:t>acumuladas</a:t>
+            </a:r>
+            <a:br>
+              <a:rPr dirty="0"/>
+            </a:br>
+            <a:r>
+              <a:rPr dirty="0"/>
+              <a:t>vs. 539 </a:t>
+            </a:r>
+            <a:r>
+              <a:rPr dirty="0" err="1"/>
+              <a:t>contas</a:t>
+            </a:r>
+            <a:r>
+              <a:rPr dirty="0"/>
+              <a:t> </a:t>
+            </a:r>
+            <a:r>
+              <a:rPr dirty="0" err="1"/>
+              <a:t>físicas</a:t>
+            </a:r>
+            <a:endParaRPr dirty="0"/>
+          </a:p>
+        </p:txBody>
+      </p:sp>
+      <p:sp>
+        <p:nvSpPr>
+          <p:cNvPr id="13" name="Rounded Rectangle 12"/>
+          <p:cNvSpPr/>
+          <p:nvPr/>
+        </p:nvSpPr>
+        <p:spPr>
+          <a:xfrm>
+            <a:off x="7991856" y="1508760"/>
+            <a:ext cx="3383280" cy="1920240"/>
+          </a:xfrm>
+          <a:prstGeom prst="roundRect">
+            <a:avLst/>
+          </a:prstGeom>
+          <a:solidFill>
+            <a:srgbClr val="FFFFFF"/>
+          </a:solidFill>
+          <a:ln>
+            <a:solidFill>
+              <a:srgbClr val="DCE1E8"/>
+            </a:solidFill>
+          </a:ln>
+        </p:spPr>
+        <p:style>
+          <a:lnRef idx="1">
+            <a:schemeClr val="accent1"/>
+          </a:lnRef>
+          <a:fillRef idx="3">
+            <a:schemeClr val="accent1"/>
+          </a:fillRef>
+          <a:effectRef idx="2">
+            <a:schemeClr val="accent1"/>
+          </a:effectRef>
+          <a:fontRef idx="minor">
+            <a:schemeClr val="lt1"/>
+          </a:fontRef>
+        </p:style>
+        <p:txBody>
+          <a:bodyPr rtlCol="0" anchor="ctr"/>
+          <a:lstStyle/>
+          <a:p>
+            <a:pPr algn="ctr"/>
+            <a:endParaRPr/>
+          </a:p>
+        </p:txBody>
+      </p:sp>
+      <p:sp>
+        <p:nvSpPr>
+          <p:cNvPr id="14" name="Rectangle 13"/>
+          <p:cNvSpPr/>
+          <p:nvPr/>
+        </p:nvSpPr>
+        <p:spPr>
+          <a:xfrm>
+            <a:off x="7991856" y="1508760"/>
+            <a:ext cx="73152" cy="1920240"/>
+          </a:xfrm>
+          <a:prstGeom prst="rect">
+            <a:avLst/>
+          </a:prstGeom>
+          <a:solidFill>
+            <a:srgbClr val="76528E"/>
+          </a:solidFill>
+          <a:ln>
+            <a:noFill/>
+          </a:ln>
+        </p:spPr>
+        <p:style>
+          <a:lnRef idx="1">
+            <a:schemeClr val="accent1"/>
+          </a:lnRef>
+          <a:fillRef idx="3">
+            <a:schemeClr val="accent1"/>
+          </a:fillRef>
+          <a:effectRef idx="2">
+            <a:schemeClr val="accent1"/>
+          </a:effectRef>
+          <a:fontRef idx="minor">
+            <a:schemeClr val="lt1"/>
+          </a:fontRef>
+        </p:style>
+        <p:txBody>
+          <a:bodyPr rtlCol="0" anchor="ctr"/>
+          <a:lstStyle/>
+          <a:p>
+            <a:pPr algn="ctr"/>
+            <a:endParaRPr/>
+          </a:p>
+        </p:txBody>
+      </p:sp>
+      <p:sp>
+        <p:nvSpPr>
+          <p:cNvPr id="15" name="TextBox 14"/>
+          <p:cNvSpPr txBox="1"/>
+          <p:nvPr/>
+        </p:nvSpPr>
+        <p:spPr>
+          <a:xfrm>
+            <a:off x="8220456" y="1691639"/>
+            <a:ext cx="2971800" cy="1600200"/>
+          </a:xfrm>
+          <a:prstGeom prst="rect">
+            <a:avLst/>
+          </a:prstGeom>
+          <a:noFill/>
+        </p:spPr>
+        <p:txBody>
+          <a:bodyPr wrap="square">
+            <a:spAutoFit/>
+          </a:bodyPr>
+          <a:lstStyle/>
+          <a:p>
+            <a:pPr>
+              <a:defRPr sz="1500" b="1">
+                <a:solidFill>
+                  <a:srgbClr val="0F2747"/>
+                </a:solidFill>
+                <a:latin typeface="Aptos"/>
+              </a:defRPr>
+            </a:pPr>
+            <a:r>
+              <a:t>Evolução do canal</a:t>
+            </a:r>
+          </a:p>
+          <a:p>
+            <a:pPr>
+              <a:spcBef>
+                <a:spcPts val="600"/>
+              </a:spcBef>
+              <a:defRPr sz="1150">
+                <a:solidFill>
+                  <a:srgbClr val="1F2937"/>
+                </a:solidFill>
+                <a:latin typeface="Aptos"/>
+              </a:defRPr>
+            </a:pPr>
+            <a:r>
+              <a:t>A diferença entre as bases caiu de 188 contas em 2015 para 79 em 2022.</a:t>
+            </a:r>
+          </a:p>
+        </p:txBody>
+      </p:sp>
+      <p:sp>
+        <p:nvSpPr>
+          <p:cNvPr id="16" name="TextBox 15"/>
+          <p:cNvSpPr txBox="1"/>
+          <p:nvPr/>
+        </p:nvSpPr>
+        <p:spPr>
+          <a:xfrm>
+            <a:off x="914400" y="3886200"/>
+            <a:ext cx="10360465" cy="1097736"/>
+          </a:xfrm>
+          <a:prstGeom prst="rect">
+            <a:avLst/>
+          </a:prstGeom>
+          <a:noFill/>
+        </p:spPr>
+        <p:txBody>
+          <a:bodyPr wrap="none">
+            <a:spAutoFit/>
+          </a:bodyPr>
+          <a:lstStyle/>
+          <a:p>
+            <a:pPr>
+              <a:defRPr sz="1600" b="1">
+                <a:solidFill>
+                  <a:srgbClr val="0F2747"/>
+                </a:solidFill>
+                <a:latin typeface="Aptos"/>
+              </a:defRPr>
+            </a:pPr>
+            <a:r>
+              <a:rPr dirty="0" err="1"/>
+              <a:t>Leitura</a:t>
+            </a:r>
+            <a:r>
+              <a:rPr dirty="0"/>
+              <a:t> </a:t>
+            </a:r>
+            <a:r>
+              <a:rPr dirty="0" err="1"/>
+              <a:t>comercial</a:t>
+            </a:r>
+            <a:r>
+              <a:rPr lang="pt-BR" dirty="0"/>
+              <a:t>:</a:t>
+            </a:r>
+            <a:endParaRPr dirty="0"/>
+          </a:p>
+          <a:p>
+            <a:pPr>
+              <a:spcBef>
+                <a:spcPts val="800"/>
+              </a:spcBef>
+              <a:defRPr sz="1800">
+                <a:solidFill>
+                  <a:srgbClr val="1F2937"/>
+                </a:solidFill>
+                <a:latin typeface="Aptos"/>
+              </a:defRPr>
+            </a:pPr>
+            <a:r>
+              <a:rPr dirty="0"/>
+              <a:t>A </a:t>
+            </a:r>
+            <a:r>
+              <a:rPr dirty="0" err="1"/>
+              <a:t>recuperação</a:t>
+            </a:r>
+            <a:r>
+              <a:rPr dirty="0"/>
+              <a:t> da </a:t>
+            </a:r>
+            <a:r>
+              <a:rPr dirty="0" err="1"/>
+              <a:t>atividade</a:t>
+            </a:r>
+            <a:r>
+              <a:rPr dirty="0"/>
+              <a:t> e a </a:t>
+            </a:r>
+            <a:r>
+              <a:rPr dirty="0" err="1"/>
+              <a:t>expansão</a:t>
+            </a:r>
+            <a:r>
+              <a:rPr dirty="0"/>
+              <a:t> do canal digital </a:t>
+            </a:r>
+            <a:r>
+              <a:rPr dirty="0" err="1"/>
+              <a:t>indicam</a:t>
+            </a:r>
+            <a:r>
+              <a:rPr dirty="0"/>
+              <a:t> </a:t>
+            </a:r>
+            <a:r>
+              <a:rPr dirty="0" err="1"/>
+              <a:t>espaço</a:t>
+            </a:r>
+            <a:r>
+              <a:rPr dirty="0"/>
+              <a:t> para </a:t>
+            </a:r>
+            <a:r>
+              <a:rPr dirty="0" err="1"/>
+              <a:t>estratégias</a:t>
+            </a:r>
+            <a:r>
+              <a:rPr dirty="0"/>
+              <a:t> de </a:t>
+            </a:r>
+            <a:r>
+              <a:rPr dirty="0" err="1"/>
+              <a:t>retenção</a:t>
+            </a:r>
+            <a:r>
+              <a:rPr dirty="0"/>
+              <a:t>,</a:t>
+            </a:r>
+            <a:endParaRPr lang="pt-BR" dirty="0"/>
+          </a:p>
+          <a:p>
+            <a:pPr>
+              <a:spcBef>
+                <a:spcPts val="800"/>
+              </a:spcBef>
+              <a:defRPr sz="1800">
+                <a:solidFill>
+                  <a:srgbClr val="1F2937"/>
+                </a:solidFill>
+                <a:latin typeface="Aptos"/>
+              </a:defRPr>
+            </a:pPr>
+            <a:r>
+              <a:rPr dirty="0" err="1"/>
+              <a:t>reativação</a:t>
+            </a:r>
+            <a:r>
+              <a:rPr dirty="0"/>
+              <a:t> e </a:t>
+            </a:r>
+            <a:r>
+              <a:rPr dirty="0" err="1"/>
+              <a:t>engajamento</a:t>
+            </a:r>
+            <a:r>
+              <a:rPr dirty="0"/>
+              <a:t> digital, </a:t>
+            </a:r>
+            <a:r>
+              <a:rPr dirty="0" err="1"/>
+              <a:t>sem</a:t>
+            </a:r>
+            <a:r>
+              <a:rPr dirty="0"/>
+              <a:t> </a:t>
+            </a:r>
+            <a:r>
+              <a:rPr dirty="0" err="1"/>
+              <a:t>desconsiderar</a:t>
+            </a:r>
+            <a:r>
+              <a:rPr dirty="0"/>
+              <a:t> a </a:t>
+            </a:r>
+            <a:r>
+              <a:rPr dirty="0" err="1"/>
+              <a:t>relevância</a:t>
+            </a:r>
+            <a:r>
+              <a:rPr dirty="0"/>
+              <a:t> do canal </a:t>
+            </a:r>
+            <a:r>
+              <a:rPr dirty="0" err="1"/>
+              <a:t>físico</a:t>
+            </a:r>
+            <a:r>
+              <a:rPr dirty="0"/>
+              <a:t>.</a:t>
+            </a:r>
+          </a:p>
+        </p:txBody>
+      </p:sp>
+      <p:sp>
+        <p:nvSpPr>
+          <p:cNvPr id="17" name="Rectangle 16"/>
+          <p:cNvSpPr/>
+          <p:nvPr/>
+        </p:nvSpPr>
+        <p:spPr>
+          <a:xfrm>
+            <a:off x="594360" y="6473952"/>
+            <a:ext cx="10972800" cy="13716"/>
+          </a:xfrm>
+          <a:prstGeom prst="rect">
+            <a:avLst/>
+          </a:prstGeom>
+          <a:solidFill>
+            <a:srgbClr val="DCE1E8"/>
+          </a:solidFill>
+          <a:ln>
+            <a:noFill/>
+          </a:ln>
+        </p:spPr>
+        <p:style>
+          <a:lnRef idx="1">
+            <a:schemeClr val="accent1"/>
+          </a:lnRef>
+          <a:fillRef idx="3">
+            <a:schemeClr val="accent1"/>
+          </a:fillRef>
+          <a:effectRef idx="2">
+            <a:schemeClr val="accent1"/>
+          </a:effectRef>
+          <a:fontRef idx="minor">
+            <a:schemeClr val="lt1"/>
+          </a:fontRef>
+        </p:style>
+        <p:txBody>
+          <a:bodyPr rtlCol="0" anchor="ctr"/>
+          <a:lstStyle/>
+          <a:p>
+            <a:pPr algn="ctr"/>
+            <a:endParaRPr/>
+          </a:p>
+        </p:txBody>
+      </p:sp>
+      <p:sp>
+        <p:nvSpPr>
+          <p:cNvPr id="18" name="TextBox 17"/>
+          <p:cNvSpPr txBox="1"/>
+          <p:nvPr/>
+        </p:nvSpPr>
+        <p:spPr>
+          <a:xfrm>
+            <a:off x="640080" y="6510528"/>
+            <a:ext cx="4572000" cy="201168"/>
+          </a:xfrm>
+          <a:prstGeom prst="rect">
+            <a:avLst/>
+          </a:prstGeom>
+          <a:noFill/>
+        </p:spPr>
+        <p:txBody>
+          <a:bodyPr wrap="none">
+            <a:spAutoFit/>
+          </a:bodyPr>
+          <a:lstStyle/>
+          <a:p>
+            <a:pPr>
+              <a:defRPr sz="800">
+                <a:solidFill>
+                  <a:srgbClr val="5D6978"/>
+                </a:solidFill>
+                <a:latin typeface="Aptos"/>
+              </a:defRPr>
+            </a:pPr>
+            <a:r>
+              <a:t>BanVic | Dashboard Comercial</a:t>
+            </a:r>
+          </a:p>
+        </p:txBody>
+      </p:sp>
+      <p:pic>
+        <p:nvPicPr>
+          <p:cNvPr id="20" name="Graphic 19" descr="Upstairs outline">
+            <a:extLst>
+              <a:ext uri="{FF2B5EF4-FFF2-40B4-BE49-F238E27FC236}">
+                <a16:creationId xmlns:a16="http://schemas.microsoft.com/office/drawing/2014/main" id="{CA363C0D-1D40-7A13-537F-23962BF625CC}"/>
+              </a:ext>
+            </a:extLst>
+          </p:cNvPr>
+          <p:cNvPicPr>
+            <a:picLocks noChangeAspect="1"/>
+          </p:cNvPicPr>
+          <p:nvPr/>
+        </p:nvPicPr>
+        <p:blipFill>
+          <a:blip>
+            <a:extLst>
+              <a:ext uri="{96DAC541-7B7A-43D3-8B79-37D633B846F1}">
+                <asvg:svgBlip xmlns:asvg="http://schemas.microsoft.com/office/drawing/2016/SVG/main" r:embed="rId2"/>
+              </a:ext>
+            </a:extLst>
+          </a:blip>
+          <a:stretch>
+            <a:fillRect/>
+          </a:stretch>
+        </p:blipFill>
+        <p:spPr>
+          <a:xfrm>
+            <a:off x="2537460" y="1783080"/>
+            <a:ext cx="914400" cy="914400"/>
+          </a:xfrm>
+          <a:prstGeom prst="rect">
+            <a:avLst/>
+          </a:prstGeom>
+        </p:spPr>
+      </p:pic>
+    </p:spTree>
+  </p:cSld>
+  <p:clrMapOvr>
+    <a:masterClrMapping/>
+  </p:clrMapOvr>
+</p:sld>
+</file>
+
+<file path=ppt/slides/slide5.xml><?xml version="1.0" encoding="utf-8"?>
+<p:sld xmlns:a="http://schemas.openxmlformats.org/drawingml/2006/main" xmlns:r="http://schemas.openxmlformats.org/officeDocument/2006/relationships" xmlns:p="http://schemas.openxmlformats.org/presentationml/2006/main" show="0">
+  <p:cSld>
+    <p:spTree>
+      <p:nvGrpSpPr>
+        <p:cNvPr id="1" name=""/>
+        <p:cNvGrpSpPr/>
+        <p:nvPr/>
+      </p:nvGrpSpPr>
+      <p:grpSpPr>
+        <a:xfrm>
+          <a:off x="0" y="0"/>
+          <a:ext cx="0" cy="0"/>
+          <a:chOff x="0" y="0"/>
+          <a:chExt cx="0" cy="0"/>
+        </a:xfrm>
+      </p:grpSpPr>
+      <p:sp>
+        <p:nvSpPr>
+          <p:cNvPr id="2" name="Rectangle 1"/>
+          <p:cNvSpPr/>
+          <p:nvPr/>
+        </p:nvSpPr>
+        <p:spPr>
+          <a:xfrm>
+            <a:off x="0" y="0"/>
+            <a:ext cx="12191695" cy="6858000"/>
+          </a:xfrm>
+          <a:prstGeom prst="rect">
+            <a:avLst/>
+          </a:prstGeom>
+          <a:solidFill>
+            <a:srgbClr val="F7F9FC"/>
+          </a:solidFill>
+          <a:ln>
+            <a:noFill/>
+          </a:ln>
+        </p:spPr>
+        <p:style>
+          <a:lnRef idx="1">
+            <a:schemeClr val="accent1"/>
+          </a:lnRef>
+          <a:fillRef idx="3">
+            <a:schemeClr val="accent1"/>
+          </a:fillRef>
+          <a:effectRef idx="2">
+            <a:schemeClr val="accent1"/>
+          </a:effectRef>
+          <a:fontRef idx="minor">
+            <a:schemeClr val="lt1"/>
+          </a:fontRef>
+        </p:style>
+        <p:txBody>
+          <a:bodyPr rtlCol="0" anchor="ctr"/>
+          <a:lstStyle/>
+          <a:p>
+            <a:pPr algn="ctr"/>
+            <a:endParaRPr/>
+          </a:p>
+        </p:txBody>
+      </p:sp>
+      <p:sp>
+        <p:nvSpPr>
+          <p:cNvPr id="3" name="Rectangle 2"/>
+          <p:cNvSpPr/>
+          <p:nvPr/>
+        </p:nvSpPr>
+        <p:spPr>
+          <a:xfrm>
+            <a:off x="502920" y="502920"/>
+            <a:ext cx="109728" cy="685800"/>
+          </a:xfrm>
+          <a:prstGeom prst="rect">
+            <a:avLst/>
+          </a:prstGeom>
+          <a:solidFill>
+            <a:srgbClr val="245B91"/>
+          </a:solidFill>
+          <a:ln>
+            <a:noFill/>
+          </a:ln>
+        </p:spPr>
+        <p:style>
+          <a:lnRef idx="1">
+            <a:schemeClr val="accent1"/>
+          </a:lnRef>
+          <a:fillRef idx="3">
+            <a:schemeClr val="accent1"/>
+          </a:fillRef>
+          <a:effectRef idx="2">
+            <a:schemeClr val="accent1"/>
+          </a:effectRef>
+          <a:fontRef idx="minor">
+            <a:schemeClr val="lt1"/>
+          </a:fontRef>
+        </p:style>
+        <p:txBody>
+          <a:bodyPr rtlCol="0" anchor="ctr"/>
+          <a:lstStyle/>
+          <a:p>
+            <a:pPr algn="ctr"/>
+            <a:endParaRPr/>
+          </a:p>
+        </p:txBody>
+      </p:sp>
+      <p:sp>
+        <p:nvSpPr>
+          <p:cNvPr id="4" name="TextBox 3"/>
+          <p:cNvSpPr txBox="1"/>
+          <p:nvPr/>
+        </p:nvSpPr>
+        <p:spPr>
+          <a:xfrm>
+            <a:off x="777240" y="475488"/>
+            <a:ext cx="4471096" cy="507831"/>
+          </a:xfrm>
+          <a:prstGeom prst="rect">
+            <a:avLst/>
+          </a:prstGeom>
+          <a:noFill/>
+        </p:spPr>
+        <p:txBody>
+          <a:bodyPr wrap="none">
+            <a:spAutoFit/>
+          </a:bodyPr>
+          <a:lstStyle/>
+          <a:p>
+            <a:pPr>
+              <a:defRPr sz="2700" b="1">
+                <a:solidFill>
+                  <a:srgbClr val="0F2747"/>
+                </a:solidFill>
+                <a:latin typeface="Aptos Display"/>
+              </a:defRPr>
+            </a:pPr>
+            <a:r>
+              <a:rPr dirty="0" err="1"/>
+              <a:t>Transações</a:t>
+            </a:r>
+            <a:r>
+              <a:rPr dirty="0"/>
+              <a:t> e </a:t>
+            </a:r>
+            <a:r>
+              <a:rPr lang="pt-BR" dirty="0"/>
+              <a:t>e</a:t>
+            </a:r>
+            <a:r>
+              <a:rPr dirty="0" err="1"/>
+              <a:t>volução</a:t>
+            </a:r>
+            <a:r>
+              <a:rPr dirty="0"/>
+              <a:t> do Pix</a:t>
+            </a:r>
+          </a:p>
+        </p:txBody>
+      </p:sp>
+      <p:sp>
+        <p:nvSpPr>
+          <p:cNvPr id="5" name="TextBox 4"/>
+          <p:cNvSpPr txBox="1"/>
+          <p:nvPr/>
+        </p:nvSpPr>
+        <p:spPr>
+          <a:xfrm>
+            <a:off x="786384" y="1024128"/>
+            <a:ext cx="10424160" cy="411480"/>
+          </a:xfrm>
+          <a:prstGeom prst="rect">
+            <a:avLst/>
+          </a:prstGeom>
+          <a:noFill/>
+        </p:spPr>
+        <p:txBody>
+          <a:bodyPr wrap="none">
+            <a:spAutoFit/>
+          </a:bodyPr>
+          <a:lstStyle/>
+          <a:p>
+            <a:pPr>
+              <a:defRPr sz="1200">
+                <a:solidFill>
+                  <a:srgbClr val="5D6978"/>
+                </a:solidFill>
+                <a:latin typeface="Aptos"/>
+              </a:defRPr>
+            </a:pPr>
+            <a:r>
+              <a:t>Mudança no comportamento transacional e um ponto atípico da série</a:t>
+            </a:r>
+          </a:p>
+        </p:txBody>
+      </p:sp>
+      <p:sp>
+        <p:nvSpPr>
+          <p:cNvPr id="6" name="TextBox 5"/>
+          <p:cNvSpPr txBox="1"/>
+          <p:nvPr/>
+        </p:nvSpPr>
+        <p:spPr>
+          <a:xfrm>
+            <a:off x="11155680" y="502920"/>
+            <a:ext cx="457200" cy="365760"/>
+          </a:xfrm>
+          <a:prstGeom prst="rect">
+            <a:avLst/>
+          </a:prstGeom>
+          <a:noFill/>
+        </p:spPr>
+        <p:txBody>
+          <a:bodyPr wrap="none">
+            <a:spAutoFit/>
+          </a:bodyPr>
+          <a:lstStyle/>
+          <a:p>
+            <a:pPr algn="r">
+              <a:defRPr sz="1100" b="1">
+                <a:solidFill>
+                  <a:srgbClr val="5D6978"/>
+                </a:solidFill>
+                <a:latin typeface="Aptos"/>
+              </a:defRPr>
+            </a:pPr>
+            <a:r>
+              <a:t>08</a:t>
+            </a:r>
+          </a:p>
+        </p:txBody>
+      </p:sp>
+      <p:sp>
+        <p:nvSpPr>
+          <p:cNvPr id="7" name="Rounded Rectangle 6"/>
+          <p:cNvSpPr/>
+          <p:nvPr/>
+        </p:nvSpPr>
+        <p:spPr>
+          <a:xfrm>
+            <a:off x="777240" y="1463040"/>
+            <a:ext cx="3337560" cy="1600200"/>
+          </a:xfrm>
+          <a:prstGeom prst="roundRect">
+            <a:avLst/>
+          </a:prstGeom>
+          <a:solidFill>
+            <a:srgbClr val="FFFFFF"/>
+          </a:solidFill>
+          <a:ln>
+            <a:solidFill>
+              <a:srgbClr val="DCE1E8"/>
+            </a:solidFill>
+          </a:ln>
+        </p:spPr>
+        <p:style>
+          <a:lnRef idx="1">
+            <a:schemeClr val="accent1"/>
+          </a:lnRef>
+          <a:fillRef idx="3">
+            <a:schemeClr val="accent1"/>
+          </a:fillRef>
+          <a:effectRef idx="2">
+            <a:schemeClr val="accent1"/>
+          </a:effectRef>
+          <a:fontRef idx="minor">
+            <a:schemeClr val="lt1"/>
+          </a:fontRef>
+        </p:style>
+        <p:txBody>
+          <a:bodyPr rtlCol="0" anchor="ctr"/>
+          <a:lstStyle/>
+          <a:p>
+            <a:pPr algn="ctr"/>
+            <a:endParaRPr/>
+          </a:p>
+        </p:txBody>
+      </p:sp>
+      <p:sp>
+        <p:nvSpPr>
+          <p:cNvPr id="8" name="Rectangle 7"/>
+          <p:cNvSpPr/>
+          <p:nvPr/>
+        </p:nvSpPr>
+        <p:spPr>
+          <a:xfrm>
+            <a:off x="777240" y="1463040"/>
+            <a:ext cx="73152" cy="1600200"/>
+          </a:xfrm>
+          <a:prstGeom prst="rect">
+            <a:avLst/>
+          </a:prstGeom>
+          <a:solidFill>
+            <a:srgbClr val="245B91"/>
+          </a:solidFill>
+          <a:ln>
+            <a:noFill/>
+          </a:ln>
+        </p:spPr>
+        <p:style>
+          <a:lnRef idx="1">
+            <a:schemeClr val="accent1"/>
+          </a:lnRef>
+          <a:fillRef idx="3">
+            <a:schemeClr val="accent1"/>
+          </a:fillRef>
+          <a:effectRef idx="2">
+            <a:schemeClr val="accent1"/>
+          </a:effectRef>
+          <a:fontRef idx="minor">
+            <a:schemeClr val="lt1"/>
+          </a:fontRef>
+        </p:style>
+        <p:txBody>
+          <a:bodyPr rtlCol="0" anchor="ctr"/>
+          <a:lstStyle/>
+          <a:p>
+            <a:pPr algn="ctr"/>
+            <a:endParaRPr/>
+          </a:p>
+        </p:txBody>
+      </p:sp>
+      <p:sp>
+        <p:nvSpPr>
+          <p:cNvPr id="9" name="TextBox 8"/>
+          <p:cNvSpPr txBox="1"/>
+          <p:nvPr/>
+        </p:nvSpPr>
+        <p:spPr>
+          <a:xfrm>
+            <a:off x="1005840" y="1645920"/>
+            <a:ext cx="2926079" cy="1280160"/>
+          </a:xfrm>
+          <a:prstGeom prst="rect">
+            <a:avLst/>
+          </a:prstGeom>
+          <a:noFill/>
+        </p:spPr>
+        <p:txBody>
+          <a:bodyPr wrap="square">
+            <a:spAutoFit/>
+          </a:bodyPr>
+          <a:lstStyle/>
+          <a:p>
+            <a:pPr>
+              <a:defRPr sz="1500" b="1">
+                <a:solidFill>
+                  <a:srgbClr val="0F2747"/>
+                </a:solidFill>
+                <a:latin typeface="Aptos"/>
+              </a:defRPr>
+            </a:pPr>
+            <a:r>
+              <a:t>59,2%</a:t>
+            </a:r>
+          </a:p>
+          <a:p>
+            <a:pPr>
+              <a:spcBef>
+                <a:spcPts val="600"/>
+              </a:spcBef>
+              <a:defRPr sz="1150">
+                <a:solidFill>
+                  <a:srgbClr val="1F2937"/>
+                </a:solidFill>
+                <a:latin typeface="Aptos"/>
+              </a:defRPr>
+            </a:pPr>
+            <a:r>
+              <a:t>das transações históricas correspondem a compras no crédito ou débito.</a:t>
+            </a:r>
+          </a:p>
+        </p:txBody>
+      </p:sp>
+      <p:sp>
+        <p:nvSpPr>
+          <p:cNvPr id="10" name="Rounded Rectangle 9"/>
+          <p:cNvSpPr/>
+          <p:nvPr/>
+        </p:nvSpPr>
+        <p:spPr>
+          <a:xfrm>
+            <a:off x="4416552" y="1463040"/>
+            <a:ext cx="3337560" cy="1600200"/>
+          </a:xfrm>
+          <a:prstGeom prst="roundRect">
+            <a:avLst/>
+          </a:prstGeom>
+          <a:solidFill>
+            <a:srgbClr val="FFFFFF"/>
+          </a:solidFill>
+          <a:ln>
+            <a:solidFill>
+              <a:srgbClr val="DCE1E8"/>
+            </a:solidFill>
+          </a:ln>
+        </p:spPr>
+        <p:style>
+          <a:lnRef idx="1">
+            <a:schemeClr val="accent1"/>
+          </a:lnRef>
+          <a:fillRef idx="3">
+            <a:schemeClr val="accent1"/>
+          </a:fillRef>
+          <a:effectRef idx="2">
+            <a:schemeClr val="accent1"/>
+          </a:effectRef>
+          <a:fontRef idx="minor">
+            <a:schemeClr val="lt1"/>
+          </a:fontRef>
+        </p:style>
+        <p:txBody>
+          <a:bodyPr rtlCol="0" anchor="ctr"/>
+          <a:lstStyle/>
+          <a:p>
+            <a:pPr algn="ctr"/>
+            <a:endParaRPr/>
+          </a:p>
+        </p:txBody>
+      </p:sp>
+      <p:sp>
+        <p:nvSpPr>
+          <p:cNvPr id="11" name="Rectangle 10"/>
+          <p:cNvSpPr/>
+          <p:nvPr/>
+        </p:nvSpPr>
+        <p:spPr>
+          <a:xfrm>
+            <a:off x="4416552" y="1463040"/>
+            <a:ext cx="73152" cy="1600200"/>
+          </a:xfrm>
+          <a:prstGeom prst="rect">
+            <a:avLst/>
+          </a:prstGeom>
+          <a:solidFill>
+            <a:srgbClr val="76528E"/>
+          </a:solidFill>
+          <a:ln>
+            <a:noFill/>
+          </a:ln>
+        </p:spPr>
+        <p:style>
+          <a:lnRef idx="1">
+            <a:schemeClr val="accent1"/>
+          </a:lnRef>
+          <a:fillRef idx="3">
+            <a:schemeClr val="accent1"/>
+          </a:fillRef>
+          <a:effectRef idx="2">
+            <a:schemeClr val="accent1"/>
+          </a:effectRef>
+          <a:fontRef idx="minor">
+            <a:schemeClr val="lt1"/>
+          </a:fontRef>
+        </p:style>
+        <p:txBody>
+          <a:bodyPr rtlCol="0" anchor="ctr"/>
+          <a:lstStyle/>
+          <a:p>
+            <a:pPr algn="ctr"/>
+            <a:endParaRPr/>
+          </a:p>
+        </p:txBody>
+      </p:sp>
+      <p:sp>
+        <p:nvSpPr>
+          <p:cNvPr id="12" name="TextBox 11"/>
+          <p:cNvSpPr txBox="1"/>
+          <p:nvPr/>
+        </p:nvSpPr>
+        <p:spPr>
+          <a:xfrm>
+            <a:off x="4645152" y="1645920"/>
+            <a:ext cx="2926079" cy="1280160"/>
+          </a:xfrm>
+          <a:prstGeom prst="rect">
+            <a:avLst/>
+          </a:prstGeom>
+          <a:noFill/>
+        </p:spPr>
+        <p:txBody>
+          <a:bodyPr wrap="square">
+            <a:spAutoFit/>
+          </a:bodyPr>
+          <a:lstStyle/>
+          <a:p>
+            <a:pPr>
+              <a:defRPr sz="1500" b="1">
+                <a:solidFill>
+                  <a:srgbClr val="0F2747"/>
+                </a:solidFill>
+                <a:latin typeface="Aptos"/>
+              </a:defRPr>
+            </a:pPr>
+            <a:r>
+              <a:t>25,5%</a:t>
+            </a:r>
+          </a:p>
+          <a:p>
+            <a:pPr>
+              <a:spcBef>
+                <a:spcPts val="600"/>
+              </a:spcBef>
+              <a:defRPr sz="1150">
+                <a:solidFill>
+                  <a:srgbClr val="1F2937"/>
+                </a:solidFill>
+                <a:latin typeface="Aptos"/>
+              </a:defRPr>
+            </a:pPr>
+            <a:r>
+              <a:t>das transações históricas pertencem ao grupo Pix.</a:t>
+            </a:r>
+          </a:p>
+        </p:txBody>
+      </p:sp>
+      <p:sp>
+        <p:nvSpPr>
+          <p:cNvPr id="13" name="Rounded Rectangle 12"/>
+          <p:cNvSpPr/>
+          <p:nvPr/>
+        </p:nvSpPr>
+        <p:spPr>
+          <a:xfrm>
+            <a:off x="8055864" y="1463040"/>
+            <a:ext cx="3337560" cy="1600200"/>
+          </a:xfrm>
+          <a:prstGeom prst="roundRect">
+            <a:avLst/>
+          </a:prstGeom>
+          <a:solidFill>
+            <a:srgbClr val="FFFFFF"/>
+          </a:solidFill>
+          <a:ln>
+            <a:solidFill>
+              <a:srgbClr val="DCE1E8"/>
+            </a:solidFill>
+          </a:ln>
+        </p:spPr>
+        <p:style>
+          <a:lnRef idx="1">
+            <a:schemeClr val="accent1"/>
+          </a:lnRef>
+          <a:fillRef idx="3">
+            <a:schemeClr val="accent1"/>
+          </a:fillRef>
+          <a:effectRef idx="2">
+            <a:schemeClr val="accent1"/>
+          </a:effectRef>
+          <a:fontRef idx="minor">
+            <a:schemeClr val="lt1"/>
+          </a:fontRef>
+        </p:style>
+        <p:txBody>
+          <a:bodyPr rtlCol="0" anchor="ctr"/>
+          <a:lstStyle/>
+          <a:p>
+            <a:pPr algn="ctr"/>
+            <a:endParaRPr/>
+          </a:p>
+        </p:txBody>
+      </p:sp>
+      <p:sp>
+        <p:nvSpPr>
+          <p:cNvPr id="14" name="Rectangle 13"/>
+          <p:cNvSpPr/>
+          <p:nvPr/>
+        </p:nvSpPr>
+        <p:spPr>
+          <a:xfrm>
+            <a:off x="8055864" y="1463040"/>
+            <a:ext cx="73152" cy="1600200"/>
+          </a:xfrm>
+          <a:prstGeom prst="rect">
+            <a:avLst/>
+          </a:prstGeom>
+          <a:solidFill>
+            <a:srgbClr val="E58F40"/>
+          </a:solidFill>
+          <a:ln>
+            <a:noFill/>
+          </a:ln>
+        </p:spPr>
+        <p:style>
+          <a:lnRef idx="1">
+            <a:schemeClr val="accent1"/>
+          </a:lnRef>
+          <a:fillRef idx="3">
+            <a:schemeClr val="accent1"/>
+          </a:fillRef>
+          <a:effectRef idx="2">
+            <a:schemeClr val="accent1"/>
+          </a:effectRef>
+          <a:fontRef idx="minor">
+            <a:schemeClr val="lt1"/>
+          </a:fontRef>
+        </p:style>
+        <p:txBody>
+          <a:bodyPr rtlCol="0" anchor="ctr"/>
+          <a:lstStyle/>
+          <a:p>
+            <a:pPr algn="ctr"/>
+            <a:endParaRPr/>
+          </a:p>
+        </p:txBody>
+      </p:sp>
+      <p:sp>
+        <p:nvSpPr>
+          <p:cNvPr id="15" name="TextBox 14"/>
+          <p:cNvSpPr txBox="1"/>
+          <p:nvPr/>
+        </p:nvSpPr>
+        <p:spPr>
+          <a:xfrm>
+            <a:off x="8284464" y="1645920"/>
+            <a:ext cx="2926079" cy="1280160"/>
+          </a:xfrm>
+          <a:prstGeom prst="rect">
+            <a:avLst/>
+          </a:prstGeom>
+          <a:noFill/>
+        </p:spPr>
+        <p:txBody>
+          <a:bodyPr wrap="square">
+            <a:spAutoFit/>
+          </a:bodyPr>
+          <a:lstStyle/>
+          <a:p>
+            <a:pPr>
+              <a:defRPr sz="1500" b="1">
+                <a:solidFill>
+                  <a:srgbClr val="0F2747"/>
+                </a:solidFill>
+                <a:latin typeface="Aptos"/>
+              </a:defRPr>
+            </a:pPr>
+            <a:r>
+              <a:rPr dirty="0"/>
+              <a:t>40,6%</a:t>
+            </a:r>
+          </a:p>
+          <a:p>
+            <a:pPr>
+              <a:spcBef>
+                <a:spcPts val="600"/>
+              </a:spcBef>
+              <a:defRPr sz="1150">
+                <a:solidFill>
+                  <a:srgbClr val="1F2937"/>
+                </a:solidFill>
+                <a:latin typeface="Aptos"/>
+              </a:defRPr>
+            </a:pPr>
+            <a:r>
+              <a:rPr dirty="0"/>
+              <a:t>das </a:t>
+            </a:r>
+            <a:r>
+              <a:rPr dirty="0" err="1"/>
+              <a:t>operações</a:t>
+            </a:r>
+            <a:r>
+              <a:rPr dirty="0"/>
+              <a:t> de </a:t>
+            </a:r>
+            <a:r>
+              <a:rPr dirty="0" err="1"/>
+              <a:t>dezembro</a:t>
+            </a:r>
+            <a:r>
+              <a:rPr dirty="0"/>
+              <a:t>/2022 </a:t>
+            </a:r>
+            <a:r>
+              <a:rPr dirty="0" err="1"/>
+              <a:t>foram</a:t>
+            </a:r>
+            <a:r>
+              <a:rPr dirty="0"/>
+              <a:t> Pix.</a:t>
+            </a:r>
+          </a:p>
+        </p:txBody>
+      </p:sp>
+      <p:sp>
+        <p:nvSpPr>
+          <p:cNvPr id="17" name="Rectangle 16"/>
+          <p:cNvSpPr/>
+          <p:nvPr/>
+        </p:nvSpPr>
+        <p:spPr>
+          <a:xfrm>
+            <a:off x="594360" y="6473952"/>
+            <a:ext cx="10972800" cy="13716"/>
+          </a:xfrm>
+          <a:prstGeom prst="rect">
+            <a:avLst/>
+          </a:prstGeom>
+          <a:solidFill>
+            <a:srgbClr val="DCE1E8"/>
+          </a:solidFill>
+          <a:ln>
+            <a:noFill/>
+          </a:ln>
+        </p:spPr>
+        <p:style>
+          <a:lnRef idx="1">
+            <a:schemeClr val="accent1"/>
+          </a:lnRef>
+          <a:fillRef idx="3">
+            <a:schemeClr val="accent1"/>
+          </a:fillRef>
+          <a:effectRef idx="2">
+            <a:schemeClr val="accent1"/>
+          </a:effectRef>
+          <a:fontRef idx="minor">
+            <a:schemeClr val="lt1"/>
+          </a:fontRef>
+        </p:style>
+        <p:txBody>
+          <a:bodyPr rtlCol="0" anchor="ctr"/>
+          <a:lstStyle/>
+          <a:p>
+            <a:pPr algn="ctr"/>
+            <a:endParaRPr/>
+          </a:p>
+        </p:txBody>
+      </p:sp>
+      <p:sp>
+        <p:nvSpPr>
+          <p:cNvPr id="18" name="TextBox 17"/>
+          <p:cNvSpPr txBox="1"/>
+          <p:nvPr/>
+        </p:nvSpPr>
+        <p:spPr>
+          <a:xfrm>
+            <a:off x="640080" y="6510528"/>
+            <a:ext cx="4572000" cy="201168"/>
+          </a:xfrm>
+          <a:prstGeom prst="rect">
+            <a:avLst/>
+          </a:prstGeom>
+          <a:noFill/>
+        </p:spPr>
+        <p:txBody>
+          <a:bodyPr wrap="none">
+            <a:spAutoFit/>
+          </a:bodyPr>
+          <a:lstStyle/>
+          <a:p>
+            <a:pPr>
+              <a:defRPr sz="800">
+                <a:solidFill>
+                  <a:srgbClr val="5D6978"/>
+                </a:solidFill>
+                <a:latin typeface="Aptos"/>
+              </a:defRPr>
+            </a:pPr>
+            <a:r>
+              <a:t>BanVic | Dashboard Comercial</a:t>
+            </a:r>
+          </a:p>
+        </p:txBody>
+      </p:sp>
+      <p:sp>
+        <p:nvSpPr>
+          <p:cNvPr id="20" name="TextBox 19">
+            <a:extLst>
+              <a:ext uri="{FF2B5EF4-FFF2-40B4-BE49-F238E27FC236}">
+                <a16:creationId xmlns:a16="http://schemas.microsoft.com/office/drawing/2014/main" id="{746F390D-4D65-D541-5D44-27DA1B6312CE}"/>
+              </a:ext>
+            </a:extLst>
+          </p:cNvPr>
+          <p:cNvSpPr txBox="1"/>
+          <p:nvPr/>
+        </p:nvSpPr>
+        <p:spPr>
+          <a:xfrm>
+            <a:off x="4611556" y="2387008"/>
+            <a:ext cx="2926079" cy="635423"/>
+          </a:xfrm>
+          <a:prstGeom prst="roundRect">
+            <a:avLst/>
+          </a:prstGeom>
+          <a:solidFill>
+            <a:schemeClr val="accent5">
+              <a:lumMod val="20000"/>
+              <a:lumOff val="80000"/>
+            </a:schemeClr>
+          </a:solidFill>
+        </p:spPr>
+        <p:txBody>
+          <a:bodyPr wrap="square">
+            <a:spAutoFit/>
+          </a:bodyPr>
+          <a:lstStyle/>
+          <a:p>
+            <a:pPr marL="0" marR="0" lvl="0" indent="0" algn="ctr" rtl="0">
+              <a:lnSpc>
+                <a:spcPct val="120000"/>
+              </a:lnSpc>
+              <a:spcBef>
+                <a:spcPts val="0"/>
+              </a:spcBef>
+              <a:spcAft>
+                <a:spcPts val="0"/>
+              </a:spcAft>
+              <a:buClr>
+                <a:srgbClr val="1B1F3B"/>
+              </a:buClr>
+              <a:buSzPts val="1350"/>
+              <a:buFont typeface="Calibri"/>
+              <a:buNone/>
+            </a:pPr>
+            <a:r>
+              <a:rPr lang="pt-BR" sz="1350" b="0" i="0" u="none" strike="noStrike" cap="none" dirty="0">
+                <a:solidFill>
+                  <a:srgbClr val="1B1F3B"/>
+                </a:solidFill>
+                <a:latin typeface="Calibri"/>
+                <a:ea typeface="Calibri"/>
+                <a:cs typeface="Calibri"/>
+                <a:sym typeface="Calibri"/>
+              </a:rPr>
+              <a:t>Novembro de 2020 - primeira transação Pix registrada</a:t>
+            </a:r>
+            <a:endParaRPr lang="pt-BR" sz="1350" b="0" i="0" u="none" strike="noStrike" cap="none" dirty="0">
+              <a:solidFill>
+                <a:schemeClr val="dk1"/>
+              </a:solidFill>
+              <a:latin typeface="Calibri"/>
+              <a:ea typeface="Calibri"/>
+              <a:cs typeface="Calibri"/>
+              <a:sym typeface="Calibri"/>
+            </a:endParaRPr>
+          </a:p>
+        </p:txBody>
+      </p:sp>
+      <p:sp>
+        <p:nvSpPr>
+          <p:cNvPr id="21" name="TextBox 20">
+            <a:extLst>
+              <a:ext uri="{FF2B5EF4-FFF2-40B4-BE49-F238E27FC236}">
+                <a16:creationId xmlns:a16="http://schemas.microsoft.com/office/drawing/2014/main" id="{4161C3F8-25B4-D191-7005-33631126F052}"/>
+              </a:ext>
+            </a:extLst>
+          </p:cNvPr>
+          <p:cNvSpPr txBox="1"/>
+          <p:nvPr/>
+        </p:nvSpPr>
+        <p:spPr>
+          <a:xfrm>
+            <a:off x="8284465" y="2387007"/>
+            <a:ext cx="2926079" cy="635423"/>
+          </a:xfrm>
+          <a:prstGeom prst="roundRect">
+            <a:avLst/>
+          </a:prstGeom>
+          <a:solidFill>
+            <a:schemeClr val="accent2">
+              <a:lumMod val="20000"/>
+              <a:lumOff val="80000"/>
+            </a:schemeClr>
+          </a:solidFill>
+        </p:spPr>
+        <p:txBody>
+          <a:bodyPr wrap="square">
+            <a:spAutoFit/>
+          </a:bodyPr>
+          <a:lstStyle/>
+          <a:p>
+            <a:pPr marL="0" marR="0" lvl="0" indent="0" algn="ctr" rtl="0">
+              <a:lnSpc>
+                <a:spcPct val="120000"/>
+              </a:lnSpc>
+              <a:spcBef>
+                <a:spcPts val="0"/>
+              </a:spcBef>
+              <a:spcAft>
+                <a:spcPts val="0"/>
+              </a:spcAft>
+              <a:buClr>
+                <a:srgbClr val="1B1F3B"/>
+              </a:buClr>
+              <a:buSzPts val="1350"/>
+              <a:buFont typeface="Calibri"/>
+              <a:buNone/>
+            </a:pPr>
+            <a:r>
+              <a:rPr lang="pt-BR" sz="1350" b="0" i="0" u="none" strike="noStrike" cap="none" dirty="0">
+                <a:solidFill>
+                  <a:srgbClr val="1B1F3B"/>
+                </a:solidFill>
+                <a:latin typeface="Calibri"/>
+                <a:ea typeface="Calibri"/>
+                <a:cs typeface="Calibri"/>
+                <a:sym typeface="Calibri"/>
+              </a:rPr>
+              <a:t>Crescimento comprovado e aposta alta no cenário digital</a:t>
+            </a:r>
+            <a:endParaRPr lang="pt-BR" sz="1350" b="0" i="0" u="none" strike="noStrike" cap="none" dirty="0">
+              <a:solidFill>
+                <a:schemeClr val="dk1"/>
+              </a:solidFill>
+              <a:latin typeface="Calibri"/>
+              <a:ea typeface="Calibri"/>
+              <a:cs typeface="Calibri"/>
+              <a:sym typeface="Calibri"/>
+            </a:endParaRPr>
+          </a:p>
+        </p:txBody>
+      </p:sp>
+      <p:sp>
+        <p:nvSpPr>
+          <p:cNvPr id="23" name="TextBox 22">
+            <a:extLst>
+              <a:ext uri="{FF2B5EF4-FFF2-40B4-BE49-F238E27FC236}">
+                <a16:creationId xmlns:a16="http://schemas.microsoft.com/office/drawing/2014/main" id="{3DD7F19E-B24E-4D3A-AFBE-632D94D510A9}"/>
+              </a:ext>
+            </a:extLst>
+          </p:cNvPr>
+          <p:cNvSpPr txBox="1"/>
+          <p:nvPr/>
+        </p:nvSpPr>
+        <p:spPr>
+          <a:xfrm>
+            <a:off x="914400" y="3886200"/>
+            <a:ext cx="10812062" cy="1097736"/>
+          </a:xfrm>
+          <a:prstGeom prst="rect">
+            <a:avLst/>
+          </a:prstGeom>
+          <a:noFill/>
+        </p:spPr>
+        <p:txBody>
+          <a:bodyPr wrap="none">
+            <a:spAutoFit/>
+          </a:bodyPr>
+          <a:lstStyle/>
+          <a:p>
+            <a:pPr>
+              <a:defRPr sz="1600" b="1">
+                <a:solidFill>
+                  <a:srgbClr val="0F2747"/>
+                </a:solidFill>
+                <a:latin typeface="Aptos"/>
+              </a:defRPr>
+            </a:pPr>
+            <a:r>
+              <a:rPr dirty="0" err="1"/>
+              <a:t>Leitura</a:t>
+            </a:r>
+            <a:r>
+              <a:rPr dirty="0"/>
+              <a:t> </a:t>
+            </a:r>
+            <a:r>
+              <a:rPr dirty="0" err="1"/>
+              <a:t>comercial</a:t>
+            </a:r>
+            <a:r>
+              <a:rPr lang="pt-BR" dirty="0"/>
+              <a:t>:</a:t>
+            </a:r>
+            <a:endParaRPr dirty="0"/>
+          </a:p>
+          <a:p>
+            <a:pPr>
+              <a:spcBef>
+                <a:spcPts val="800"/>
+              </a:spcBef>
+              <a:defRPr sz="1800">
+                <a:solidFill>
+                  <a:srgbClr val="1F2937"/>
+                </a:solidFill>
+                <a:latin typeface="Aptos"/>
+              </a:defRPr>
+            </a:pPr>
+            <a:r>
+              <a:rPr lang="pt-BR" dirty="0"/>
+              <a:t>O crescimento das transações, aliado à rápida adoção do Pix, evidencia uma mudança no comportamento </a:t>
+            </a:r>
+          </a:p>
+          <a:p>
+            <a:pPr>
+              <a:spcBef>
+                <a:spcPts val="800"/>
+              </a:spcBef>
+              <a:defRPr sz="1800">
+                <a:solidFill>
+                  <a:srgbClr val="1F2937"/>
+                </a:solidFill>
+                <a:latin typeface="Aptos"/>
+              </a:defRPr>
+            </a:pPr>
+            <a:r>
+              <a:rPr lang="pt-BR" dirty="0"/>
+              <a:t>dos clientes e reforça a importância dos canais digitais para ampliar o engajamento e a recorrência de uso.</a:t>
+            </a:r>
+            <a:endParaRPr dirty="0"/>
+          </a:p>
+        </p:txBody>
+      </p:sp>
+    </p:spTree>
+  </p:cSld>
+  <p:clrMapOvr>
+    <a:masterClrMapping/>
+  </p:clrMapOvr>
+  <p:timing>
+    <p:tnLst>
+      <p:par>
+        <p:cTn id="1" dur="indefinite" restart="never" nodeType="tmRoot">
+          <p:childTnLst>
+            <p:seq concurrent="1" nextAc="seek">
+              <p:cTn id="2" dur="indefinite" nodeType="mainSeq">
+                <p:childTnLst>
+                  <p:par>
+                    <p:cTn id="3" fill="hold">
+                      <p:stCondLst>
+                        <p:cond delay="indefinite"/>
+                      </p:stCondLst>
+                      <p:childTnLst>
+                        <p:par>
+                          <p:cTn id="4" fill="hold">
+                            <p:stCondLst>
+                              <p:cond delay="0"/>
+                            </p:stCondLst>
+                            <p:childTnLst>
+                              <p:par>
+                                <p:cTn id="5" presetID="10" presetClass="entr" presetSubtype="0" fill="hold" grpId="0" nodeType="clickEffect">
+                                  <p:stCondLst>
+                                    <p:cond delay="0"/>
+                                  </p:stCondLst>
+                                  <p:childTnLst>
+                                    <p:set>
+                                      <p:cBhvr>
+                                        <p:cTn id="6" dur="1" fill="hold">
+                                          <p:stCondLst>
+                                            <p:cond delay="0"/>
+                                          </p:stCondLst>
+                                        </p:cTn>
+                                        <p:tgtEl>
+                                          <p:spTgt spid="20"/>
+                                        </p:tgtEl>
+                                        <p:attrNameLst>
+                                          <p:attrName>style.visibility</p:attrName>
+                                        </p:attrNameLst>
+                                      </p:cBhvr>
+                                      <p:to>
+                                        <p:strVal val="visible"/>
+                                      </p:to>
+                                    </p:set>
+                                    <p:animEffect transition="in" filter="fade">
+                                      <p:cBhvr>
+                                        <p:cTn id="7" dur="500"/>
+                                        <p:tgtEl>
+                                          <p:spTgt spid="20"/>
+                                        </p:tgtEl>
+                                      </p:cBhvr>
+                                    </p:animEffect>
+                                  </p:childTnLst>
+                                </p:cTn>
+                              </p:par>
+                            </p:childTnLst>
+                          </p:cTn>
+                        </p:par>
+                      </p:childTnLst>
+                    </p:cTn>
+                  </p:par>
+                  <p:par>
+                    <p:cTn id="8" fill="hold">
+                      <p:stCondLst>
+                        <p:cond delay="indefinite"/>
+                      </p:stCondLst>
+                      <p:childTnLst>
+                        <p:par>
+                          <p:cTn id="9" fill="hold">
+                            <p:stCondLst>
+                              <p:cond delay="0"/>
+                            </p:stCondLst>
+                            <p:childTnLst>
+                              <p:par>
+                                <p:cTn id="10" presetID="10" presetClass="entr" presetSubtype="0" fill="hold" grpId="0" nodeType="clickEffect">
+                                  <p:stCondLst>
+                                    <p:cond delay="0"/>
+                                  </p:stCondLst>
+                                  <p:childTnLst>
+                                    <p:set>
+                                      <p:cBhvr>
+                                        <p:cTn id="11" dur="1" fill="hold">
+                                          <p:stCondLst>
+                                            <p:cond delay="0"/>
+                                          </p:stCondLst>
+                                        </p:cTn>
+                                        <p:tgtEl>
+                                          <p:spTgt spid="21"/>
+                                        </p:tgtEl>
+                                        <p:attrNameLst>
+                                          <p:attrName>style.visibility</p:attrName>
+                                        </p:attrNameLst>
+                                      </p:cBhvr>
+                                      <p:to>
+                                        <p:strVal val="visible"/>
+                                      </p:to>
+                                    </p:set>
+                                    <p:animEffect transition="in" filter="fade">
+                                      <p:cBhvr>
+                                        <p:cTn id="12" dur="500"/>
+                                        <p:tgtEl>
+                                          <p:spTgt spid="21"/>
+                                        </p:tgtEl>
+                                      </p:cBhvr>
+                                    </p:animEffect>
+                                  </p:childTnLst>
+                                </p:cTn>
+                              </p:par>
+                            </p:childTnLst>
+                          </p:cTn>
+                        </p:par>
+                      </p:childTnLst>
+                    </p:cTn>
+                  </p:par>
+                </p:childTnLst>
+              </p:cTn>
+              <p:prevCondLst>
+                <p:cond evt="onPrev" delay="0">
+                  <p:tgtEl>
+                    <p:sldTgt/>
+                  </p:tgtEl>
+                </p:cond>
+              </p:prevCondLst>
+              <p:nextCondLst>
+                <p:cond evt="onNext" delay="0">
+                  <p:tgtEl>
+                    <p:sldTgt/>
+                  </p:tgtEl>
+                </p:cond>
+              </p:nextCondLst>
+            </p:seq>
+          </p:childTnLst>
+        </p:cTn>
+      </p:par>
+    </p:tnLst>
+    <p:bldLst>
+      <p:bldP spid="20" grpId="0" animBg="1"/>
+      <p:bldP spid="21" grpId="0" animBg="1"/>
+    </p:bldLst>
+  </p:timing>
+</p:sld>
+</file>
+
+<file path=ppt/slides/slide6.xml><?xml version="1.0" encoding="utf-8"?>
+<p:sld xmlns:a="http://schemas.openxmlformats.org/drawingml/2006/main" xmlns:r="http://schemas.openxmlformats.org/officeDocument/2006/relationships" xmlns:p="http://schemas.openxmlformats.org/presentationml/2006/main" show="0">
+  <p:cSld>
+    <p:spTree>
+      <p:nvGrpSpPr>
+        <p:cNvPr id="1" name=""/>
+        <p:cNvGrpSpPr/>
+        <p:nvPr/>
+      </p:nvGrpSpPr>
+      <p:grpSpPr>
+        <a:xfrm>
+          <a:off x="0" y="0"/>
+          <a:ext cx="0" cy="0"/>
+          <a:chOff x="0" y="0"/>
+          <a:chExt cx="0" cy="0"/>
+        </a:xfrm>
+      </p:grpSpPr>
+      <p:sp>
+        <p:nvSpPr>
+          <p:cNvPr id="2" name="Rectangle 1"/>
+          <p:cNvSpPr/>
+          <p:nvPr/>
+        </p:nvSpPr>
+        <p:spPr>
+          <a:xfrm>
+            <a:off x="0" y="0"/>
+            <a:ext cx="12191695" cy="6858000"/>
+          </a:xfrm>
+          <a:prstGeom prst="rect">
+            <a:avLst/>
+          </a:prstGeom>
+          <a:solidFill>
+            <a:srgbClr val="F7F9FC"/>
+          </a:solidFill>
+          <a:ln>
+            <a:noFill/>
+          </a:ln>
+        </p:spPr>
+        <p:style>
+          <a:lnRef idx="1">
+            <a:schemeClr val="accent1"/>
+          </a:lnRef>
+          <a:fillRef idx="3">
+            <a:schemeClr val="accent1"/>
+          </a:fillRef>
+          <a:effectRef idx="2">
+            <a:schemeClr val="accent1"/>
+          </a:effectRef>
+          <a:fontRef idx="minor">
+            <a:schemeClr val="lt1"/>
+          </a:fontRef>
+        </p:style>
+        <p:txBody>
+          <a:bodyPr rtlCol="0" anchor="ctr"/>
+          <a:lstStyle/>
+          <a:p>
+            <a:pPr algn="ctr"/>
+            <a:endParaRPr/>
+          </a:p>
+        </p:txBody>
+      </p:sp>
+      <p:sp>
+        <p:nvSpPr>
+          <p:cNvPr id="3" name="Rectangle 2"/>
+          <p:cNvSpPr/>
+          <p:nvPr/>
+        </p:nvSpPr>
+        <p:spPr>
+          <a:xfrm>
+            <a:off x="502920" y="502920"/>
+            <a:ext cx="109728" cy="685800"/>
+          </a:xfrm>
+          <a:prstGeom prst="rect">
+            <a:avLst/>
+          </a:prstGeom>
+          <a:solidFill>
+            <a:srgbClr val="245B91"/>
+          </a:solidFill>
+          <a:ln>
+            <a:noFill/>
+          </a:ln>
+        </p:spPr>
+        <p:style>
+          <a:lnRef idx="1">
+            <a:schemeClr val="accent1"/>
+          </a:lnRef>
+          <a:fillRef idx="3">
+            <a:schemeClr val="accent1"/>
+          </a:fillRef>
+          <a:effectRef idx="2">
+            <a:schemeClr val="accent1"/>
+          </a:effectRef>
+          <a:fontRef idx="minor">
+            <a:schemeClr val="lt1"/>
+          </a:fontRef>
+        </p:style>
+        <p:txBody>
+          <a:bodyPr rtlCol="0" anchor="ctr"/>
+          <a:lstStyle/>
+          <a:p>
+            <a:pPr algn="ctr"/>
+            <a:endParaRPr/>
+          </a:p>
+        </p:txBody>
+      </p:sp>
+      <p:sp>
+        <p:nvSpPr>
+          <p:cNvPr id="4" name="TextBox 3"/>
+          <p:cNvSpPr txBox="1"/>
+          <p:nvPr/>
+        </p:nvSpPr>
+        <p:spPr>
+          <a:xfrm>
+            <a:off x="777240" y="475488"/>
+            <a:ext cx="5429050" cy="507831"/>
+          </a:xfrm>
+          <a:prstGeom prst="rect">
+            <a:avLst/>
+          </a:prstGeom>
+          <a:noFill/>
+        </p:spPr>
+        <p:txBody>
+          <a:bodyPr wrap="none">
+            <a:spAutoFit/>
+          </a:bodyPr>
+          <a:lstStyle/>
+          <a:p>
+            <a:pPr>
+              <a:defRPr sz="2700" b="1">
+                <a:solidFill>
+                  <a:srgbClr val="0F2747"/>
+                </a:solidFill>
+                <a:latin typeface="Aptos Display"/>
+              </a:defRPr>
+            </a:pPr>
+            <a:r>
+              <a:rPr dirty="0"/>
+              <a:t>Crédito e </a:t>
+            </a:r>
+            <a:r>
+              <a:rPr lang="pt-BR" dirty="0"/>
+              <a:t>o</a:t>
+            </a:r>
+            <a:r>
+              <a:rPr dirty="0" err="1"/>
+              <a:t>portunidades</a:t>
+            </a:r>
+            <a:r>
+              <a:rPr dirty="0"/>
+              <a:t> </a:t>
+            </a:r>
+            <a:r>
+              <a:rPr lang="pt-BR" dirty="0"/>
+              <a:t>c</a:t>
+            </a:r>
+            <a:r>
+              <a:rPr dirty="0" err="1"/>
+              <a:t>omerciais</a:t>
+            </a:r>
+            <a:endParaRPr dirty="0"/>
+          </a:p>
+        </p:txBody>
+      </p:sp>
+      <p:sp>
+        <p:nvSpPr>
+          <p:cNvPr id="5" name="TextBox 4"/>
+          <p:cNvSpPr txBox="1"/>
+          <p:nvPr/>
+        </p:nvSpPr>
+        <p:spPr>
+          <a:xfrm>
+            <a:off x="786384" y="1024128"/>
+            <a:ext cx="10424160" cy="411480"/>
+          </a:xfrm>
+          <a:prstGeom prst="rect">
+            <a:avLst/>
+          </a:prstGeom>
+          <a:noFill/>
+        </p:spPr>
+        <p:txBody>
+          <a:bodyPr wrap="none">
+            <a:spAutoFit/>
+          </a:bodyPr>
+          <a:lstStyle/>
+          <a:p>
+            <a:pPr>
+              <a:defRPr sz="1200">
+                <a:solidFill>
+                  <a:srgbClr val="5D6978"/>
+                </a:solidFill>
+                <a:latin typeface="Aptos"/>
+              </a:defRPr>
+            </a:pPr>
+            <a:r>
+              <a:t>Leitura dos resultados de crédito e suas limitações</a:t>
+            </a:r>
+          </a:p>
+        </p:txBody>
+      </p:sp>
+      <p:sp>
+        <p:nvSpPr>
+          <p:cNvPr id="6" name="TextBox 5"/>
+          <p:cNvSpPr txBox="1"/>
+          <p:nvPr/>
+        </p:nvSpPr>
+        <p:spPr>
+          <a:xfrm>
+            <a:off x="11155680" y="502920"/>
+            <a:ext cx="457200" cy="365760"/>
+          </a:xfrm>
+          <a:prstGeom prst="rect">
+            <a:avLst/>
+          </a:prstGeom>
+          <a:noFill/>
+        </p:spPr>
+        <p:txBody>
+          <a:bodyPr wrap="none">
+            <a:spAutoFit/>
+          </a:bodyPr>
+          <a:lstStyle/>
+          <a:p>
+            <a:pPr algn="r">
+              <a:defRPr sz="1100" b="1">
+                <a:solidFill>
+                  <a:srgbClr val="5D6978"/>
+                </a:solidFill>
+                <a:latin typeface="Aptos"/>
+              </a:defRPr>
+            </a:pPr>
+            <a:r>
+              <a:t>09</a:t>
+            </a:r>
+          </a:p>
+        </p:txBody>
+      </p:sp>
+      <p:sp>
+        <p:nvSpPr>
+          <p:cNvPr id="7" name="Rounded Rectangle 6"/>
+          <p:cNvSpPr/>
+          <p:nvPr/>
+        </p:nvSpPr>
+        <p:spPr>
+          <a:xfrm>
+            <a:off x="868680" y="1508760"/>
+            <a:ext cx="3291840" cy="1828800"/>
+          </a:xfrm>
+          <a:prstGeom prst="roundRect">
+            <a:avLst/>
+          </a:prstGeom>
+          <a:solidFill>
+            <a:srgbClr val="FFFFFF"/>
+          </a:solidFill>
+          <a:ln>
+            <a:solidFill>
+              <a:srgbClr val="DCE1E8"/>
+            </a:solidFill>
+          </a:ln>
+        </p:spPr>
+        <p:style>
+          <a:lnRef idx="1">
+            <a:schemeClr val="accent1"/>
+          </a:lnRef>
+          <a:fillRef idx="3">
+            <a:schemeClr val="accent1"/>
+          </a:fillRef>
+          <a:effectRef idx="2">
+            <a:schemeClr val="accent1"/>
+          </a:effectRef>
+          <a:fontRef idx="minor">
+            <a:schemeClr val="lt1"/>
+          </a:fontRef>
+        </p:style>
+        <p:txBody>
+          <a:bodyPr rtlCol="0" anchor="ctr"/>
+          <a:lstStyle/>
+          <a:p>
+            <a:pPr algn="ctr"/>
+            <a:endParaRPr/>
+          </a:p>
+        </p:txBody>
+      </p:sp>
+      <p:sp>
+        <p:nvSpPr>
+          <p:cNvPr id="8" name="Rectangle 7"/>
+          <p:cNvSpPr/>
+          <p:nvPr/>
+        </p:nvSpPr>
+        <p:spPr>
+          <a:xfrm>
+            <a:off x="868680" y="1508760"/>
+            <a:ext cx="73152" cy="1828800"/>
+          </a:xfrm>
+          <a:prstGeom prst="rect">
+            <a:avLst/>
+          </a:prstGeom>
+          <a:solidFill>
+            <a:srgbClr val="538968"/>
+          </a:solidFill>
+          <a:ln>
+            <a:noFill/>
+          </a:ln>
+        </p:spPr>
+        <p:style>
+          <a:lnRef idx="1">
+            <a:schemeClr val="accent1"/>
+          </a:lnRef>
+          <a:fillRef idx="3">
+            <a:schemeClr val="accent1"/>
+          </a:fillRef>
+          <a:effectRef idx="2">
+            <a:schemeClr val="accent1"/>
+          </a:effectRef>
+          <a:fontRef idx="minor">
+            <a:schemeClr val="lt1"/>
+          </a:fontRef>
+        </p:style>
+        <p:txBody>
+          <a:bodyPr rtlCol="0" anchor="ctr"/>
+          <a:lstStyle/>
+          <a:p>
+            <a:pPr algn="ctr"/>
+            <a:endParaRPr/>
+          </a:p>
+        </p:txBody>
+      </p:sp>
+      <p:sp>
+        <p:nvSpPr>
+          <p:cNvPr id="9" name="TextBox 8"/>
+          <p:cNvSpPr txBox="1"/>
+          <p:nvPr/>
+        </p:nvSpPr>
+        <p:spPr>
+          <a:xfrm>
+            <a:off x="1097280" y="1691639"/>
+            <a:ext cx="2880360" cy="1508760"/>
+          </a:xfrm>
+          <a:prstGeom prst="rect">
+            <a:avLst/>
+          </a:prstGeom>
+          <a:noFill/>
+        </p:spPr>
+        <p:txBody>
+          <a:bodyPr wrap="square">
+            <a:spAutoFit/>
+          </a:bodyPr>
+          <a:lstStyle/>
+          <a:p>
+            <a:pPr>
+              <a:defRPr sz="1500" b="1">
+                <a:solidFill>
+                  <a:srgbClr val="0F2747"/>
+                </a:solidFill>
+                <a:latin typeface="Aptos"/>
+              </a:defRPr>
+            </a:pPr>
+            <a:r>
+              <a:t>Aprovação em 2022</a:t>
+            </a:r>
+          </a:p>
+          <a:p>
+            <a:pPr>
+              <a:spcBef>
+                <a:spcPts val="600"/>
+              </a:spcBef>
+              <a:defRPr sz="1150">
+                <a:solidFill>
+                  <a:srgbClr val="1F2937"/>
+                </a:solidFill>
+                <a:latin typeface="Aptos"/>
+              </a:defRPr>
+            </a:pPr>
+            <a:r>
+              <a:t>31,6%</a:t>
+            </a:r>
+            <a:br/>
+            <a:br/>
+            <a:r>
+              <a:t>Maior taxa observada na série analisada.</a:t>
+            </a:r>
+          </a:p>
+        </p:txBody>
+      </p:sp>
+      <p:sp>
+        <p:nvSpPr>
+          <p:cNvPr id="10" name="Rounded Rectangle 9"/>
+          <p:cNvSpPr/>
+          <p:nvPr/>
+        </p:nvSpPr>
+        <p:spPr>
+          <a:xfrm>
+            <a:off x="4434840" y="1508760"/>
+            <a:ext cx="3291840" cy="1828800"/>
+          </a:xfrm>
+          <a:prstGeom prst="roundRect">
+            <a:avLst/>
+          </a:prstGeom>
+          <a:solidFill>
+            <a:srgbClr val="FFFFFF"/>
+          </a:solidFill>
+          <a:ln>
+            <a:solidFill>
+              <a:srgbClr val="DCE1E8"/>
+            </a:solidFill>
+          </a:ln>
+        </p:spPr>
+        <p:style>
+          <a:lnRef idx="1">
+            <a:schemeClr val="accent1"/>
+          </a:lnRef>
+          <a:fillRef idx="3">
+            <a:schemeClr val="accent1"/>
+          </a:fillRef>
+          <a:effectRef idx="2">
+            <a:schemeClr val="accent1"/>
+          </a:effectRef>
+          <a:fontRef idx="minor">
+            <a:schemeClr val="lt1"/>
+          </a:fontRef>
+        </p:style>
+        <p:txBody>
+          <a:bodyPr rtlCol="0" anchor="ctr"/>
+          <a:lstStyle/>
+          <a:p>
+            <a:pPr algn="ctr"/>
+            <a:endParaRPr/>
+          </a:p>
+        </p:txBody>
+      </p:sp>
+      <p:sp>
+        <p:nvSpPr>
+          <p:cNvPr id="11" name="Rectangle 10"/>
+          <p:cNvSpPr/>
+          <p:nvPr/>
+        </p:nvSpPr>
+        <p:spPr>
+          <a:xfrm>
+            <a:off x="4434840" y="1508760"/>
+            <a:ext cx="73152" cy="1828800"/>
+          </a:xfrm>
+          <a:prstGeom prst="rect">
+            <a:avLst/>
+          </a:prstGeom>
+          <a:solidFill>
+            <a:srgbClr val="245B91"/>
+          </a:solidFill>
+          <a:ln>
+            <a:noFill/>
+          </a:ln>
+        </p:spPr>
+        <p:style>
+          <a:lnRef idx="1">
+            <a:schemeClr val="accent1"/>
+          </a:lnRef>
+          <a:fillRef idx="3">
+            <a:schemeClr val="accent1"/>
+          </a:fillRef>
+          <a:effectRef idx="2">
+            <a:schemeClr val="accent1"/>
+          </a:effectRef>
+          <a:fontRef idx="minor">
+            <a:schemeClr val="lt1"/>
+          </a:fontRef>
+        </p:style>
+        <p:txBody>
+          <a:bodyPr rtlCol="0" anchor="ctr"/>
+          <a:lstStyle/>
+          <a:p>
+            <a:pPr algn="ctr"/>
+            <a:endParaRPr/>
+          </a:p>
+        </p:txBody>
+      </p:sp>
+      <p:sp>
+        <p:nvSpPr>
+          <p:cNvPr id="12" name="TextBox 11"/>
+          <p:cNvSpPr txBox="1"/>
+          <p:nvPr/>
+        </p:nvSpPr>
+        <p:spPr>
+          <a:xfrm>
+            <a:off x="4663440" y="1691639"/>
+            <a:ext cx="2880360" cy="931024"/>
+          </a:xfrm>
+          <a:prstGeom prst="rect">
+            <a:avLst/>
+          </a:prstGeom>
+          <a:noFill/>
+        </p:spPr>
+        <p:txBody>
+          <a:bodyPr wrap="square">
+            <a:spAutoFit/>
+          </a:bodyPr>
+          <a:lstStyle/>
+          <a:p>
+            <a:pPr>
+              <a:defRPr sz="1500" b="1">
+                <a:solidFill>
+                  <a:srgbClr val="0F2747"/>
+                </a:solidFill>
+                <a:latin typeface="Aptos"/>
+              </a:defRPr>
+            </a:pPr>
+            <a:r>
+              <a:rPr dirty="0" err="1"/>
+              <a:t>Comparação</a:t>
+            </a:r>
+            <a:r>
+              <a:rPr dirty="0"/>
+              <a:t> com 2021</a:t>
+            </a:r>
+          </a:p>
+          <a:p>
+            <a:pPr>
+              <a:spcBef>
+                <a:spcPts val="600"/>
+              </a:spcBef>
+              <a:defRPr sz="1150">
+                <a:solidFill>
+                  <a:srgbClr val="1F2937"/>
+                </a:solidFill>
+                <a:latin typeface="Aptos"/>
+              </a:defRPr>
+            </a:pPr>
+            <a:r>
+              <a:rPr dirty="0"/>
+              <a:t>21,6% </a:t>
+            </a:r>
+            <a:r>
+              <a:rPr lang="pt-BR" dirty="0"/>
+              <a:t>=&gt;</a:t>
+            </a:r>
+            <a:r>
+              <a:rPr dirty="0"/>
+              <a:t> 31,6%</a:t>
+            </a:r>
+            <a:br>
+              <a:rPr dirty="0"/>
+            </a:br>
+            <a:br>
+              <a:rPr dirty="0"/>
+            </a:br>
+            <a:r>
+              <a:rPr dirty="0" err="1"/>
+              <a:t>Aumento</a:t>
+            </a:r>
+            <a:r>
+              <a:rPr dirty="0"/>
+              <a:t> </a:t>
+            </a:r>
+            <a:r>
+              <a:rPr dirty="0" err="1"/>
+              <a:t>aproximado</a:t>
+            </a:r>
+            <a:r>
+              <a:rPr dirty="0"/>
+              <a:t> de 10 p.p.</a:t>
+            </a:r>
+          </a:p>
+        </p:txBody>
+      </p:sp>
+      <p:sp>
+        <p:nvSpPr>
+          <p:cNvPr id="13" name="Rounded Rectangle 12"/>
+          <p:cNvSpPr/>
+          <p:nvPr/>
+        </p:nvSpPr>
+        <p:spPr>
+          <a:xfrm>
+            <a:off x="8001000" y="1508760"/>
+            <a:ext cx="3291840" cy="1828800"/>
+          </a:xfrm>
+          <a:prstGeom prst="roundRect">
+            <a:avLst/>
+          </a:prstGeom>
+          <a:solidFill>
+            <a:srgbClr val="FFFFFF"/>
+          </a:solidFill>
+          <a:ln>
+            <a:solidFill>
+              <a:srgbClr val="DCE1E8"/>
+            </a:solidFill>
+          </a:ln>
+        </p:spPr>
+        <p:style>
+          <a:lnRef idx="1">
+            <a:schemeClr val="accent1"/>
+          </a:lnRef>
+          <a:fillRef idx="3">
+            <a:schemeClr val="accent1"/>
+          </a:fillRef>
+          <a:effectRef idx="2">
+            <a:schemeClr val="accent1"/>
+          </a:effectRef>
+          <a:fontRef idx="minor">
+            <a:schemeClr val="lt1"/>
+          </a:fontRef>
+        </p:style>
+        <p:txBody>
+          <a:bodyPr rtlCol="0" anchor="ctr"/>
+          <a:lstStyle/>
+          <a:p>
+            <a:pPr algn="ctr"/>
+            <a:endParaRPr/>
+          </a:p>
+        </p:txBody>
+      </p:sp>
+      <p:sp>
+        <p:nvSpPr>
+          <p:cNvPr id="14" name="Rectangle 13"/>
+          <p:cNvSpPr/>
+          <p:nvPr/>
+        </p:nvSpPr>
+        <p:spPr>
+          <a:xfrm>
+            <a:off x="8001000" y="1508760"/>
+            <a:ext cx="73152" cy="1828800"/>
+          </a:xfrm>
+          <a:prstGeom prst="rect">
+            <a:avLst/>
+          </a:prstGeom>
+          <a:solidFill>
+            <a:srgbClr val="E58F40"/>
+          </a:solidFill>
+          <a:ln>
+            <a:noFill/>
+          </a:ln>
+        </p:spPr>
+        <p:style>
+          <a:lnRef idx="1">
+            <a:schemeClr val="accent1"/>
+          </a:lnRef>
+          <a:fillRef idx="3">
+            <a:schemeClr val="accent1"/>
+          </a:fillRef>
+          <a:effectRef idx="2">
+            <a:schemeClr val="accent1"/>
+          </a:effectRef>
+          <a:fontRef idx="minor">
+            <a:schemeClr val="lt1"/>
+          </a:fontRef>
+        </p:style>
+        <p:txBody>
+          <a:bodyPr rtlCol="0" anchor="ctr"/>
+          <a:lstStyle/>
+          <a:p>
+            <a:pPr algn="ctr"/>
+            <a:endParaRPr/>
+          </a:p>
+        </p:txBody>
+      </p:sp>
+      <p:sp>
+        <p:nvSpPr>
+          <p:cNvPr id="15" name="TextBox 14"/>
+          <p:cNvSpPr txBox="1"/>
+          <p:nvPr/>
+        </p:nvSpPr>
+        <p:spPr>
+          <a:xfrm>
+            <a:off x="8229600" y="1691639"/>
+            <a:ext cx="2880360" cy="1508760"/>
+          </a:xfrm>
+          <a:prstGeom prst="rect">
+            <a:avLst/>
+          </a:prstGeom>
+          <a:noFill/>
+        </p:spPr>
+        <p:txBody>
+          <a:bodyPr wrap="square">
+            <a:spAutoFit/>
+          </a:bodyPr>
+          <a:lstStyle/>
+          <a:p>
+            <a:pPr>
+              <a:defRPr sz="1500" b="1">
+                <a:solidFill>
+                  <a:srgbClr val="0F2747"/>
+                </a:solidFill>
+                <a:latin typeface="Aptos"/>
+              </a:defRPr>
+            </a:pPr>
+            <a:r>
+              <a:t>Cautela metodológica</a:t>
+            </a:r>
+          </a:p>
+          <a:p>
+            <a:pPr>
+              <a:spcBef>
+                <a:spcPts val="600"/>
+              </a:spcBef>
+              <a:defRPr sz="1150">
+                <a:solidFill>
+                  <a:srgbClr val="1F2937"/>
+                </a:solidFill>
+                <a:latin typeface="Aptos"/>
+              </a:defRPr>
+            </a:pPr>
+            <a:r>
+              <a:t>Os status apresentam distribuição uniforme e não caracterizam claramente etapas sequenciais de um funil.</a:t>
+            </a:r>
+          </a:p>
+        </p:txBody>
+      </p:sp>
+      <p:sp>
+        <p:nvSpPr>
+          <p:cNvPr id="17" name="Rectangle 16"/>
+          <p:cNvSpPr/>
+          <p:nvPr/>
+        </p:nvSpPr>
+        <p:spPr>
+          <a:xfrm>
+            <a:off x="594360" y="6473952"/>
+            <a:ext cx="10972800" cy="13716"/>
+          </a:xfrm>
+          <a:prstGeom prst="rect">
+            <a:avLst/>
+          </a:prstGeom>
+          <a:solidFill>
+            <a:srgbClr val="DCE1E8"/>
+          </a:solidFill>
+          <a:ln>
+            <a:noFill/>
+          </a:ln>
+        </p:spPr>
+        <p:style>
+          <a:lnRef idx="1">
+            <a:schemeClr val="accent1"/>
+          </a:lnRef>
+          <a:fillRef idx="3">
+            <a:schemeClr val="accent1"/>
+          </a:fillRef>
+          <a:effectRef idx="2">
+            <a:schemeClr val="accent1"/>
+          </a:effectRef>
+          <a:fontRef idx="minor">
+            <a:schemeClr val="lt1"/>
+          </a:fontRef>
+        </p:style>
+        <p:txBody>
+          <a:bodyPr rtlCol="0" anchor="ctr"/>
+          <a:lstStyle/>
+          <a:p>
+            <a:pPr algn="ctr"/>
+            <a:endParaRPr/>
+          </a:p>
+        </p:txBody>
+      </p:sp>
+      <p:sp>
+        <p:nvSpPr>
+          <p:cNvPr id="18" name="TextBox 17"/>
+          <p:cNvSpPr txBox="1"/>
+          <p:nvPr/>
+        </p:nvSpPr>
+        <p:spPr>
+          <a:xfrm>
+            <a:off x="640080" y="6510528"/>
+            <a:ext cx="4572000" cy="201168"/>
+          </a:xfrm>
+          <a:prstGeom prst="rect">
+            <a:avLst/>
+          </a:prstGeom>
+          <a:noFill/>
+        </p:spPr>
+        <p:txBody>
+          <a:bodyPr wrap="none">
+            <a:spAutoFit/>
+          </a:bodyPr>
+          <a:lstStyle/>
+          <a:p>
+            <a:pPr>
+              <a:defRPr sz="800">
+                <a:solidFill>
+                  <a:srgbClr val="5D6978"/>
+                </a:solidFill>
+                <a:latin typeface="Aptos"/>
+              </a:defRPr>
+            </a:pPr>
+            <a:r>
+              <a:t>BanVic | Dashboard Comercial</a:t>
+            </a:r>
+          </a:p>
+        </p:txBody>
+      </p:sp>
+      <p:sp>
+        <p:nvSpPr>
+          <p:cNvPr id="20" name="TextBox 19">
+            <a:extLst>
+              <a:ext uri="{FF2B5EF4-FFF2-40B4-BE49-F238E27FC236}">
+                <a16:creationId xmlns:a16="http://schemas.microsoft.com/office/drawing/2014/main" id="{0FF3D601-4C0F-3E56-82AD-C7DA82E6C05E}"/>
+              </a:ext>
+            </a:extLst>
+          </p:cNvPr>
+          <p:cNvSpPr txBox="1"/>
+          <p:nvPr/>
+        </p:nvSpPr>
+        <p:spPr>
+          <a:xfrm>
+            <a:off x="786384" y="3977640"/>
+            <a:ext cx="6049260" cy="1549142"/>
+          </a:xfrm>
+          <a:prstGeom prst="rect">
+            <a:avLst/>
+          </a:prstGeom>
+          <a:noFill/>
+        </p:spPr>
+        <p:txBody>
+          <a:bodyPr wrap="square">
+            <a:spAutoFit/>
+          </a:bodyPr>
+          <a:lstStyle/>
+          <a:p>
+            <a:pPr>
+              <a:defRPr sz="1600" b="1">
+                <a:solidFill>
+                  <a:srgbClr val="0F2747"/>
+                </a:solidFill>
+                <a:latin typeface="Aptos"/>
+              </a:defRPr>
+            </a:pPr>
+            <a:r>
+              <a:rPr dirty="0" err="1"/>
+              <a:t>Leitura</a:t>
+            </a:r>
+            <a:r>
+              <a:rPr dirty="0"/>
+              <a:t> </a:t>
+            </a:r>
+            <a:r>
+              <a:rPr dirty="0" err="1"/>
+              <a:t>comercial</a:t>
+            </a:r>
+            <a:r>
+              <a:rPr lang="pt-BR" dirty="0"/>
+              <a:t>:</a:t>
+            </a:r>
+            <a:endParaRPr dirty="0"/>
+          </a:p>
+          <a:p>
+            <a:pPr>
+              <a:spcBef>
+                <a:spcPts val="800"/>
+              </a:spcBef>
+              <a:defRPr sz="1800">
+                <a:solidFill>
+                  <a:srgbClr val="1F2937"/>
+                </a:solidFill>
+                <a:latin typeface="Aptos"/>
+              </a:defRPr>
+            </a:pPr>
+            <a:r>
+              <a:rPr lang="pt-BR" dirty="0"/>
+              <a:t>Oportunidade para acompanhar volume e aprovação de crédito como indicadores comerciais, evitando inferências de conversão entre etapas sem informações adicionais sobre o processo.</a:t>
+            </a:r>
+          </a:p>
+        </p:txBody>
+      </p:sp>
+      <p:pic>
+        <p:nvPicPr>
+          <p:cNvPr id="22" name="Picture 21">
+            <a:extLst>
+              <a:ext uri="{FF2B5EF4-FFF2-40B4-BE49-F238E27FC236}">
+                <a16:creationId xmlns:a16="http://schemas.microsoft.com/office/drawing/2014/main" id="{D2FFE722-34C9-D756-1338-E4E49B4105C9}"/>
+              </a:ext>
+            </a:extLst>
+          </p:cNvPr>
+          <p:cNvPicPr>
+            <a:picLocks noChangeAspect="1"/>
+          </p:cNvPicPr>
+          <p:nvPr/>
+        </p:nvPicPr>
+        <p:blipFill>
+          <a:blip r:embed="rId2"/>
+          <a:stretch>
+            <a:fillRect/>
+          </a:stretch>
+        </p:blipFill>
+        <p:spPr>
+          <a:xfrm>
+            <a:off x="7460179" y="3648033"/>
+            <a:ext cx="4106981" cy="2378277"/>
+          </a:xfrm>
+          <a:prstGeom prst="rect">
+            <a:avLst/>
+          </a:prstGeom>
+        </p:spPr>
+      </p:pic>
+    </p:spTree>
+  </p:cSld>
+  <p:clrMapOvr>
+    <a:masterClrMapping/>
+  </p:clrMapOvr>
+</p:sld>
+</file>
+
+<file path=ppt/slides/slide7.xml><?xml version="1.0" encoding="utf-8"?>
 <p:sld xmlns:a="http://schemas.openxmlformats.org/drawingml/2006/main" xmlns:r="http://schemas.openxmlformats.org/officeDocument/2006/relationships" xmlns:p="http://schemas.openxmlformats.org/presentationml/2006/main">
   <p:cSld>
     <p:spTree>
@@ -9466,7 +12213,7 @@
 </p:sld>
 </file>
 
-<file path=ppt/slides/slide5.xml><?xml version="1.0" encoding="utf-8"?>
+<file path=ppt/slides/slide8.xml><?xml version="1.0" encoding="utf-8"?>
 <p:sld xmlns:a="http://schemas.openxmlformats.org/drawingml/2006/main" xmlns:r="http://schemas.openxmlformats.org/officeDocument/2006/relationships" xmlns:p="http://schemas.openxmlformats.org/presentationml/2006/main">
   <p:cSld>
     <p:spTree>
@@ -12546,7 +15293,7 @@
 </p:sld>
 </file>
 
-<file path=ppt/slides/slide6.xml><?xml version="1.0" encoding="utf-8"?>
+<file path=ppt/slides/slide9.xml><?xml version="1.0" encoding="utf-8"?>
 <p:sld xmlns:a="http://schemas.openxmlformats.org/drawingml/2006/main" xmlns:r="http://schemas.openxmlformats.org/officeDocument/2006/relationships" xmlns:p="http://schemas.openxmlformats.org/presentationml/2006/main">
   <p:cSld>
     <p:spTree>
@@ -12776,8 +15523,8 @@
         </p:nvSpPr>
         <p:spPr>
           <a:xfrm>
-            <a:off x="9217220" y="1215889"/>
-            <a:ext cx="2697412" cy="4848700"/>
+            <a:off x="9197018" y="2355271"/>
+            <a:ext cx="2697412" cy="2278765"/>
           </a:xfrm>
           <a:prstGeom prst="rect">
             <a:avLst/>
@@ -12789,224 +15536,6 @@
             <a:spAutoFit/>
           </a:bodyPr>
           <a:lstStyle/>
-          <a:p>
-            <a:pPr marL="171450" indent="-171450">
-              <a:lnSpc>
-                <a:spcPct val="150000"/>
-              </a:lnSpc>
-              <a:spcAft>
-                <a:spcPts val="1400"/>
-              </a:spcAft>
-              <a:buFont typeface="Arial" panose="020B0604020202020204" pitchFamily="34" charset="0"/>
-              <a:buChar char="•"/>
-              <a:defRPr sz="1800">
-                <a:solidFill>
-                  <a:srgbClr val="1F2937"/>
-                </a:solidFill>
-                <a:latin typeface="Aptos"/>
-              </a:defRPr>
-            </a:pPr>
-            <a:r>
-              <a:rPr sz="1100" dirty="0" err="1"/>
-              <a:t>Filtros</a:t>
-            </a:r>
-            <a:r>
-              <a:rPr sz="1100" dirty="0"/>
-              <a:t> </a:t>
-            </a:r>
-            <a:r>
-              <a:rPr sz="1100" dirty="0" err="1"/>
-              <a:t>por</a:t>
-            </a:r>
-            <a:r>
-              <a:rPr sz="1100" dirty="0"/>
-              <a:t> </a:t>
-            </a:r>
-            <a:r>
-              <a:rPr sz="1100" dirty="0" err="1"/>
-              <a:t>ano</a:t>
-            </a:r>
-            <a:r>
-              <a:rPr sz="1100" dirty="0"/>
-              <a:t>/</a:t>
-            </a:r>
-            <a:r>
-              <a:rPr sz="1100" dirty="0" err="1"/>
-              <a:t>mês</a:t>
-            </a:r>
-            <a:r>
-              <a:rPr sz="1100" dirty="0"/>
-              <a:t>, </a:t>
-            </a:r>
-            <a:r>
-              <a:rPr sz="1100" dirty="0" err="1"/>
-              <a:t>tipo</a:t>
-            </a:r>
-            <a:r>
-              <a:rPr sz="1100" dirty="0"/>
-              <a:t> de </a:t>
-            </a:r>
-            <a:r>
-              <a:rPr sz="1100" dirty="0" err="1"/>
-              <a:t>agência</a:t>
-            </a:r>
-            <a:r>
-              <a:rPr sz="1100" dirty="0"/>
-              <a:t>, </a:t>
-            </a:r>
-            <a:r>
-              <a:rPr sz="1100" dirty="0" err="1"/>
-              <a:t>agência</a:t>
-            </a:r>
-            <a:r>
-              <a:rPr sz="1100" dirty="0"/>
-              <a:t> e </a:t>
-            </a:r>
-            <a:r>
-              <a:rPr sz="1100" dirty="0" err="1"/>
-              <a:t>tipo</a:t>
-            </a:r>
-            <a:r>
-              <a:rPr sz="1100" dirty="0"/>
-              <a:t> de </a:t>
-            </a:r>
-            <a:r>
-              <a:rPr sz="1100" dirty="0" err="1"/>
-              <a:t>transação</a:t>
-            </a:r>
-            <a:r>
-              <a:rPr sz="1100" dirty="0"/>
-              <a:t>.</a:t>
-            </a:r>
-          </a:p>
-          <a:p>
-            <a:pPr marL="171450" indent="-171450">
-              <a:lnSpc>
-                <a:spcPct val="150000"/>
-              </a:lnSpc>
-              <a:spcAft>
-                <a:spcPts val="1400"/>
-              </a:spcAft>
-              <a:buFont typeface="Arial" panose="020B0604020202020204" pitchFamily="34" charset="0"/>
-              <a:buChar char="•"/>
-              <a:defRPr sz="1800">
-                <a:solidFill>
-                  <a:srgbClr val="1F2937"/>
-                </a:solidFill>
-                <a:latin typeface="Aptos"/>
-              </a:defRPr>
-            </a:pPr>
-            <a:r>
-              <a:rPr sz="1100" dirty="0"/>
-              <a:t>Cards </a:t>
-            </a:r>
-            <a:r>
-              <a:rPr sz="1100" dirty="0" err="1"/>
-              <a:t>executivos</a:t>
-            </a:r>
-            <a:r>
-              <a:rPr sz="1100" dirty="0"/>
-              <a:t> com </a:t>
-            </a:r>
-            <a:r>
-              <a:rPr sz="1100" dirty="0" err="1"/>
-              <a:t>clientes</a:t>
-            </a:r>
-            <a:r>
-              <a:rPr sz="1100" dirty="0"/>
-              <a:t> </a:t>
-            </a:r>
-            <a:r>
-              <a:rPr sz="1100" dirty="0" err="1"/>
-              <a:t>ativos</a:t>
-            </a:r>
-            <a:r>
-              <a:rPr sz="1100" dirty="0"/>
-              <a:t>, churn, </a:t>
-            </a:r>
-            <a:r>
-              <a:rPr sz="1100" dirty="0" err="1"/>
-              <a:t>novos</a:t>
-            </a:r>
-            <a:r>
-              <a:rPr sz="1100" dirty="0"/>
-              <a:t> </a:t>
-            </a:r>
-            <a:r>
-              <a:rPr sz="1100" dirty="0" err="1"/>
-              <a:t>clientes</a:t>
-            </a:r>
-            <a:r>
-              <a:rPr sz="1100" dirty="0"/>
-              <a:t>, </a:t>
-            </a:r>
-            <a:r>
-              <a:rPr sz="1100" dirty="0" err="1"/>
-              <a:t>transações</a:t>
-            </a:r>
-            <a:r>
-              <a:rPr sz="1100" dirty="0"/>
-              <a:t> e ticket </a:t>
-            </a:r>
-            <a:r>
-              <a:rPr sz="1100" dirty="0" err="1"/>
-              <a:t>médio</a:t>
-            </a:r>
-            <a:r>
-              <a:rPr sz="1100" dirty="0"/>
-              <a:t>.</a:t>
-            </a:r>
-          </a:p>
-          <a:p>
-            <a:pPr marL="171450" indent="-171450">
-              <a:lnSpc>
-                <a:spcPct val="150000"/>
-              </a:lnSpc>
-              <a:spcAft>
-                <a:spcPts val="1400"/>
-              </a:spcAft>
-              <a:buFont typeface="Arial" panose="020B0604020202020204" pitchFamily="34" charset="0"/>
-              <a:buChar char="•"/>
-              <a:defRPr sz="1800">
-                <a:solidFill>
-                  <a:srgbClr val="1F2937"/>
-                </a:solidFill>
-                <a:latin typeface="Aptos"/>
-              </a:defRPr>
-            </a:pPr>
-            <a:r>
-              <a:rPr sz="1100" dirty="0" err="1"/>
-              <a:t>Comparações</a:t>
-            </a:r>
-            <a:r>
-              <a:rPr sz="1100" dirty="0"/>
-              <a:t> com 2020 para </a:t>
-            </a:r>
-            <a:r>
-              <a:rPr sz="1100" dirty="0" err="1"/>
-              <a:t>contextualizar</a:t>
-            </a:r>
-            <a:r>
-              <a:rPr sz="1100" dirty="0"/>
-              <a:t> a </a:t>
-            </a:r>
-            <a:r>
-              <a:rPr sz="1100" dirty="0" err="1"/>
-              <a:t>evolução</a:t>
-            </a:r>
-            <a:r>
-              <a:rPr sz="1100" dirty="0"/>
-              <a:t> dos </a:t>
-            </a:r>
-            <a:r>
-              <a:rPr sz="1100" dirty="0" err="1"/>
-              <a:t>resultados</a:t>
-            </a:r>
-            <a:r>
-              <a:rPr sz="1100" dirty="0"/>
-              <a:t>.</a:t>
-            </a:r>
-          </a:p>
           <a:p>
             <a:pPr marL="171450" indent="-171450">
               <a:lnSpc>
@@ -13446,189 +15975,6 @@
                       </p:childTnLst>
                     </p:cTn>
                   </p:par>
-                  <p:par>
-                    <p:cTn id="13" fill="hold">
-                      <p:stCondLst>
-                        <p:cond delay="indefinite"/>
-                      </p:stCondLst>
-                      <p:childTnLst>
-                        <p:par>
-                          <p:cTn id="14" fill="hold">
-                            <p:stCondLst>
-                              <p:cond delay="0"/>
-                            </p:stCondLst>
-                            <p:childTnLst>
-                              <p:par>
-                                <p:cTn id="15" presetID="10" presetClass="entr" presetSubtype="0" fill="hold" grpId="0" nodeType="clickEffect">
-                                  <p:stCondLst>
-                                    <p:cond delay="0"/>
-                                  </p:stCondLst>
-                                  <p:childTnLst>
-                                    <p:set>
-                                      <p:cBhvr>
-                                        <p:cTn id="16" dur="1" fill="hold">
-                                          <p:stCondLst>
-                                            <p:cond delay="0"/>
-                                          </p:stCondLst>
-                                        </p:cTn>
-                                        <p:tgtEl>
-                                          <p:spTgt spid="7">
-                                            <p:txEl>
-                                              <p:pRg st="2" end="2"/>
-                                            </p:txEl>
-                                          </p:spTgt>
-                                        </p:tgtEl>
-                                        <p:attrNameLst>
-                                          <p:attrName>style.visibility</p:attrName>
-                                        </p:attrNameLst>
-                                      </p:cBhvr>
-                                      <p:to>
-                                        <p:strVal val="visible"/>
-                                      </p:to>
-                                    </p:set>
-                                    <p:animEffect transition="in" filter="fade">
-                                      <p:cBhvr>
-                                        <p:cTn id="17" dur="500"/>
-                                        <p:tgtEl>
-                                          <p:spTgt spid="7">
-                                            <p:txEl>
-                                              <p:pRg st="2" end="2"/>
-                                            </p:txEl>
-                                          </p:spTgt>
-                                        </p:tgtEl>
-                                      </p:cBhvr>
-                                    </p:animEffect>
-                                  </p:childTnLst>
-                                </p:cTn>
-                              </p:par>
-                            </p:childTnLst>
-                          </p:cTn>
-                        </p:par>
-                      </p:childTnLst>
-                    </p:cTn>
-                  </p:par>
-                  <p:par>
-                    <p:cTn id="18" fill="hold">
-                      <p:stCondLst>
-                        <p:cond delay="indefinite"/>
-                      </p:stCondLst>
-                      <p:childTnLst>
-                        <p:par>
-                          <p:cTn id="19" fill="hold">
-                            <p:stCondLst>
-                              <p:cond delay="0"/>
-                            </p:stCondLst>
-                            <p:childTnLst>
-                              <p:par>
-                                <p:cTn id="20" presetID="10" presetClass="entr" presetSubtype="0" fill="hold" grpId="0" nodeType="clickEffect">
-                                  <p:stCondLst>
-                                    <p:cond delay="0"/>
-                                  </p:stCondLst>
-                                  <p:childTnLst>
-                                    <p:set>
-                                      <p:cBhvr>
-                                        <p:cTn id="21" dur="1" fill="hold">
-                                          <p:stCondLst>
-                                            <p:cond delay="0"/>
-                                          </p:stCondLst>
-                                        </p:cTn>
-                                        <p:tgtEl>
-                                          <p:spTgt spid="7">
-                                            <p:txEl>
-                                              <p:pRg st="3" end="3"/>
-                                            </p:txEl>
-                                          </p:spTgt>
-                                        </p:tgtEl>
-                                        <p:attrNameLst>
-                                          <p:attrName>style.visibility</p:attrName>
-                                        </p:attrNameLst>
-                                      </p:cBhvr>
-                                      <p:to>
-                                        <p:strVal val="visible"/>
-                                      </p:to>
-                                    </p:set>
-                                    <p:animEffect transition="in" filter="fade">
-                                      <p:cBhvr>
-                                        <p:cTn id="22" dur="500"/>
-                                        <p:tgtEl>
-                                          <p:spTgt spid="7">
-                                            <p:txEl>
-                                              <p:pRg st="3" end="3"/>
-                                            </p:txEl>
-                                          </p:spTgt>
-                                        </p:tgtEl>
-                                      </p:cBhvr>
-                                    </p:animEffect>
-                                  </p:childTnLst>
-                                </p:cTn>
-                              </p:par>
-                            </p:childTnLst>
-                          </p:cTn>
-                        </p:par>
-                      </p:childTnLst>
-                    </p:cTn>
-                  </p:par>
-                  <p:par>
-                    <p:cTn id="23" fill="hold">
-                      <p:stCondLst>
-                        <p:cond delay="indefinite"/>
-                      </p:stCondLst>
-                      <p:childTnLst>
-                        <p:par>
-                          <p:cTn id="24" fill="hold">
-                            <p:stCondLst>
-                              <p:cond delay="0"/>
-                            </p:stCondLst>
-                            <p:childTnLst>
-                              <p:par>
-                                <p:cTn id="25" presetID="10" presetClass="entr" presetSubtype="0" fill="hold" grpId="0" nodeType="clickEffect">
-                                  <p:stCondLst>
-                                    <p:cond delay="0"/>
-                                  </p:stCondLst>
-                                  <p:childTnLst>
-                                    <p:set>
-                                      <p:cBhvr>
-                                        <p:cTn id="26" dur="1" fill="hold">
-                                          <p:stCondLst>
-                                            <p:cond delay="0"/>
-                                          </p:stCondLst>
-                                        </p:cTn>
-                                        <p:tgtEl>
-                                          <p:spTgt spid="7">
-                                            <p:txEl>
-                                              <p:pRg st="4" end="4"/>
-                                            </p:txEl>
-                                          </p:spTgt>
-                                        </p:tgtEl>
-                                        <p:attrNameLst>
-                                          <p:attrName>style.visibility</p:attrName>
-                                        </p:attrNameLst>
-                                      </p:cBhvr>
-                                      <p:to>
-                                        <p:strVal val="visible"/>
-                                      </p:to>
-                                    </p:set>
-                                    <p:animEffect transition="in" filter="fade">
-                                      <p:cBhvr>
-                                        <p:cTn id="27" dur="500"/>
-                                        <p:tgtEl>
-                                          <p:spTgt spid="7">
-                                            <p:txEl>
-                                              <p:pRg st="4" end="4"/>
-                                            </p:txEl>
-                                          </p:spTgt>
-                                        </p:tgtEl>
-                                      </p:cBhvr>
-                                    </p:animEffect>
-                                  </p:childTnLst>
-                                </p:cTn>
-                              </p:par>
-                            </p:childTnLst>
-                          </p:cTn>
-                        </p:par>
-                      </p:childTnLst>
-                    </p:cTn>
-                  </p:par>
                 </p:childTnLst>
               </p:cTn>
               <p:prevCondLst>
@@ -13654,3062 +16000,6 @@
       <p:bldP spid="7" grpId="0" build="p"/>
     </p:bldLst>
   </p:timing>
-</p:sld>
-</file>
-
-<file path=ppt/slides/slide7.xml><?xml version="1.0" encoding="utf-8"?>
-<p:sld xmlns:a="http://schemas.openxmlformats.org/drawingml/2006/main" xmlns:r="http://schemas.openxmlformats.org/officeDocument/2006/relationships" xmlns:p="http://schemas.openxmlformats.org/presentationml/2006/main">
-  <p:cSld>
-    <p:spTree>
-      <p:nvGrpSpPr>
-        <p:cNvPr id="1" name=""/>
-        <p:cNvGrpSpPr/>
-        <p:nvPr/>
-      </p:nvGrpSpPr>
-      <p:grpSpPr>
-        <a:xfrm>
-          <a:off x="0" y="0"/>
-          <a:ext cx="0" cy="0"/>
-          <a:chOff x="0" y="0"/>
-          <a:chExt cx="0" cy="0"/>
-        </a:xfrm>
-      </p:grpSpPr>
-      <p:sp>
-        <p:nvSpPr>
-          <p:cNvPr id="2" name="Rectangle 1"/>
-          <p:cNvSpPr/>
-          <p:nvPr/>
-        </p:nvSpPr>
-        <p:spPr>
-          <a:xfrm>
-            <a:off x="0" y="0"/>
-            <a:ext cx="12191695" cy="6858000"/>
-          </a:xfrm>
-          <a:prstGeom prst="rect">
-            <a:avLst/>
-          </a:prstGeom>
-          <a:solidFill>
-            <a:srgbClr val="F7F9FC"/>
-          </a:solidFill>
-          <a:ln>
-            <a:noFill/>
-          </a:ln>
-        </p:spPr>
-        <p:style>
-          <a:lnRef idx="1">
-            <a:schemeClr val="accent1"/>
-          </a:lnRef>
-          <a:fillRef idx="3">
-            <a:schemeClr val="accent1"/>
-          </a:fillRef>
-          <a:effectRef idx="2">
-            <a:schemeClr val="accent1"/>
-          </a:effectRef>
-          <a:fontRef idx="minor">
-            <a:schemeClr val="lt1"/>
-          </a:fontRef>
-        </p:style>
-        <p:txBody>
-          <a:bodyPr rtlCol="0" anchor="ctr"/>
-          <a:lstStyle/>
-          <a:p>
-            <a:pPr algn="ctr"/>
-            <a:endParaRPr/>
-          </a:p>
-        </p:txBody>
-      </p:sp>
-      <p:sp>
-        <p:nvSpPr>
-          <p:cNvPr id="3" name="Rectangle 2"/>
-          <p:cNvSpPr/>
-          <p:nvPr/>
-        </p:nvSpPr>
-        <p:spPr>
-          <a:xfrm>
-            <a:off x="502920" y="502920"/>
-            <a:ext cx="109728" cy="685800"/>
-          </a:xfrm>
-          <a:prstGeom prst="rect">
-            <a:avLst/>
-          </a:prstGeom>
-          <a:solidFill>
-            <a:srgbClr val="245B91"/>
-          </a:solidFill>
-          <a:ln>
-            <a:noFill/>
-          </a:ln>
-        </p:spPr>
-        <p:style>
-          <a:lnRef idx="1">
-            <a:schemeClr val="accent1"/>
-          </a:lnRef>
-          <a:fillRef idx="3">
-            <a:schemeClr val="accent1"/>
-          </a:fillRef>
-          <a:effectRef idx="2">
-            <a:schemeClr val="accent1"/>
-          </a:effectRef>
-          <a:fontRef idx="minor">
-            <a:schemeClr val="lt1"/>
-          </a:fontRef>
-        </p:style>
-        <p:txBody>
-          <a:bodyPr rtlCol="0" anchor="ctr"/>
-          <a:lstStyle/>
-          <a:p>
-            <a:pPr algn="ctr"/>
-            <a:endParaRPr/>
-          </a:p>
-        </p:txBody>
-      </p:sp>
-      <p:sp>
-        <p:nvSpPr>
-          <p:cNvPr id="4" name="TextBox 3"/>
-          <p:cNvSpPr txBox="1"/>
-          <p:nvPr/>
-        </p:nvSpPr>
-        <p:spPr>
-          <a:xfrm>
-            <a:off x="777240" y="475488"/>
-            <a:ext cx="3784754" cy="507831"/>
-          </a:xfrm>
-          <a:prstGeom prst="rect">
-            <a:avLst/>
-          </a:prstGeom>
-          <a:noFill/>
-        </p:spPr>
-        <p:txBody>
-          <a:bodyPr wrap="none">
-            <a:spAutoFit/>
-          </a:bodyPr>
-          <a:lstStyle/>
-          <a:p>
-            <a:pPr>
-              <a:defRPr sz="2700" b="1">
-                <a:solidFill>
-                  <a:srgbClr val="0F2747"/>
-                </a:solidFill>
-                <a:latin typeface="Aptos Display"/>
-              </a:defRPr>
-            </a:pPr>
-            <a:r>
-              <a:rPr dirty="0" err="1"/>
-              <a:t>Clientes</a:t>
-            </a:r>
-            <a:r>
-              <a:rPr dirty="0"/>
-              <a:t> e </a:t>
-            </a:r>
-            <a:r>
-              <a:rPr lang="pt-BR" dirty="0"/>
-              <a:t>a</a:t>
-            </a:r>
-            <a:r>
-              <a:rPr dirty="0" err="1"/>
-              <a:t>doção</a:t>
-            </a:r>
-            <a:r>
-              <a:rPr dirty="0"/>
-              <a:t> </a:t>
-            </a:r>
-            <a:r>
-              <a:rPr lang="pt-BR" dirty="0"/>
-              <a:t>d</a:t>
-            </a:r>
-            <a:r>
-              <a:rPr dirty="0" err="1"/>
-              <a:t>igital</a:t>
-            </a:r>
-            <a:endParaRPr dirty="0"/>
-          </a:p>
-        </p:txBody>
-      </p:sp>
-      <p:sp>
-        <p:nvSpPr>
-          <p:cNvPr id="5" name="TextBox 4"/>
-          <p:cNvSpPr txBox="1"/>
-          <p:nvPr/>
-        </p:nvSpPr>
-        <p:spPr>
-          <a:xfrm>
-            <a:off x="786384" y="1024128"/>
-            <a:ext cx="10424160" cy="411480"/>
-          </a:xfrm>
-          <a:prstGeom prst="rect">
-            <a:avLst/>
-          </a:prstGeom>
-          <a:noFill/>
-        </p:spPr>
-        <p:txBody>
-          <a:bodyPr wrap="none">
-            <a:spAutoFit/>
-          </a:bodyPr>
-          <a:lstStyle/>
-          <a:p>
-            <a:pPr>
-              <a:defRPr sz="1200">
-                <a:solidFill>
-                  <a:srgbClr val="5D6978"/>
-                </a:solidFill>
-                <a:latin typeface="Aptos"/>
-              </a:defRPr>
-            </a:pPr>
-            <a:r>
-              <a:t>Evolução da atividade da base e expansão do canal digital</a:t>
-            </a:r>
-          </a:p>
-        </p:txBody>
-      </p:sp>
-      <p:sp>
-        <p:nvSpPr>
-          <p:cNvPr id="6" name="TextBox 5"/>
-          <p:cNvSpPr txBox="1"/>
-          <p:nvPr/>
-        </p:nvSpPr>
-        <p:spPr>
-          <a:xfrm>
-            <a:off x="11155680" y="502920"/>
-            <a:ext cx="457200" cy="365760"/>
-          </a:xfrm>
-          <a:prstGeom prst="rect">
-            <a:avLst/>
-          </a:prstGeom>
-          <a:noFill/>
-        </p:spPr>
-        <p:txBody>
-          <a:bodyPr wrap="none">
-            <a:spAutoFit/>
-          </a:bodyPr>
-          <a:lstStyle/>
-          <a:p>
-            <a:pPr algn="r">
-              <a:defRPr sz="1100" b="1">
-                <a:solidFill>
-                  <a:srgbClr val="5D6978"/>
-                </a:solidFill>
-                <a:latin typeface="Aptos"/>
-              </a:defRPr>
-            </a:pPr>
-            <a:r>
-              <a:t>07</a:t>
-            </a:r>
-          </a:p>
-        </p:txBody>
-      </p:sp>
-      <p:sp>
-        <p:nvSpPr>
-          <p:cNvPr id="7" name="Rounded Rectangle 6"/>
-          <p:cNvSpPr/>
-          <p:nvPr/>
-        </p:nvSpPr>
-        <p:spPr>
-          <a:xfrm>
-            <a:off x="822960" y="1508760"/>
-            <a:ext cx="3383280" cy="1920240"/>
-          </a:xfrm>
-          <a:prstGeom prst="roundRect">
-            <a:avLst/>
-          </a:prstGeom>
-          <a:solidFill>
-            <a:srgbClr val="FFFFFF"/>
-          </a:solidFill>
-          <a:ln>
-            <a:solidFill>
-              <a:srgbClr val="DCE1E8"/>
-            </a:solidFill>
-          </a:ln>
-        </p:spPr>
-        <p:style>
-          <a:lnRef idx="1">
-            <a:schemeClr val="accent1"/>
-          </a:lnRef>
-          <a:fillRef idx="3">
-            <a:schemeClr val="accent1"/>
-          </a:fillRef>
-          <a:effectRef idx="2">
-            <a:schemeClr val="accent1"/>
-          </a:effectRef>
-          <a:fontRef idx="minor">
-            <a:schemeClr val="lt1"/>
-          </a:fontRef>
-        </p:style>
-        <p:txBody>
-          <a:bodyPr rtlCol="0" anchor="ctr"/>
-          <a:lstStyle/>
-          <a:p>
-            <a:pPr algn="ctr"/>
-            <a:endParaRPr/>
-          </a:p>
-        </p:txBody>
-      </p:sp>
-      <p:sp>
-        <p:nvSpPr>
-          <p:cNvPr id="8" name="Rectangle 7"/>
-          <p:cNvSpPr/>
-          <p:nvPr/>
-        </p:nvSpPr>
-        <p:spPr>
-          <a:xfrm>
-            <a:off x="822960" y="1508760"/>
-            <a:ext cx="73152" cy="1920240"/>
-          </a:xfrm>
-          <a:prstGeom prst="rect">
-            <a:avLst/>
-          </a:prstGeom>
-          <a:solidFill>
-            <a:srgbClr val="245B91"/>
-          </a:solidFill>
-          <a:ln>
-            <a:noFill/>
-          </a:ln>
-        </p:spPr>
-        <p:style>
-          <a:lnRef idx="1">
-            <a:schemeClr val="accent1"/>
-          </a:lnRef>
-          <a:fillRef idx="3">
-            <a:schemeClr val="accent1"/>
-          </a:fillRef>
-          <a:effectRef idx="2">
-            <a:schemeClr val="accent1"/>
-          </a:effectRef>
-          <a:fontRef idx="minor">
-            <a:schemeClr val="lt1"/>
-          </a:fontRef>
-        </p:style>
-        <p:txBody>
-          <a:bodyPr rtlCol="0" anchor="ctr"/>
-          <a:lstStyle/>
-          <a:p>
-            <a:pPr algn="ctr"/>
-            <a:endParaRPr/>
-          </a:p>
-        </p:txBody>
-      </p:sp>
-      <p:sp>
-        <p:nvSpPr>
-          <p:cNvPr id="9" name="TextBox 8"/>
-          <p:cNvSpPr txBox="1"/>
-          <p:nvPr/>
-        </p:nvSpPr>
-        <p:spPr>
-          <a:xfrm>
-            <a:off x="1051560" y="1691639"/>
-            <a:ext cx="2971800" cy="1600200"/>
-          </a:xfrm>
-          <a:prstGeom prst="rect">
-            <a:avLst/>
-          </a:prstGeom>
-          <a:noFill/>
-        </p:spPr>
-        <p:txBody>
-          <a:bodyPr wrap="square">
-            <a:spAutoFit/>
-          </a:bodyPr>
-          <a:lstStyle/>
-          <a:p>
-            <a:pPr>
-              <a:defRPr sz="1500" b="1">
-                <a:solidFill>
-                  <a:srgbClr val="0F2747"/>
-                </a:solidFill>
-                <a:latin typeface="Aptos"/>
-              </a:defRPr>
-            </a:pPr>
-            <a:r>
-              <a:t>Atividade</a:t>
-            </a:r>
-          </a:p>
-          <a:p>
-            <a:pPr>
-              <a:spcBef>
-                <a:spcPts val="600"/>
-              </a:spcBef>
-              <a:defRPr sz="1150">
-                <a:solidFill>
-                  <a:srgbClr val="1F2937"/>
-                </a:solidFill>
-                <a:latin typeface="Aptos"/>
-              </a:defRPr>
-            </a:pPr>
-            <a:r>
-              <a:t>58,7% em 2020</a:t>
-            </a:r>
-            <a:br/>
-            <a:r>
-              <a:t>66,2% em 2021</a:t>
-            </a:r>
-            <a:br/>
-            <a:r>
-              <a:t>78,4% em 2022</a:t>
-            </a:r>
-          </a:p>
-        </p:txBody>
-      </p:sp>
-      <p:sp>
-        <p:nvSpPr>
-          <p:cNvPr id="10" name="Rounded Rectangle 9"/>
-          <p:cNvSpPr/>
-          <p:nvPr/>
-        </p:nvSpPr>
-        <p:spPr>
-          <a:xfrm>
-            <a:off x="4407408" y="1508760"/>
-            <a:ext cx="3383280" cy="1920240"/>
-          </a:xfrm>
-          <a:prstGeom prst="roundRect">
-            <a:avLst/>
-          </a:prstGeom>
-          <a:solidFill>
-            <a:srgbClr val="FFFFFF"/>
-          </a:solidFill>
-          <a:ln>
-            <a:solidFill>
-              <a:srgbClr val="DCE1E8"/>
-            </a:solidFill>
-          </a:ln>
-        </p:spPr>
-        <p:style>
-          <a:lnRef idx="1">
-            <a:schemeClr val="accent1"/>
-          </a:lnRef>
-          <a:fillRef idx="3">
-            <a:schemeClr val="accent1"/>
-          </a:fillRef>
-          <a:effectRef idx="2">
-            <a:schemeClr val="accent1"/>
-          </a:effectRef>
-          <a:fontRef idx="minor">
-            <a:schemeClr val="lt1"/>
-          </a:fontRef>
-        </p:style>
-        <p:txBody>
-          <a:bodyPr rtlCol="0" anchor="ctr"/>
-          <a:lstStyle/>
-          <a:p>
-            <a:pPr algn="ctr"/>
-            <a:endParaRPr/>
-          </a:p>
-        </p:txBody>
-      </p:sp>
-      <p:sp>
-        <p:nvSpPr>
-          <p:cNvPr id="11" name="Rectangle 10"/>
-          <p:cNvSpPr/>
-          <p:nvPr/>
-        </p:nvSpPr>
-        <p:spPr>
-          <a:xfrm>
-            <a:off x="4407408" y="1508760"/>
-            <a:ext cx="73152" cy="1920240"/>
-          </a:xfrm>
-          <a:prstGeom prst="rect">
-            <a:avLst/>
-          </a:prstGeom>
-          <a:solidFill>
-            <a:srgbClr val="E58F40"/>
-          </a:solidFill>
-          <a:ln>
-            <a:noFill/>
-          </a:ln>
-        </p:spPr>
-        <p:style>
-          <a:lnRef idx="1">
-            <a:schemeClr val="accent1"/>
-          </a:lnRef>
-          <a:fillRef idx="3">
-            <a:schemeClr val="accent1"/>
-          </a:fillRef>
-          <a:effectRef idx="2">
-            <a:schemeClr val="accent1"/>
-          </a:effectRef>
-          <a:fontRef idx="minor">
-            <a:schemeClr val="lt1"/>
-          </a:fontRef>
-        </p:style>
-        <p:txBody>
-          <a:bodyPr rtlCol="0" anchor="ctr"/>
-          <a:lstStyle/>
-          <a:p>
-            <a:pPr algn="ctr"/>
-            <a:endParaRPr/>
-          </a:p>
-        </p:txBody>
-      </p:sp>
-      <p:sp>
-        <p:nvSpPr>
-          <p:cNvPr id="12" name="TextBox 11"/>
-          <p:cNvSpPr txBox="1"/>
-          <p:nvPr/>
-        </p:nvSpPr>
-        <p:spPr>
-          <a:xfrm>
-            <a:off x="4636008" y="1691639"/>
-            <a:ext cx="2971800" cy="754053"/>
-          </a:xfrm>
-          <a:prstGeom prst="rect">
-            <a:avLst/>
-          </a:prstGeom>
-          <a:noFill/>
-        </p:spPr>
-        <p:txBody>
-          <a:bodyPr wrap="square">
-            <a:spAutoFit/>
-          </a:bodyPr>
-          <a:lstStyle/>
-          <a:p>
-            <a:pPr>
-              <a:defRPr sz="1500" b="1">
-                <a:solidFill>
-                  <a:srgbClr val="0F2747"/>
-                </a:solidFill>
-                <a:latin typeface="Aptos"/>
-              </a:defRPr>
-            </a:pPr>
-            <a:r>
-              <a:rPr dirty="0"/>
-              <a:t>Base </a:t>
-            </a:r>
-            <a:r>
-              <a:rPr lang="pt-BR" dirty="0"/>
-              <a:t>d</a:t>
-            </a:r>
-            <a:r>
-              <a:rPr dirty="0" err="1"/>
-              <a:t>igital</a:t>
-            </a:r>
-            <a:r>
-              <a:rPr dirty="0"/>
-              <a:t> </a:t>
-            </a:r>
-            <a:r>
-              <a:rPr dirty="0" err="1"/>
-              <a:t>em</a:t>
-            </a:r>
-            <a:r>
-              <a:rPr dirty="0"/>
-              <a:t> 2022</a:t>
-            </a:r>
-          </a:p>
-          <a:p>
-            <a:pPr>
-              <a:spcBef>
-                <a:spcPts val="600"/>
-              </a:spcBef>
-              <a:defRPr sz="1150">
-                <a:solidFill>
-                  <a:srgbClr val="1F2937"/>
-                </a:solidFill>
-                <a:latin typeface="Aptos"/>
-              </a:defRPr>
-            </a:pPr>
-            <a:r>
-              <a:rPr dirty="0"/>
-              <a:t>460 </a:t>
-            </a:r>
-            <a:r>
-              <a:rPr dirty="0" err="1"/>
-              <a:t>contas</a:t>
-            </a:r>
-            <a:r>
-              <a:rPr dirty="0"/>
-              <a:t> </a:t>
-            </a:r>
-            <a:r>
-              <a:rPr dirty="0" err="1"/>
-              <a:t>digitais</a:t>
-            </a:r>
-            <a:r>
-              <a:rPr dirty="0"/>
-              <a:t> </a:t>
-            </a:r>
-            <a:r>
-              <a:rPr dirty="0" err="1"/>
-              <a:t>acumuladas</a:t>
-            </a:r>
-            <a:br>
-              <a:rPr dirty="0"/>
-            </a:br>
-            <a:r>
-              <a:rPr dirty="0"/>
-              <a:t>vs. 539 </a:t>
-            </a:r>
-            <a:r>
-              <a:rPr dirty="0" err="1"/>
-              <a:t>contas</a:t>
-            </a:r>
-            <a:r>
-              <a:rPr dirty="0"/>
-              <a:t> </a:t>
-            </a:r>
-            <a:r>
-              <a:rPr dirty="0" err="1"/>
-              <a:t>físicas</a:t>
-            </a:r>
-            <a:endParaRPr dirty="0"/>
-          </a:p>
-        </p:txBody>
-      </p:sp>
-      <p:sp>
-        <p:nvSpPr>
-          <p:cNvPr id="13" name="Rounded Rectangle 12"/>
-          <p:cNvSpPr/>
-          <p:nvPr/>
-        </p:nvSpPr>
-        <p:spPr>
-          <a:xfrm>
-            <a:off x="7991856" y="1508760"/>
-            <a:ext cx="3383280" cy="1920240"/>
-          </a:xfrm>
-          <a:prstGeom prst="roundRect">
-            <a:avLst/>
-          </a:prstGeom>
-          <a:solidFill>
-            <a:srgbClr val="FFFFFF"/>
-          </a:solidFill>
-          <a:ln>
-            <a:solidFill>
-              <a:srgbClr val="DCE1E8"/>
-            </a:solidFill>
-          </a:ln>
-        </p:spPr>
-        <p:style>
-          <a:lnRef idx="1">
-            <a:schemeClr val="accent1"/>
-          </a:lnRef>
-          <a:fillRef idx="3">
-            <a:schemeClr val="accent1"/>
-          </a:fillRef>
-          <a:effectRef idx="2">
-            <a:schemeClr val="accent1"/>
-          </a:effectRef>
-          <a:fontRef idx="minor">
-            <a:schemeClr val="lt1"/>
-          </a:fontRef>
-        </p:style>
-        <p:txBody>
-          <a:bodyPr rtlCol="0" anchor="ctr"/>
-          <a:lstStyle/>
-          <a:p>
-            <a:pPr algn="ctr"/>
-            <a:endParaRPr/>
-          </a:p>
-        </p:txBody>
-      </p:sp>
-      <p:sp>
-        <p:nvSpPr>
-          <p:cNvPr id="14" name="Rectangle 13"/>
-          <p:cNvSpPr/>
-          <p:nvPr/>
-        </p:nvSpPr>
-        <p:spPr>
-          <a:xfrm>
-            <a:off x="7991856" y="1508760"/>
-            <a:ext cx="73152" cy="1920240"/>
-          </a:xfrm>
-          <a:prstGeom prst="rect">
-            <a:avLst/>
-          </a:prstGeom>
-          <a:solidFill>
-            <a:srgbClr val="76528E"/>
-          </a:solidFill>
-          <a:ln>
-            <a:noFill/>
-          </a:ln>
-        </p:spPr>
-        <p:style>
-          <a:lnRef idx="1">
-            <a:schemeClr val="accent1"/>
-          </a:lnRef>
-          <a:fillRef idx="3">
-            <a:schemeClr val="accent1"/>
-          </a:fillRef>
-          <a:effectRef idx="2">
-            <a:schemeClr val="accent1"/>
-          </a:effectRef>
-          <a:fontRef idx="minor">
-            <a:schemeClr val="lt1"/>
-          </a:fontRef>
-        </p:style>
-        <p:txBody>
-          <a:bodyPr rtlCol="0" anchor="ctr"/>
-          <a:lstStyle/>
-          <a:p>
-            <a:pPr algn="ctr"/>
-            <a:endParaRPr/>
-          </a:p>
-        </p:txBody>
-      </p:sp>
-      <p:sp>
-        <p:nvSpPr>
-          <p:cNvPr id="15" name="TextBox 14"/>
-          <p:cNvSpPr txBox="1"/>
-          <p:nvPr/>
-        </p:nvSpPr>
-        <p:spPr>
-          <a:xfrm>
-            <a:off x="8220456" y="1691639"/>
-            <a:ext cx="2971800" cy="1600200"/>
-          </a:xfrm>
-          <a:prstGeom prst="rect">
-            <a:avLst/>
-          </a:prstGeom>
-          <a:noFill/>
-        </p:spPr>
-        <p:txBody>
-          <a:bodyPr wrap="square">
-            <a:spAutoFit/>
-          </a:bodyPr>
-          <a:lstStyle/>
-          <a:p>
-            <a:pPr>
-              <a:defRPr sz="1500" b="1">
-                <a:solidFill>
-                  <a:srgbClr val="0F2747"/>
-                </a:solidFill>
-                <a:latin typeface="Aptos"/>
-              </a:defRPr>
-            </a:pPr>
-            <a:r>
-              <a:t>Evolução do canal</a:t>
-            </a:r>
-          </a:p>
-          <a:p>
-            <a:pPr>
-              <a:spcBef>
-                <a:spcPts val="600"/>
-              </a:spcBef>
-              <a:defRPr sz="1150">
-                <a:solidFill>
-                  <a:srgbClr val="1F2937"/>
-                </a:solidFill>
-                <a:latin typeface="Aptos"/>
-              </a:defRPr>
-            </a:pPr>
-            <a:r>
-              <a:t>A diferença entre as bases caiu de 188 contas em 2015 para 79 em 2022.</a:t>
-            </a:r>
-          </a:p>
-        </p:txBody>
-      </p:sp>
-      <p:sp>
-        <p:nvSpPr>
-          <p:cNvPr id="16" name="TextBox 15"/>
-          <p:cNvSpPr txBox="1"/>
-          <p:nvPr/>
-        </p:nvSpPr>
-        <p:spPr>
-          <a:xfrm>
-            <a:off x="914400" y="3886200"/>
-            <a:ext cx="10360465" cy="1097736"/>
-          </a:xfrm>
-          <a:prstGeom prst="rect">
-            <a:avLst/>
-          </a:prstGeom>
-          <a:noFill/>
-        </p:spPr>
-        <p:txBody>
-          <a:bodyPr wrap="none">
-            <a:spAutoFit/>
-          </a:bodyPr>
-          <a:lstStyle/>
-          <a:p>
-            <a:pPr>
-              <a:defRPr sz="1600" b="1">
-                <a:solidFill>
-                  <a:srgbClr val="0F2747"/>
-                </a:solidFill>
-                <a:latin typeface="Aptos"/>
-              </a:defRPr>
-            </a:pPr>
-            <a:r>
-              <a:rPr dirty="0" err="1"/>
-              <a:t>Leitura</a:t>
-            </a:r>
-            <a:r>
-              <a:rPr dirty="0"/>
-              <a:t> </a:t>
-            </a:r>
-            <a:r>
-              <a:rPr dirty="0" err="1"/>
-              <a:t>comercial</a:t>
-            </a:r>
-            <a:r>
-              <a:rPr lang="pt-BR" dirty="0"/>
-              <a:t>:</a:t>
-            </a:r>
-            <a:endParaRPr dirty="0"/>
-          </a:p>
-          <a:p>
-            <a:pPr>
-              <a:spcBef>
-                <a:spcPts val="800"/>
-              </a:spcBef>
-              <a:defRPr sz="1800">
-                <a:solidFill>
-                  <a:srgbClr val="1F2937"/>
-                </a:solidFill>
-                <a:latin typeface="Aptos"/>
-              </a:defRPr>
-            </a:pPr>
-            <a:r>
-              <a:rPr dirty="0"/>
-              <a:t>A </a:t>
-            </a:r>
-            <a:r>
-              <a:rPr dirty="0" err="1"/>
-              <a:t>recuperação</a:t>
-            </a:r>
-            <a:r>
-              <a:rPr dirty="0"/>
-              <a:t> da </a:t>
-            </a:r>
-            <a:r>
-              <a:rPr dirty="0" err="1"/>
-              <a:t>atividade</a:t>
-            </a:r>
-            <a:r>
-              <a:rPr dirty="0"/>
-              <a:t> e a </a:t>
-            </a:r>
-            <a:r>
-              <a:rPr dirty="0" err="1"/>
-              <a:t>expansão</a:t>
-            </a:r>
-            <a:r>
-              <a:rPr dirty="0"/>
-              <a:t> do canal digital </a:t>
-            </a:r>
-            <a:r>
-              <a:rPr dirty="0" err="1"/>
-              <a:t>indicam</a:t>
-            </a:r>
-            <a:r>
-              <a:rPr dirty="0"/>
-              <a:t> </a:t>
-            </a:r>
-            <a:r>
-              <a:rPr dirty="0" err="1"/>
-              <a:t>espaço</a:t>
-            </a:r>
-            <a:r>
-              <a:rPr dirty="0"/>
-              <a:t> para </a:t>
-            </a:r>
-            <a:r>
-              <a:rPr dirty="0" err="1"/>
-              <a:t>estratégias</a:t>
-            </a:r>
-            <a:r>
-              <a:rPr dirty="0"/>
-              <a:t> de </a:t>
-            </a:r>
-            <a:r>
-              <a:rPr dirty="0" err="1"/>
-              <a:t>retenção</a:t>
-            </a:r>
-            <a:r>
-              <a:rPr dirty="0"/>
-              <a:t>,</a:t>
-            </a:r>
-            <a:endParaRPr lang="pt-BR" dirty="0"/>
-          </a:p>
-          <a:p>
-            <a:pPr>
-              <a:spcBef>
-                <a:spcPts val="800"/>
-              </a:spcBef>
-              <a:defRPr sz="1800">
-                <a:solidFill>
-                  <a:srgbClr val="1F2937"/>
-                </a:solidFill>
-                <a:latin typeface="Aptos"/>
-              </a:defRPr>
-            </a:pPr>
-            <a:r>
-              <a:rPr dirty="0" err="1"/>
-              <a:t>reativação</a:t>
-            </a:r>
-            <a:r>
-              <a:rPr dirty="0"/>
-              <a:t> e </a:t>
-            </a:r>
-            <a:r>
-              <a:rPr dirty="0" err="1"/>
-              <a:t>engajamento</a:t>
-            </a:r>
-            <a:r>
-              <a:rPr dirty="0"/>
-              <a:t> digital, </a:t>
-            </a:r>
-            <a:r>
-              <a:rPr dirty="0" err="1"/>
-              <a:t>sem</a:t>
-            </a:r>
-            <a:r>
-              <a:rPr dirty="0"/>
-              <a:t> </a:t>
-            </a:r>
-            <a:r>
-              <a:rPr dirty="0" err="1"/>
-              <a:t>desconsiderar</a:t>
-            </a:r>
-            <a:r>
-              <a:rPr dirty="0"/>
-              <a:t> a </a:t>
-            </a:r>
-            <a:r>
-              <a:rPr dirty="0" err="1"/>
-              <a:t>relevância</a:t>
-            </a:r>
-            <a:r>
-              <a:rPr dirty="0"/>
-              <a:t> do canal </a:t>
-            </a:r>
-            <a:r>
-              <a:rPr dirty="0" err="1"/>
-              <a:t>físico</a:t>
-            </a:r>
-            <a:r>
-              <a:rPr dirty="0"/>
-              <a:t>.</a:t>
-            </a:r>
-          </a:p>
-        </p:txBody>
-      </p:sp>
-      <p:sp>
-        <p:nvSpPr>
-          <p:cNvPr id="17" name="Rectangle 16"/>
-          <p:cNvSpPr/>
-          <p:nvPr/>
-        </p:nvSpPr>
-        <p:spPr>
-          <a:xfrm>
-            <a:off x="594360" y="6473952"/>
-            <a:ext cx="10972800" cy="13716"/>
-          </a:xfrm>
-          <a:prstGeom prst="rect">
-            <a:avLst/>
-          </a:prstGeom>
-          <a:solidFill>
-            <a:srgbClr val="DCE1E8"/>
-          </a:solidFill>
-          <a:ln>
-            <a:noFill/>
-          </a:ln>
-        </p:spPr>
-        <p:style>
-          <a:lnRef idx="1">
-            <a:schemeClr val="accent1"/>
-          </a:lnRef>
-          <a:fillRef idx="3">
-            <a:schemeClr val="accent1"/>
-          </a:fillRef>
-          <a:effectRef idx="2">
-            <a:schemeClr val="accent1"/>
-          </a:effectRef>
-          <a:fontRef idx="minor">
-            <a:schemeClr val="lt1"/>
-          </a:fontRef>
-        </p:style>
-        <p:txBody>
-          <a:bodyPr rtlCol="0" anchor="ctr"/>
-          <a:lstStyle/>
-          <a:p>
-            <a:pPr algn="ctr"/>
-            <a:endParaRPr/>
-          </a:p>
-        </p:txBody>
-      </p:sp>
-      <p:sp>
-        <p:nvSpPr>
-          <p:cNvPr id="18" name="TextBox 17"/>
-          <p:cNvSpPr txBox="1"/>
-          <p:nvPr/>
-        </p:nvSpPr>
-        <p:spPr>
-          <a:xfrm>
-            <a:off x="640080" y="6510528"/>
-            <a:ext cx="4572000" cy="201168"/>
-          </a:xfrm>
-          <a:prstGeom prst="rect">
-            <a:avLst/>
-          </a:prstGeom>
-          <a:noFill/>
-        </p:spPr>
-        <p:txBody>
-          <a:bodyPr wrap="none">
-            <a:spAutoFit/>
-          </a:bodyPr>
-          <a:lstStyle/>
-          <a:p>
-            <a:pPr>
-              <a:defRPr sz="800">
-                <a:solidFill>
-                  <a:srgbClr val="5D6978"/>
-                </a:solidFill>
-                <a:latin typeface="Aptos"/>
-              </a:defRPr>
-            </a:pPr>
-            <a:r>
-              <a:t>BanVic | Dashboard Comercial</a:t>
-            </a:r>
-          </a:p>
-        </p:txBody>
-      </p:sp>
-      <p:pic>
-        <p:nvPicPr>
-          <p:cNvPr id="20" name="Graphic 19" descr="Upstairs outline">
-            <a:extLst>
-              <a:ext uri="{FF2B5EF4-FFF2-40B4-BE49-F238E27FC236}">
-                <a16:creationId xmlns:a16="http://schemas.microsoft.com/office/drawing/2014/main" id="{CA363C0D-1D40-7A13-537F-23962BF625CC}"/>
-              </a:ext>
-            </a:extLst>
-          </p:cNvPr>
-          <p:cNvPicPr>
-            <a:picLocks noChangeAspect="1"/>
-          </p:cNvPicPr>
-          <p:nvPr/>
-        </p:nvPicPr>
-        <p:blipFill>
-          <a:blip>
-            <a:extLst>
-              <a:ext uri="{96DAC541-7B7A-43D3-8B79-37D633B846F1}">
-                <asvg:svgBlip xmlns:asvg="http://schemas.microsoft.com/office/drawing/2016/SVG/main" r:embed="rId2"/>
-              </a:ext>
-            </a:extLst>
-          </a:blip>
-          <a:stretch>
-            <a:fillRect/>
-          </a:stretch>
-        </p:blipFill>
-        <p:spPr>
-          <a:xfrm>
-            <a:off x="2537460" y="1783080"/>
-            <a:ext cx="914400" cy="914400"/>
-          </a:xfrm>
-          <a:prstGeom prst="rect">
-            <a:avLst/>
-          </a:prstGeom>
-        </p:spPr>
-      </p:pic>
-    </p:spTree>
-  </p:cSld>
-  <p:clrMapOvr>
-    <a:masterClrMapping/>
-  </p:clrMapOvr>
-</p:sld>
-</file>
-
-<file path=ppt/slides/slide8.xml><?xml version="1.0" encoding="utf-8"?>
-<p:sld xmlns:a="http://schemas.openxmlformats.org/drawingml/2006/main" xmlns:r="http://schemas.openxmlformats.org/officeDocument/2006/relationships" xmlns:p="http://schemas.openxmlformats.org/presentationml/2006/main">
-  <p:cSld>
-    <p:spTree>
-      <p:nvGrpSpPr>
-        <p:cNvPr id="1" name=""/>
-        <p:cNvGrpSpPr/>
-        <p:nvPr/>
-      </p:nvGrpSpPr>
-      <p:grpSpPr>
-        <a:xfrm>
-          <a:off x="0" y="0"/>
-          <a:ext cx="0" cy="0"/>
-          <a:chOff x="0" y="0"/>
-          <a:chExt cx="0" cy="0"/>
-        </a:xfrm>
-      </p:grpSpPr>
-      <p:sp>
-        <p:nvSpPr>
-          <p:cNvPr id="2" name="Rectangle 1"/>
-          <p:cNvSpPr/>
-          <p:nvPr/>
-        </p:nvSpPr>
-        <p:spPr>
-          <a:xfrm>
-            <a:off x="0" y="0"/>
-            <a:ext cx="12191695" cy="6858000"/>
-          </a:xfrm>
-          <a:prstGeom prst="rect">
-            <a:avLst/>
-          </a:prstGeom>
-          <a:solidFill>
-            <a:srgbClr val="F7F9FC"/>
-          </a:solidFill>
-          <a:ln>
-            <a:noFill/>
-          </a:ln>
-        </p:spPr>
-        <p:style>
-          <a:lnRef idx="1">
-            <a:schemeClr val="accent1"/>
-          </a:lnRef>
-          <a:fillRef idx="3">
-            <a:schemeClr val="accent1"/>
-          </a:fillRef>
-          <a:effectRef idx="2">
-            <a:schemeClr val="accent1"/>
-          </a:effectRef>
-          <a:fontRef idx="minor">
-            <a:schemeClr val="lt1"/>
-          </a:fontRef>
-        </p:style>
-        <p:txBody>
-          <a:bodyPr rtlCol="0" anchor="ctr"/>
-          <a:lstStyle/>
-          <a:p>
-            <a:pPr algn="ctr"/>
-            <a:endParaRPr/>
-          </a:p>
-        </p:txBody>
-      </p:sp>
-      <p:sp>
-        <p:nvSpPr>
-          <p:cNvPr id="3" name="Rectangle 2"/>
-          <p:cNvSpPr/>
-          <p:nvPr/>
-        </p:nvSpPr>
-        <p:spPr>
-          <a:xfrm>
-            <a:off x="502920" y="502920"/>
-            <a:ext cx="109728" cy="685800"/>
-          </a:xfrm>
-          <a:prstGeom prst="rect">
-            <a:avLst/>
-          </a:prstGeom>
-          <a:solidFill>
-            <a:srgbClr val="245B91"/>
-          </a:solidFill>
-          <a:ln>
-            <a:noFill/>
-          </a:ln>
-        </p:spPr>
-        <p:style>
-          <a:lnRef idx="1">
-            <a:schemeClr val="accent1"/>
-          </a:lnRef>
-          <a:fillRef idx="3">
-            <a:schemeClr val="accent1"/>
-          </a:fillRef>
-          <a:effectRef idx="2">
-            <a:schemeClr val="accent1"/>
-          </a:effectRef>
-          <a:fontRef idx="minor">
-            <a:schemeClr val="lt1"/>
-          </a:fontRef>
-        </p:style>
-        <p:txBody>
-          <a:bodyPr rtlCol="0" anchor="ctr"/>
-          <a:lstStyle/>
-          <a:p>
-            <a:pPr algn="ctr"/>
-            <a:endParaRPr/>
-          </a:p>
-        </p:txBody>
-      </p:sp>
-      <p:sp>
-        <p:nvSpPr>
-          <p:cNvPr id="4" name="TextBox 3"/>
-          <p:cNvSpPr txBox="1"/>
-          <p:nvPr/>
-        </p:nvSpPr>
-        <p:spPr>
-          <a:xfrm>
-            <a:off x="777240" y="475488"/>
-            <a:ext cx="4471096" cy="507831"/>
-          </a:xfrm>
-          <a:prstGeom prst="rect">
-            <a:avLst/>
-          </a:prstGeom>
-          <a:noFill/>
-        </p:spPr>
-        <p:txBody>
-          <a:bodyPr wrap="none">
-            <a:spAutoFit/>
-          </a:bodyPr>
-          <a:lstStyle/>
-          <a:p>
-            <a:pPr>
-              <a:defRPr sz="2700" b="1">
-                <a:solidFill>
-                  <a:srgbClr val="0F2747"/>
-                </a:solidFill>
-                <a:latin typeface="Aptos Display"/>
-              </a:defRPr>
-            </a:pPr>
-            <a:r>
-              <a:rPr dirty="0" err="1"/>
-              <a:t>Transações</a:t>
-            </a:r>
-            <a:r>
-              <a:rPr dirty="0"/>
-              <a:t> e </a:t>
-            </a:r>
-            <a:r>
-              <a:rPr lang="pt-BR" dirty="0"/>
-              <a:t>e</a:t>
-            </a:r>
-            <a:r>
-              <a:rPr dirty="0" err="1"/>
-              <a:t>volução</a:t>
-            </a:r>
-            <a:r>
-              <a:rPr dirty="0"/>
-              <a:t> do Pix</a:t>
-            </a:r>
-          </a:p>
-        </p:txBody>
-      </p:sp>
-      <p:sp>
-        <p:nvSpPr>
-          <p:cNvPr id="5" name="TextBox 4"/>
-          <p:cNvSpPr txBox="1"/>
-          <p:nvPr/>
-        </p:nvSpPr>
-        <p:spPr>
-          <a:xfrm>
-            <a:off x="786384" y="1024128"/>
-            <a:ext cx="10424160" cy="411480"/>
-          </a:xfrm>
-          <a:prstGeom prst="rect">
-            <a:avLst/>
-          </a:prstGeom>
-          <a:noFill/>
-        </p:spPr>
-        <p:txBody>
-          <a:bodyPr wrap="none">
-            <a:spAutoFit/>
-          </a:bodyPr>
-          <a:lstStyle/>
-          <a:p>
-            <a:pPr>
-              <a:defRPr sz="1200">
-                <a:solidFill>
-                  <a:srgbClr val="5D6978"/>
-                </a:solidFill>
-                <a:latin typeface="Aptos"/>
-              </a:defRPr>
-            </a:pPr>
-            <a:r>
-              <a:t>Mudança no comportamento transacional e um ponto atípico da série</a:t>
-            </a:r>
-          </a:p>
-        </p:txBody>
-      </p:sp>
-      <p:sp>
-        <p:nvSpPr>
-          <p:cNvPr id="6" name="TextBox 5"/>
-          <p:cNvSpPr txBox="1"/>
-          <p:nvPr/>
-        </p:nvSpPr>
-        <p:spPr>
-          <a:xfrm>
-            <a:off x="11155680" y="502920"/>
-            <a:ext cx="457200" cy="365760"/>
-          </a:xfrm>
-          <a:prstGeom prst="rect">
-            <a:avLst/>
-          </a:prstGeom>
-          <a:noFill/>
-        </p:spPr>
-        <p:txBody>
-          <a:bodyPr wrap="none">
-            <a:spAutoFit/>
-          </a:bodyPr>
-          <a:lstStyle/>
-          <a:p>
-            <a:pPr algn="r">
-              <a:defRPr sz="1100" b="1">
-                <a:solidFill>
-                  <a:srgbClr val="5D6978"/>
-                </a:solidFill>
-                <a:latin typeface="Aptos"/>
-              </a:defRPr>
-            </a:pPr>
-            <a:r>
-              <a:t>08</a:t>
-            </a:r>
-          </a:p>
-        </p:txBody>
-      </p:sp>
-      <p:sp>
-        <p:nvSpPr>
-          <p:cNvPr id="7" name="Rounded Rectangle 6"/>
-          <p:cNvSpPr/>
-          <p:nvPr/>
-        </p:nvSpPr>
-        <p:spPr>
-          <a:xfrm>
-            <a:off x="777240" y="1463040"/>
-            <a:ext cx="3337560" cy="1600200"/>
-          </a:xfrm>
-          <a:prstGeom prst="roundRect">
-            <a:avLst/>
-          </a:prstGeom>
-          <a:solidFill>
-            <a:srgbClr val="FFFFFF"/>
-          </a:solidFill>
-          <a:ln>
-            <a:solidFill>
-              <a:srgbClr val="DCE1E8"/>
-            </a:solidFill>
-          </a:ln>
-        </p:spPr>
-        <p:style>
-          <a:lnRef idx="1">
-            <a:schemeClr val="accent1"/>
-          </a:lnRef>
-          <a:fillRef idx="3">
-            <a:schemeClr val="accent1"/>
-          </a:fillRef>
-          <a:effectRef idx="2">
-            <a:schemeClr val="accent1"/>
-          </a:effectRef>
-          <a:fontRef idx="minor">
-            <a:schemeClr val="lt1"/>
-          </a:fontRef>
-        </p:style>
-        <p:txBody>
-          <a:bodyPr rtlCol="0" anchor="ctr"/>
-          <a:lstStyle/>
-          <a:p>
-            <a:pPr algn="ctr"/>
-            <a:endParaRPr/>
-          </a:p>
-        </p:txBody>
-      </p:sp>
-      <p:sp>
-        <p:nvSpPr>
-          <p:cNvPr id="8" name="Rectangle 7"/>
-          <p:cNvSpPr/>
-          <p:nvPr/>
-        </p:nvSpPr>
-        <p:spPr>
-          <a:xfrm>
-            <a:off x="777240" y="1463040"/>
-            <a:ext cx="73152" cy="1600200"/>
-          </a:xfrm>
-          <a:prstGeom prst="rect">
-            <a:avLst/>
-          </a:prstGeom>
-          <a:solidFill>
-            <a:srgbClr val="245B91"/>
-          </a:solidFill>
-          <a:ln>
-            <a:noFill/>
-          </a:ln>
-        </p:spPr>
-        <p:style>
-          <a:lnRef idx="1">
-            <a:schemeClr val="accent1"/>
-          </a:lnRef>
-          <a:fillRef idx="3">
-            <a:schemeClr val="accent1"/>
-          </a:fillRef>
-          <a:effectRef idx="2">
-            <a:schemeClr val="accent1"/>
-          </a:effectRef>
-          <a:fontRef idx="minor">
-            <a:schemeClr val="lt1"/>
-          </a:fontRef>
-        </p:style>
-        <p:txBody>
-          <a:bodyPr rtlCol="0" anchor="ctr"/>
-          <a:lstStyle/>
-          <a:p>
-            <a:pPr algn="ctr"/>
-            <a:endParaRPr/>
-          </a:p>
-        </p:txBody>
-      </p:sp>
-      <p:sp>
-        <p:nvSpPr>
-          <p:cNvPr id="9" name="TextBox 8"/>
-          <p:cNvSpPr txBox="1"/>
-          <p:nvPr/>
-        </p:nvSpPr>
-        <p:spPr>
-          <a:xfrm>
-            <a:off x="1005840" y="1645920"/>
-            <a:ext cx="2926079" cy="1280160"/>
-          </a:xfrm>
-          <a:prstGeom prst="rect">
-            <a:avLst/>
-          </a:prstGeom>
-          <a:noFill/>
-        </p:spPr>
-        <p:txBody>
-          <a:bodyPr wrap="square">
-            <a:spAutoFit/>
-          </a:bodyPr>
-          <a:lstStyle/>
-          <a:p>
-            <a:pPr>
-              <a:defRPr sz="1500" b="1">
-                <a:solidFill>
-                  <a:srgbClr val="0F2747"/>
-                </a:solidFill>
-                <a:latin typeface="Aptos"/>
-              </a:defRPr>
-            </a:pPr>
-            <a:r>
-              <a:t>59,2%</a:t>
-            </a:r>
-          </a:p>
-          <a:p>
-            <a:pPr>
-              <a:spcBef>
-                <a:spcPts val="600"/>
-              </a:spcBef>
-              <a:defRPr sz="1150">
-                <a:solidFill>
-                  <a:srgbClr val="1F2937"/>
-                </a:solidFill>
-                <a:latin typeface="Aptos"/>
-              </a:defRPr>
-            </a:pPr>
-            <a:r>
-              <a:t>das transações históricas correspondem a compras no crédito ou débito.</a:t>
-            </a:r>
-          </a:p>
-        </p:txBody>
-      </p:sp>
-      <p:sp>
-        <p:nvSpPr>
-          <p:cNvPr id="10" name="Rounded Rectangle 9"/>
-          <p:cNvSpPr/>
-          <p:nvPr/>
-        </p:nvSpPr>
-        <p:spPr>
-          <a:xfrm>
-            <a:off x="4416552" y="1463040"/>
-            <a:ext cx="3337560" cy="1600200"/>
-          </a:xfrm>
-          <a:prstGeom prst="roundRect">
-            <a:avLst/>
-          </a:prstGeom>
-          <a:solidFill>
-            <a:srgbClr val="FFFFFF"/>
-          </a:solidFill>
-          <a:ln>
-            <a:solidFill>
-              <a:srgbClr val="DCE1E8"/>
-            </a:solidFill>
-          </a:ln>
-        </p:spPr>
-        <p:style>
-          <a:lnRef idx="1">
-            <a:schemeClr val="accent1"/>
-          </a:lnRef>
-          <a:fillRef idx="3">
-            <a:schemeClr val="accent1"/>
-          </a:fillRef>
-          <a:effectRef idx="2">
-            <a:schemeClr val="accent1"/>
-          </a:effectRef>
-          <a:fontRef idx="minor">
-            <a:schemeClr val="lt1"/>
-          </a:fontRef>
-        </p:style>
-        <p:txBody>
-          <a:bodyPr rtlCol="0" anchor="ctr"/>
-          <a:lstStyle/>
-          <a:p>
-            <a:pPr algn="ctr"/>
-            <a:endParaRPr/>
-          </a:p>
-        </p:txBody>
-      </p:sp>
-      <p:sp>
-        <p:nvSpPr>
-          <p:cNvPr id="11" name="Rectangle 10"/>
-          <p:cNvSpPr/>
-          <p:nvPr/>
-        </p:nvSpPr>
-        <p:spPr>
-          <a:xfrm>
-            <a:off x="4416552" y="1463040"/>
-            <a:ext cx="73152" cy="1600200"/>
-          </a:xfrm>
-          <a:prstGeom prst="rect">
-            <a:avLst/>
-          </a:prstGeom>
-          <a:solidFill>
-            <a:srgbClr val="76528E"/>
-          </a:solidFill>
-          <a:ln>
-            <a:noFill/>
-          </a:ln>
-        </p:spPr>
-        <p:style>
-          <a:lnRef idx="1">
-            <a:schemeClr val="accent1"/>
-          </a:lnRef>
-          <a:fillRef idx="3">
-            <a:schemeClr val="accent1"/>
-          </a:fillRef>
-          <a:effectRef idx="2">
-            <a:schemeClr val="accent1"/>
-          </a:effectRef>
-          <a:fontRef idx="minor">
-            <a:schemeClr val="lt1"/>
-          </a:fontRef>
-        </p:style>
-        <p:txBody>
-          <a:bodyPr rtlCol="0" anchor="ctr"/>
-          <a:lstStyle/>
-          <a:p>
-            <a:pPr algn="ctr"/>
-            <a:endParaRPr/>
-          </a:p>
-        </p:txBody>
-      </p:sp>
-      <p:sp>
-        <p:nvSpPr>
-          <p:cNvPr id="12" name="TextBox 11"/>
-          <p:cNvSpPr txBox="1"/>
-          <p:nvPr/>
-        </p:nvSpPr>
-        <p:spPr>
-          <a:xfrm>
-            <a:off x="4645152" y="1645920"/>
-            <a:ext cx="2926079" cy="1280160"/>
-          </a:xfrm>
-          <a:prstGeom prst="rect">
-            <a:avLst/>
-          </a:prstGeom>
-          <a:noFill/>
-        </p:spPr>
-        <p:txBody>
-          <a:bodyPr wrap="square">
-            <a:spAutoFit/>
-          </a:bodyPr>
-          <a:lstStyle/>
-          <a:p>
-            <a:pPr>
-              <a:defRPr sz="1500" b="1">
-                <a:solidFill>
-                  <a:srgbClr val="0F2747"/>
-                </a:solidFill>
-                <a:latin typeface="Aptos"/>
-              </a:defRPr>
-            </a:pPr>
-            <a:r>
-              <a:t>25,5%</a:t>
-            </a:r>
-          </a:p>
-          <a:p>
-            <a:pPr>
-              <a:spcBef>
-                <a:spcPts val="600"/>
-              </a:spcBef>
-              <a:defRPr sz="1150">
-                <a:solidFill>
-                  <a:srgbClr val="1F2937"/>
-                </a:solidFill>
-                <a:latin typeface="Aptos"/>
-              </a:defRPr>
-            </a:pPr>
-            <a:r>
-              <a:t>das transações históricas pertencem ao grupo Pix.</a:t>
-            </a:r>
-          </a:p>
-        </p:txBody>
-      </p:sp>
-      <p:sp>
-        <p:nvSpPr>
-          <p:cNvPr id="13" name="Rounded Rectangle 12"/>
-          <p:cNvSpPr/>
-          <p:nvPr/>
-        </p:nvSpPr>
-        <p:spPr>
-          <a:xfrm>
-            <a:off x="8055864" y="1463040"/>
-            <a:ext cx="3337560" cy="1600200"/>
-          </a:xfrm>
-          <a:prstGeom prst="roundRect">
-            <a:avLst/>
-          </a:prstGeom>
-          <a:solidFill>
-            <a:srgbClr val="FFFFFF"/>
-          </a:solidFill>
-          <a:ln>
-            <a:solidFill>
-              <a:srgbClr val="DCE1E8"/>
-            </a:solidFill>
-          </a:ln>
-        </p:spPr>
-        <p:style>
-          <a:lnRef idx="1">
-            <a:schemeClr val="accent1"/>
-          </a:lnRef>
-          <a:fillRef idx="3">
-            <a:schemeClr val="accent1"/>
-          </a:fillRef>
-          <a:effectRef idx="2">
-            <a:schemeClr val="accent1"/>
-          </a:effectRef>
-          <a:fontRef idx="minor">
-            <a:schemeClr val="lt1"/>
-          </a:fontRef>
-        </p:style>
-        <p:txBody>
-          <a:bodyPr rtlCol="0" anchor="ctr"/>
-          <a:lstStyle/>
-          <a:p>
-            <a:pPr algn="ctr"/>
-            <a:endParaRPr/>
-          </a:p>
-        </p:txBody>
-      </p:sp>
-      <p:sp>
-        <p:nvSpPr>
-          <p:cNvPr id="14" name="Rectangle 13"/>
-          <p:cNvSpPr/>
-          <p:nvPr/>
-        </p:nvSpPr>
-        <p:spPr>
-          <a:xfrm>
-            <a:off x="8055864" y="1463040"/>
-            <a:ext cx="73152" cy="1600200"/>
-          </a:xfrm>
-          <a:prstGeom prst="rect">
-            <a:avLst/>
-          </a:prstGeom>
-          <a:solidFill>
-            <a:srgbClr val="E58F40"/>
-          </a:solidFill>
-          <a:ln>
-            <a:noFill/>
-          </a:ln>
-        </p:spPr>
-        <p:style>
-          <a:lnRef idx="1">
-            <a:schemeClr val="accent1"/>
-          </a:lnRef>
-          <a:fillRef idx="3">
-            <a:schemeClr val="accent1"/>
-          </a:fillRef>
-          <a:effectRef idx="2">
-            <a:schemeClr val="accent1"/>
-          </a:effectRef>
-          <a:fontRef idx="minor">
-            <a:schemeClr val="lt1"/>
-          </a:fontRef>
-        </p:style>
-        <p:txBody>
-          <a:bodyPr rtlCol="0" anchor="ctr"/>
-          <a:lstStyle/>
-          <a:p>
-            <a:pPr algn="ctr"/>
-            <a:endParaRPr/>
-          </a:p>
-        </p:txBody>
-      </p:sp>
-      <p:sp>
-        <p:nvSpPr>
-          <p:cNvPr id="15" name="TextBox 14"/>
-          <p:cNvSpPr txBox="1"/>
-          <p:nvPr/>
-        </p:nvSpPr>
-        <p:spPr>
-          <a:xfrm>
-            <a:off x="8284464" y="1645920"/>
-            <a:ext cx="2926079" cy="1280160"/>
-          </a:xfrm>
-          <a:prstGeom prst="rect">
-            <a:avLst/>
-          </a:prstGeom>
-          <a:noFill/>
-        </p:spPr>
-        <p:txBody>
-          <a:bodyPr wrap="square">
-            <a:spAutoFit/>
-          </a:bodyPr>
-          <a:lstStyle/>
-          <a:p>
-            <a:pPr>
-              <a:defRPr sz="1500" b="1">
-                <a:solidFill>
-                  <a:srgbClr val="0F2747"/>
-                </a:solidFill>
-                <a:latin typeface="Aptos"/>
-              </a:defRPr>
-            </a:pPr>
-            <a:r>
-              <a:rPr dirty="0"/>
-              <a:t>40,6%</a:t>
-            </a:r>
-          </a:p>
-          <a:p>
-            <a:pPr>
-              <a:spcBef>
-                <a:spcPts val="600"/>
-              </a:spcBef>
-              <a:defRPr sz="1150">
-                <a:solidFill>
-                  <a:srgbClr val="1F2937"/>
-                </a:solidFill>
-                <a:latin typeface="Aptos"/>
-              </a:defRPr>
-            </a:pPr>
-            <a:r>
-              <a:rPr dirty="0"/>
-              <a:t>das </a:t>
-            </a:r>
-            <a:r>
-              <a:rPr dirty="0" err="1"/>
-              <a:t>operações</a:t>
-            </a:r>
-            <a:r>
-              <a:rPr dirty="0"/>
-              <a:t> de </a:t>
-            </a:r>
-            <a:r>
-              <a:rPr dirty="0" err="1"/>
-              <a:t>dezembro</a:t>
-            </a:r>
-            <a:r>
-              <a:rPr dirty="0"/>
-              <a:t>/2022 </a:t>
-            </a:r>
-            <a:r>
-              <a:rPr dirty="0" err="1"/>
-              <a:t>foram</a:t>
-            </a:r>
-            <a:r>
-              <a:rPr dirty="0"/>
-              <a:t> Pix.</a:t>
-            </a:r>
-          </a:p>
-        </p:txBody>
-      </p:sp>
-      <p:sp>
-        <p:nvSpPr>
-          <p:cNvPr id="17" name="Rectangle 16"/>
-          <p:cNvSpPr/>
-          <p:nvPr/>
-        </p:nvSpPr>
-        <p:spPr>
-          <a:xfrm>
-            <a:off x="594360" y="6473952"/>
-            <a:ext cx="10972800" cy="13716"/>
-          </a:xfrm>
-          <a:prstGeom prst="rect">
-            <a:avLst/>
-          </a:prstGeom>
-          <a:solidFill>
-            <a:srgbClr val="DCE1E8"/>
-          </a:solidFill>
-          <a:ln>
-            <a:noFill/>
-          </a:ln>
-        </p:spPr>
-        <p:style>
-          <a:lnRef idx="1">
-            <a:schemeClr val="accent1"/>
-          </a:lnRef>
-          <a:fillRef idx="3">
-            <a:schemeClr val="accent1"/>
-          </a:fillRef>
-          <a:effectRef idx="2">
-            <a:schemeClr val="accent1"/>
-          </a:effectRef>
-          <a:fontRef idx="minor">
-            <a:schemeClr val="lt1"/>
-          </a:fontRef>
-        </p:style>
-        <p:txBody>
-          <a:bodyPr rtlCol="0" anchor="ctr"/>
-          <a:lstStyle/>
-          <a:p>
-            <a:pPr algn="ctr"/>
-            <a:endParaRPr/>
-          </a:p>
-        </p:txBody>
-      </p:sp>
-      <p:sp>
-        <p:nvSpPr>
-          <p:cNvPr id="18" name="TextBox 17"/>
-          <p:cNvSpPr txBox="1"/>
-          <p:nvPr/>
-        </p:nvSpPr>
-        <p:spPr>
-          <a:xfrm>
-            <a:off x="640080" y="6510528"/>
-            <a:ext cx="4572000" cy="201168"/>
-          </a:xfrm>
-          <a:prstGeom prst="rect">
-            <a:avLst/>
-          </a:prstGeom>
-          <a:noFill/>
-        </p:spPr>
-        <p:txBody>
-          <a:bodyPr wrap="none">
-            <a:spAutoFit/>
-          </a:bodyPr>
-          <a:lstStyle/>
-          <a:p>
-            <a:pPr>
-              <a:defRPr sz="800">
-                <a:solidFill>
-                  <a:srgbClr val="5D6978"/>
-                </a:solidFill>
-                <a:latin typeface="Aptos"/>
-              </a:defRPr>
-            </a:pPr>
-            <a:r>
-              <a:t>BanVic | Dashboard Comercial</a:t>
-            </a:r>
-          </a:p>
-        </p:txBody>
-      </p:sp>
-      <p:sp>
-        <p:nvSpPr>
-          <p:cNvPr id="20" name="TextBox 19">
-            <a:extLst>
-              <a:ext uri="{FF2B5EF4-FFF2-40B4-BE49-F238E27FC236}">
-                <a16:creationId xmlns:a16="http://schemas.microsoft.com/office/drawing/2014/main" id="{746F390D-4D65-D541-5D44-27DA1B6312CE}"/>
-              </a:ext>
-            </a:extLst>
-          </p:cNvPr>
-          <p:cNvSpPr txBox="1"/>
-          <p:nvPr/>
-        </p:nvSpPr>
-        <p:spPr>
-          <a:xfrm>
-            <a:off x="4611556" y="2387008"/>
-            <a:ext cx="2926079" cy="635423"/>
-          </a:xfrm>
-          <a:prstGeom prst="roundRect">
-            <a:avLst/>
-          </a:prstGeom>
-          <a:solidFill>
-            <a:schemeClr val="accent5">
-              <a:lumMod val="20000"/>
-              <a:lumOff val="80000"/>
-            </a:schemeClr>
-          </a:solidFill>
-        </p:spPr>
-        <p:txBody>
-          <a:bodyPr wrap="square">
-            <a:spAutoFit/>
-          </a:bodyPr>
-          <a:lstStyle/>
-          <a:p>
-            <a:pPr marL="0" marR="0" lvl="0" indent="0" algn="ctr" rtl="0">
-              <a:lnSpc>
-                <a:spcPct val="120000"/>
-              </a:lnSpc>
-              <a:spcBef>
-                <a:spcPts val="0"/>
-              </a:spcBef>
-              <a:spcAft>
-                <a:spcPts val="0"/>
-              </a:spcAft>
-              <a:buClr>
-                <a:srgbClr val="1B1F3B"/>
-              </a:buClr>
-              <a:buSzPts val="1350"/>
-              <a:buFont typeface="Calibri"/>
-              <a:buNone/>
-            </a:pPr>
-            <a:r>
-              <a:rPr lang="pt-BR" sz="1350" b="0" i="0" u="none" strike="noStrike" cap="none" dirty="0">
-                <a:solidFill>
-                  <a:srgbClr val="1B1F3B"/>
-                </a:solidFill>
-                <a:latin typeface="Calibri"/>
-                <a:ea typeface="Calibri"/>
-                <a:cs typeface="Calibri"/>
-                <a:sym typeface="Calibri"/>
-              </a:rPr>
-              <a:t>Novembro de 2020 - primeira transação Pix registrada</a:t>
-            </a:r>
-            <a:endParaRPr lang="pt-BR" sz="1350" b="0" i="0" u="none" strike="noStrike" cap="none" dirty="0">
-              <a:solidFill>
-                <a:schemeClr val="dk1"/>
-              </a:solidFill>
-              <a:latin typeface="Calibri"/>
-              <a:ea typeface="Calibri"/>
-              <a:cs typeface="Calibri"/>
-              <a:sym typeface="Calibri"/>
-            </a:endParaRPr>
-          </a:p>
-        </p:txBody>
-      </p:sp>
-      <p:sp>
-        <p:nvSpPr>
-          <p:cNvPr id="21" name="TextBox 20">
-            <a:extLst>
-              <a:ext uri="{FF2B5EF4-FFF2-40B4-BE49-F238E27FC236}">
-                <a16:creationId xmlns:a16="http://schemas.microsoft.com/office/drawing/2014/main" id="{4161C3F8-25B4-D191-7005-33631126F052}"/>
-              </a:ext>
-            </a:extLst>
-          </p:cNvPr>
-          <p:cNvSpPr txBox="1"/>
-          <p:nvPr/>
-        </p:nvSpPr>
-        <p:spPr>
-          <a:xfrm>
-            <a:off x="8284465" y="2387007"/>
-            <a:ext cx="2926079" cy="635423"/>
-          </a:xfrm>
-          <a:prstGeom prst="roundRect">
-            <a:avLst/>
-          </a:prstGeom>
-          <a:solidFill>
-            <a:schemeClr val="accent2">
-              <a:lumMod val="20000"/>
-              <a:lumOff val="80000"/>
-            </a:schemeClr>
-          </a:solidFill>
-        </p:spPr>
-        <p:txBody>
-          <a:bodyPr wrap="square">
-            <a:spAutoFit/>
-          </a:bodyPr>
-          <a:lstStyle/>
-          <a:p>
-            <a:pPr marL="0" marR="0" lvl="0" indent="0" algn="ctr" rtl="0">
-              <a:lnSpc>
-                <a:spcPct val="120000"/>
-              </a:lnSpc>
-              <a:spcBef>
-                <a:spcPts val="0"/>
-              </a:spcBef>
-              <a:spcAft>
-                <a:spcPts val="0"/>
-              </a:spcAft>
-              <a:buClr>
-                <a:srgbClr val="1B1F3B"/>
-              </a:buClr>
-              <a:buSzPts val="1350"/>
-              <a:buFont typeface="Calibri"/>
-              <a:buNone/>
-            </a:pPr>
-            <a:r>
-              <a:rPr lang="pt-BR" sz="1350" b="0" i="0" u="none" strike="noStrike" cap="none" dirty="0">
-                <a:solidFill>
-                  <a:srgbClr val="1B1F3B"/>
-                </a:solidFill>
-                <a:latin typeface="Calibri"/>
-                <a:ea typeface="Calibri"/>
-                <a:cs typeface="Calibri"/>
-                <a:sym typeface="Calibri"/>
-              </a:rPr>
-              <a:t>Crescimento comprovado e aposta alta no cenário digital</a:t>
-            </a:r>
-            <a:endParaRPr lang="pt-BR" sz="1350" b="0" i="0" u="none" strike="noStrike" cap="none" dirty="0">
-              <a:solidFill>
-                <a:schemeClr val="dk1"/>
-              </a:solidFill>
-              <a:latin typeface="Calibri"/>
-              <a:ea typeface="Calibri"/>
-              <a:cs typeface="Calibri"/>
-              <a:sym typeface="Calibri"/>
-            </a:endParaRPr>
-          </a:p>
-        </p:txBody>
-      </p:sp>
-      <p:sp>
-        <p:nvSpPr>
-          <p:cNvPr id="23" name="TextBox 22">
-            <a:extLst>
-              <a:ext uri="{FF2B5EF4-FFF2-40B4-BE49-F238E27FC236}">
-                <a16:creationId xmlns:a16="http://schemas.microsoft.com/office/drawing/2014/main" id="{3DD7F19E-B24E-4D3A-AFBE-632D94D510A9}"/>
-              </a:ext>
-            </a:extLst>
-          </p:cNvPr>
-          <p:cNvSpPr txBox="1"/>
-          <p:nvPr/>
-        </p:nvSpPr>
-        <p:spPr>
-          <a:xfrm>
-            <a:off x="914400" y="3886200"/>
-            <a:ext cx="10812062" cy="1097736"/>
-          </a:xfrm>
-          <a:prstGeom prst="rect">
-            <a:avLst/>
-          </a:prstGeom>
-          <a:noFill/>
-        </p:spPr>
-        <p:txBody>
-          <a:bodyPr wrap="none">
-            <a:spAutoFit/>
-          </a:bodyPr>
-          <a:lstStyle/>
-          <a:p>
-            <a:pPr>
-              <a:defRPr sz="1600" b="1">
-                <a:solidFill>
-                  <a:srgbClr val="0F2747"/>
-                </a:solidFill>
-                <a:latin typeface="Aptos"/>
-              </a:defRPr>
-            </a:pPr>
-            <a:r>
-              <a:rPr dirty="0" err="1"/>
-              <a:t>Leitura</a:t>
-            </a:r>
-            <a:r>
-              <a:rPr dirty="0"/>
-              <a:t> </a:t>
-            </a:r>
-            <a:r>
-              <a:rPr dirty="0" err="1"/>
-              <a:t>comercial</a:t>
-            </a:r>
-            <a:r>
-              <a:rPr lang="pt-BR" dirty="0"/>
-              <a:t>:</a:t>
-            </a:r>
-            <a:endParaRPr dirty="0"/>
-          </a:p>
-          <a:p>
-            <a:pPr>
-              <a:spcBef>
-                <a:spcPts val="800"/>
-              </a:spcBef>
-              <a:defRPr sz="1800">
-                <a:solidFill>
-                  <a:srgbClr val="1F2937"/>
-                </a:solidFill>
-                <a:latin typeface="Aptos"/>
-              </a:defRPr>
-            </a:pPr>
-            <a:r>
-              <a:rPr lang="pt-BR" dirty="0"/>
-              <a:t>O crescimento das transações, aliado à rápida adoção do Pix, evidencia uma mudança no comportamento </a:t>
-            </a:r>
-          </a:p>
-          <a:p>
-            <a:pPr>
-              <a:spcBef>
-                <a:spcPts val="800"/>
-              </a:spcBef>
-              <a:defRPr sz="1800">
-                <a:solidFill>
-                  <a:srgbClr val="1F2937"/>
-                </a:solidFill>
-                <a:latin typeface="Aptos"/>
-              </a:defRPr>
-            </a:pPr>
-            <a:r>
-              <a:rPr lang="pt-BR" dirty="0"/>
-              <a:t>dos clientes e reforça a importância dos canais digitais para ampliar o engajamento e a recorrência de uso.</a:t>
-            </a:r>
-            <a:endParaRPr dirty="0"/>
-          </a:p>
-        </p:txBody>
-      </p:sp>
-    </p:spTree>
-  </p:cSld>
-  <p:clrMapOvr>
-    <a:masterClrMapping/>
-  </p:clrMapOvr>
-  <p:timing>
-    <p:tnLst>
-      <p:par>
-        <p:cTn id="1" dur="indefinite" restart="never" nodeType="tmRoot">
-          <p:childTnLst>
-            <p:seq concurrent="1" nextAc="seek">
-              <p:cTn id="2" dur="indefinite" nodeType="mainSeq">
-                <p:childTnLst>
-                  <p:par>
-                    <p:cTn id="3" fill="hold">
-                      <p:stCondLst>
-                        <p:cond delay="indefinite"/>
-                      </p:stCondLst>
-                      <p:childTnLst>
-                        <p:par>
-                          <p:cTn id="4" fill="hold">
-                            <p:stCondLst>
-                              <p:cond delay="0"/>
-                            </p:stCondLst>
-                            <p:childTnLst>
-                              <p:par>
-                                <p:cTn id="5" presetID="10" presetClass="entr" presetSubtype="0" fill="hold" grpId="0" nodeType="clickEffect">
-                                  <p:stCondLst>
-                                    <p:cond delay="0"/>
-                                  </p:stCondLst>
-                                  <p:childTnLst>
-                                    <p:set>
-                                      <p:cBhvr>
-                                        <p:cTn id="6" dur="1" fill="hold">
-                                          <p:stCondLst>
-                                            <p:cond delay="0"/>
-                                          </p:stCondLst>
-                                        </p:cTn>
-                                        <p:tgtEl>
-                                          <p:spTgt spid="20"/>
-                                        </p:tgtEl>
-                                        <p:attrNameLst>
-                                          <p:attrName>style.visibility</p:attrName>
-                                        </p:attrNameLst>
-                                      </p:cBhvr>
-                                      <p:to>
-                                        <p:strVal val="visible"/>
-                                      </p:to>
-                                    </p:set>
-                                    <p:animEffect transition="in" filter="fade">
-                                      <p:cBhvr>
-                                        <p:cTn id="7" dur="500"/>
-                                        <p:tgtEl>
-                                          <p:spTgt spid="20"/>
-                                        </p:tgtEl>
-                                      </p:cBhvr>
-                                    </p:animEffect>
-                                  </p:childTnLst>
-                                </p:cTn>
-                              </p:par>
-                            </p:childTnLst>
-                          </p:cTn>
-                        </p:par>
-                      </p:childTnLst>
-                    </p:cTn>
-                  </p:par>
-                  <p:par>
-                    <p:cTn id="8" fill="hold">
-                      <p:stCondLst>
-                        <p:cond delay="indefinite"/>
-                      </p:stCondLst>
-                      <p:childTnLst>
-                        <p:par>
-                          <p:cTn id="9" fill="hold">
-                            <p:stCondLst>
-                              <p:cond delay="0"/>
-                            </p:stCondLst>
-                            <p:childTnLst>
-                              <p:par>
-                                <p:cTn id="10" presetID="10" presetClass="entr" presetSubtype="0" fill="hold" grpId="0" nodeType="clickEffect">
-                                  <p:stCondLst>
-                                    <p:cond delay="0"/>
-                                  </p:stCondLst>
-                                  <p:childTnLst>
-                                    <p:set>
-                                      <p:cBhvr>
-                                        <p:cTn id="11" dur="1" fill="hold">
-                                          <p:stCondLst>
-                                            <p:cond delay="0"/>
-                                          </p:stCondLst>
-                                        </p:cTn>
-                                        <p:tgtEl>
-                                          <p:spTgt spid="21"/>
-                                        </p:tgtEl>
-                                        <p:attrNameLst>
-                                          <p:attrName>style.visibility</p:attrName>
-                                        </p:attrNameLst>
-                                      </p:cBhvr>
-                                      <p:to>
-                                        <p:strVal val="visible"/>
-                                      </p:to>
-                                    </p:set>
-                                    <p:animEffect transition="in" filter="fade">
-                                      <p:cBhvr>
-                                        <p:cTn id="12" dur="500"/>
-                                        <p:tgtEl>
-                                          <p:spTgt spid="21"/>
-                                        </p:tgtEl>
-                                      </p:cBhvr>
-                                    </p:animEffect>
-                                  </p:childTnLst>
-                                </p:cTn>
-                              </p:par>
-                            </p:childTnLst>
-                          </p:cTn>
-                        </p:par>
-                      </p:childTnLst>
-                    </p:cTn>
-                  </p:par>
-                </p:childTnLst>
-              </p:cTn>
-              <p:prevCondLst>
-                <p:cond evt="onPrev" delay="0">
-                  <p:tgtEl>
-                    <p:sldTgt/>
-                  </p:tgtEl>
-                </p:cond>
-              </p:prevCondLst>
-              <p:nextCondLst>
-                <p:cond evt="onNext" delay="0">
-                  <p:tgtEl>
-                    <p:sldTgt/>
-                  </p:tgtEl>
-                </p:cond>
-              </p:nextCondLst>
-            </p:seq>
-          </p:childTnLst>
-        </p:cTn>
-      </p:par>
-    </p:tnLst>
-    <p:bldLst>
-      <p:bldP spid="20" grpId="0" animBg="1"/>
-      <p:bldP spid="21" grpId="0" animBg="1"/>
-    </p:bldLst>
-  </p:timing>
-</p:sld>
-</file>
-
-<file path=ppt/slides/slide9.xml><?xml version="1.0" encoding="utf-8"?>
-<p:sld xmlns:a="http://schemas.openxmlformats.org/drawingml/2006/main" xmlns:r="http://schemas.openxmlformats.org/officeDocument/2006/relationships" xmlns:p="http://schemas.openxmlformats.org/presentationml/2006/main">
-  <p:cSld>
-    <p:spTree>
-      <p:nvGrpSpPr>
-        <p:cNvPr id="1" name=""/>
-        <p:cNvGrpSpPr/>
-        <p:nvPr/>
-      </p:nvGrpSpPr>
-      <p:grpSpPr>
-        <a:xfrm>
-          <a:off x="0" y="0"/>
-          <a:ext cx="0" cy="0"/>
-          <a:chOff x="0" y="0"/>
-          <a:chExt cx="0" cy="0"/>
-        </a:xfrm>
-      </p:grpSpPr>
-      <p:sp>
-        <p:nvSpPr>
-          <p:cNvPr id="2" name="Rectangle 1"/>
-          <p:cNvSpPr/>
-          <p:nvPr/>
-        </p:nvSpPr>
-        <p:spPr>
-          <a:xfrm>
-            <a:off x="0" y="0"/>
-            <a:ext cx="12191695" cy="6858000"/>
-          </a:xfrm>
-          <a:prstGeom prst="rect">
-            <a:avLst/>
-          </a:prstGeom>
-          <a:solidFill>
-            <a:srgbClr val="F7F9FC"/>
-          </a:solidFill>
-          <a:ln>
-            <a:noFill/>
-          </a:ln>
-        </p:spPr>
-        <p:style>
-          <a:lnRef idx="1">
-            <a:schemeClr val="accent1"/>
-          </a:lnRef>
-          <a:fillRef idx="3">
-            <a:schemeClr val="accent1"/>
-          </a:fillRef>
-          <a:effectRef idx="2">
-            <a:schemeClr val="accent1"/>
-          </a:effectRef>
-          <a:fontRef idx="minor">
-            <a:schemeClr val="lt1"/>
-          </a:fontRef>
-        </p:style>
-        <p:txBody>
-          <a:bodyPr rtlCol="0" anchor="ctr"/>
-          <a:lstStyle/>
-          <a:p>
-            <a:pPr algn="ctr"/>
-            <a:endParaRPr/>
-          </a:p>
-        </p:txBody>
-      </p:sp>
-      <p:sp>
-        <p:nvSpPr>
-          <p:cNvPr id="3" name="Rectangle 2"/>
-          <p:cNvSpPr/>
-          <p:nvPr/>
-        </p:nvSpPr>
-        <p:spPr>
-          <a:xfrm>
-            <a:off x="502920" y="502920"/>
-            <a:ext cx="109728" cy="685800"/>
-          </a:xfrm>
-          <a:prstGeom prst="rect">
-            <a:avLst/>
-          </a:prstGeom>
-          <a:solidFill>
-            <a:srgbClr val="245B91"/>
-          </a:solidFill>
-          <a:ln>
-            <a:noFill/>
-          </a:ln>
-        </p:spPr>
-        <p:style>
-          <a:lnRef idx="1">
-            <a:schemeClr val="accent1"/>
-          </a:lnRef>
-          <a:fillRef idx="3">
-            <a:schemeClr val="accent1"/>
-          </a:fillRef>
-          <a:effectRef idx="2">
-            <a:schemeClr val="accent1"/>
-          </a:effectRef>
-          <a:fontRef idx="minor">
-            <a:schemeClr val="lt1"/>
-          </a:fontRef>
-        </p:style>
-        <p:txBody>
-          <a:bodyPr rtlCol="0" anchor="ctr"/>
-          <a:lstStyle/>
-          <a:p>
-            <a:pPr algn="ctr"/>
-            <a:endParaRPr/>
-          </a:p>
-        </p:txBody>
-      </p:sp>
-      <p:sp>
-        <p:nvSpPr>
-          <p:cNvPr id="4" name="TextBox 3"/>
-          <p:cNvSpPr txBox="1"/>
-          <p:nvPr/>
-        </p:nvSpPr>
-        <p:spPr>
-          <a:xfrm>
-            <a:off x="777240" y="475488"/>
-            <a:ext cx="5429050" cy="507831"/>
-          </a:xfrm>
-          <a:prstGeom prst="rect">
-            <a:avLst/>
-          </a:prstGeom>
-          <a:noFill/>
-        </p:spPr>
-        <p:txBody>
-          <a:bodyPr wrap="none">
-            <a:spAutoFit/>
-          </a:bodyPr>
-          <a:lstStyle/>
-          <a:p>
-            <a:pPr>
-              <a:defRPr sz="2700" b="1">
-                <a:solidFill>
-                  <a:srgbClr val="0F2747"/>
-                </a:solidFill>
-                <a:latin typeface="Aptos Display"/>
-              </a:defRPr>
-            </a:pPr>
-            <a:r>
-              <a:rPr dirty="0"/>
-              <a:t>Crédito e </a:t>
-            </a:r>
-            <a:r>
-              <a:rPr lang="pt-BR" dirty="0"/>
-              <a:t>o</a:t>
-            </a:r>
-            <a:r>
-              <a:rPr dirty="0" err="1"/>
-              <a:t>portunidades</a:t>
-            </a:r>
-            <a:r>
-              <a:rPr dirty="0"/>
-              <a:t> </a:t>
-            </a:r>
-            <a:r>
-              <a:rPr lang="pt-BR" dirty="0"/>
-              <a:t>c</a:t>
-            </a:r>
-            <a:r>
-              <a:rPr dirty="0" err="1"/>
-              <a:t>omerciais</a:t>
-            </a:r>
-            <a:endParaRPr dirty="0"/>
-          </a:p>
-        </p:txBody>
-      </p:sp>
-      <p:sp>
-        <p:nvSpPr>
-          <p:cNvPr id="5" name="TextBox 4"/>
-          <p:cNvSpPr txBox="1"/>
-          <p:nvPr/>
-        </p:nvSpPr>
-        <p:spPr>
-          <a:xfrm>
-            <a:off x="786384" y="1024128"/>
-            <a:ext cx="10424160" cy="411480"/>
-          </a:xfrm>
-          <a:prstGeom prst="rect">
-            <a:avLst/>
-          </a:prstGeom>
-          <a:noFill/>
-        </p:spPr>
-        <p:txBody>
-          <a:bodyPr wrap="none">
-            <a:spAutoFit/>
-          </a:bodyPr>
-          <a:lstStyle/>
-          <a:p>
-            <a:pPr>
-              <a:defRPr sz="1200">
-                <a:solidFill>
-                  <a:srgbClr val="5D6978"/>
-                </a:solidFill>
-                <a:latin typeface="Aptos"/>
-              </a:defRPr>
-            </a:pPr>
-            <a:r>
-              <a:t>Leitura dos resultados de crédito e suas limitações</a:t>
-            </a:r>
-          </a:p>
-        </p:txBody>
-      </p:sp>
-      <p:sp>
-        <p:nvSpPr>
-          <p:cNvPr id="6" name="TextBox 5"/>
-          <p:cNvSpPr txBox="1"/>
-          <p:nvPr/>
-        </p:nvSpPr>
-        <p:spPr>
-          <a:xfrm>
-            <a:off x="11155680" y="502920"/>
-            <a:ext cx="457200" cy="365760"/>
-          </a:xfrm>
-          <a:prstGeom prst="rect">
-            <a:avLst/>
-          </a:prstGeom>
-          <a:noFill/>
-        </p:spPr>
-        <p:txBody>
-          <a:bodyPr wrap="none">
-            <a:spAutoFit/>
-          </a:bodyPr>
-          <a:lstStyle/>
-          <a:p>
-            <a:pPr algn="r">
-              <a:defRPr sz="1100" b="1">
-                <a:solidFill>
-                  <a:srgbClr val="5D6978"/>
-                </a:solidFill>
-                <a:latin typeface="Aptos"/>
-              </a:defRPr>
-            </a:pPr>
-            <a:r>
-              <a:t>09</a:t>
-            </a:r>
-          </a:p>
-        </p:txBody>
-      </p:sp>
-      <p:sp>
-        <p:nvSpPr>
-          <p:cNvPr id="7" name="Rounded Rectangle 6"/>
-          <p:cNvSpPr/>
-          <p:nvPr/>
-        </p:nvSpPr>
-        <p:spPr>
-          <a:xfrm>
-            <a:off x="868680" y="1508760"/>
-            <a:ext cx="3291840" cy="1828800"/>
-          </a:xfrm>
-          <a:prstGeom prst="roundRect">
-            <a:avLst/>
-          </a:prstGeom>
-          <a:solidFill>
-            <a:srgbClr val="FFFFFF"/>
-          </a:solidFill>
-          <a:ln>
-            <a:solidFill>
-              <a:srgbClr val="DCE1E8"/>
-            </a:solidFill>
-          </a:ln>
-        </p:spPr>
-        <p:style>
-          <a:lnRef idx="1">
-            <a:schemeClr val="accent1"/>
-          </a:lnRef>
-          <a:fillRef idx="3">
-            <a:schemeClr val="accent1"/>
-          </a:fillRef>
-          <a:effectRef idx="2">
-            <a:schemeClr val="accent1"/>
-          </a:effectRef>
-          <a:fontRef idx="minor">
-            <a:schemeClr val="lt1"/>
-          </a:fontRef>
-        </p:style>
-        <p:txBody>
-          <a:bodyPr rtlCol="0" anchor="ctr"/>
-          <a:lstStyle/>
-          <a:p>
-            <a:pPr algn="ctr"/>
-            <a:endParaRPr/>
-          </a:p>
-        </p:txBody>
-      </p:sp>
-      <p:sp>
-        <p:nvSpPr>
-          <p:cNvPr id="8" name="Rectangle 7"/>
-          <p:cNvSpPr/>
-          <p:nvPr/>
-        </p:nvSpPr>
-        <p:spPr>
-          <a:xfrm>
-            <a:off x="868680" y="1508760"/>
-            <a:ext cx="73152" cy="1828800"/>
-          </a:xfrm>
-          <a:prstGeom prst="rect">
-            <a:avLst/>
-          </a:prstGeom>
-          <a:solidFill>
-            <a:srgbClr val="538968"/>
-          </a:solidFill>
-          <a:ln>
-            <a:noFill/>
-          </a:ln>
-        </p:spPr>
-        <p:style>
-          <a:lnRef idx="1">
-            <a:schemeClr val="accent1"/>
-          </a:lnRef>
-          <a:fillRef idx="3">
-            <a:schemeClr val="accent1"/>
-          </a:fillRef>
-          <a:effectRef idx="2">
-            <a:schemeClr val="accent1"/>
-          </a:effectRef>
-          <a:fontRef idx="minor">
-            <a:schemeClr val="lt1"/>
-          </a:fontRef>
-        </p:style>
-        <p:txBody>
-          <a:bodyPr rtlCol="0" anchor="ctr"/>
-          <a:lstStyle/>
-          <a:p>
-            <a:pPr algn="ctr"/>
-            <a:endParaRPr/>
-          </a:p>
-        </p:txBody>
-      </p:sp>
-      <p:sp>
-        <p:nvSpPr>
-          <p:cNvPr id="9" name="TextBox 8"/>
-          <p:cNvSpPr txBox="1"/>
-          <p:nvPr/>
-        </p:nvSpPr>
-        <p:spPr>
-          <a:xfrm>
-            <a:off x="1097280" y="1691639"/>
-            <a:ext cx="2880360" cy="1508760"/>
-          </a:xfrm>
-          <a:prstGeom prst="rect">
-            <a:avLst/>
-          </a:prstGeom>
-          <a:noFill/>
-        </p:spPr>
-        <p:txBody>
-          <a:bodyPr wrap="square">
-            <a:spAutoFit/>
-          </a:bodyPr>
-          <a:lstStyle/>
-          <a:p>
-            <a:pPr>
-              <a:defRPr sz="1500" b="1">
-                <a:solidFill>
-                  <a:srgbClr val="0F2747"/>
-                </a:solidFill>
-                <a:latin typeface="Aptos"/>
-              </a:defRPr>
-            </a:pPr>
-            <a:r>
-              <a:t>Aprovação em 2022</a:t>
-            </a:r>
-          </a:p>
-          <a:p>
-            <a:pPr>
-              <a:spcBef>
-                <a:spcPts val="600"/>
-              </a:spcBef>
-              <a:defRPr sz="1150">
-                <a:solidFill>
-                  <a:srgbClr val="1F2937"/>
-                </a:solidFill>
-                <a:latin typeface="Aptos"/>
-              </a:defRPr>
-            </a:pPr>
-            <a:r>
-              <a:t>31,6%</a:t>
-            </a:r>
-            <a:br/>
-            <a:br/>
-            <a:r>
-              <a:t>Maior taxa observada na série analisada.</a:t>
-            </a:r>
-          </a:p>
-        </p:txBody>
-      </p:sp>
-      <p:sp>
-        <p:nvSpPr>
-          <p:cNvPr id="10" name="Rounded Rectangle 9"/>
-          <p:cNvSpPr/>
-          <p:nvPr/>
-        </p:nvSpPr>
-        <p:spPr>
-          <a:xfrm>
-            <a:off x="4434840" y="1508760"/>
-            <a:ext cx="3291840" cy="1828800"/>
-          </a:xfrm>
-          <a:prstGeom prst="roundRect">
-            <a:avLst/>
-          </a:prstGeom>
-          <a:solidFill>
-            <a:srgbClr val="FFFFFF"/>
-          </a:solidFill>
-          <a:ln>
-            <a:solidFill>
-              <a:srgbClr val="DCE1E8"/>
-            </a:solidFill>
-          </a:ln>
-        </p:spPr>
-        <p:style>
-          <a:lnRef idx="1">
-            <a:schemeClr val="accent1"/>
-          </a:lnRef>
-          <a:fillRef idx="3">
-            <a:schemeClr val="accent1"/>
-          </a:fillRef>
-          <a:effectRef idx="2">
-            <a:schemeClr val="accent1"/>
-          </a:effectRef>
-          <a:fontRef idx="minor">
-            <a:schemeClr val="lt1"/>
-          </a:fontRef>
-        </p:style>
-        <p:txBody>
-          <a:bodyPr rtlCol="0" anchor="ctr"/>
-          <a:lstStyle/>
-          <a:p>
-            <a:pPr algn="ctr"/>
-            <a:endParaRPr/>
-          </a:p>
-        </p:txBody>
-      </p:sp>
-      <p:sp>
-        <p:nvSpPr>
-          <p:cNvPr id="11" name="Rectangle 10"/>
-          <p:cNvSpPr/>
-          <p:nvPr/>
-        </p:nvSpPr>
-        <p:spPr>
-          <a:xfrm>
-            <a:off x="4434840" y="1508760"/>
-            <a:ext cx="73152" cy="1828800"/>
-          </a:xfrm>
-          <a:prstGeom prst="rect">
-            <a:avLst/>
-          </a:prstGeom>
-          <a:solidFill>
-            <a:srgbClr val="245B91"/>
-          </a:solidFill>
-          <a:ln>
-            <a:noFill/>
-          </a:ln>
-        </p:spPr>
-        <p:style>
-          <a:lnRef idx="1">
-            <a:schemeClr val="accent1"/>
-          </a:lnRef>
-          <a:fillRef idx="3">
-            <a:schemeClr val="accent1"/>
-          </a:fillRef>
-          <a:effectRef idx="2">
-            <a:schemeClr val="accent1"/>
-          </a:effectRef>
-          <a:fontRef idx="minor">
-            <a:schemeClr val="lt1"/>
-          </a:fontRef>
-        </p:style>
-        <p:txBody>
-          <a:bodyPr rtlCol="0" anchor="ctr"/>
-          <a:lstStyle/>
-          <a:p>
-            <a:pPr algn="ctr"/>
-            <a:endParaRPr/>
-          </a:p>
-        </p:txBody>
-      </p:sp>
-      <p:sp>
-        <p:nvSpPr>
-          <p:cNvPr id="12" name="TextBox 11"/>
-          <p:cNvSpPr txBox="1"/>
-          <p:nvPr/>
-        </p:nvSpPr>
-        <p:spPr>
-          <a:xfrm>
-            <a:off x="4663440" y="1691639"/>
-            <a:ext cx="2880360" cy="931024"/>
-          </a:xfrm>
-          <a:prstGeom prst="rect">
-            <a:avLst/>
-          </a:prstGeom>
-          <a:noFill/>
-        </p:spPr>
-        <p:txBody>
-          <a:bodyPr wrap="square">
-            <a:spAutoFit/>
-          </a:bodyPr>
-          <a:lstStyle/>
-          <a:p>
-            <a:pPr>
-              <a:defRPr sz="1500" b="1">
-                <a:solidFill>
-                  <a:srgbClr val="0F2747"/>
-                </a:solidFill>
-                <a:latin typeface="Aptos"/>
-              </a:defRPr>
-            </a:pPr>
-            <a:r>
-              <a:rPr dirty="0" err="1"/>
-              <a:t>Comparação</a:t>
-            </a:r>
-            <a:r>
-              <a:rPr dirty="0"/>
-              <a:t> com 2021</a:t>
-            </a:r>
-          </a:p>
-          <a:p>
-            <a:pPr>
-              <a:spcBef>
-                <a:spcPts val="600"/>
-              </a:spcBef>
-              <a:defRPr sz="1150">
-                <a:solidFill>
-                  <a:srgbClr val="1F2937"/>
-                </a:solidFill>
-                <a:latin typeface="Aptos"/>
-              </a:defRPr>
-            </a:pPr>
-            <a:r>
-              <a:rPr dirty="0"/>
-              <a:t>21,6% </a:t>
-            </a:r>
-            <a:r>
-              <a:rPr lang="pt-BR" dirty="0"/>
-              <a:t>=&gt;</a:t>
-            </a:r>
-            <a:r>
-              <a:rPr dirty="0"/>
-              <a:t> 31,6%</a:t>
-            </a:r>
-            <a:br>
-              <a:rPr dirty="0"/>
-            </a:br>
-            <a:br>
-              <a:rPr dirty="0"/>
-            </a:br>
-            <a:r>
-              <a:rPr dirty="0" err="1"/>
-              <a:t>Aumento</a:t>
-            </a:r>
-            <a:r>
-              <a:rPr dirty="0"/>
-              <a:t> </a:t>
-            </a:r>
-            <a:r>
-              <a:rPr dirty="0" err="1"/>
-              <a:t>aproximado</a:t>
-            </a:r>
-            <a:r>
-              <a:rPr dirty="0"/>
-              <a:t> de 10 p.p.</a:t>
-            </a:r>
-          </a:p>
-        </p:txBody>
-      </p:sp>
-      <p:sp>
-        <p:nvSpPr>
-          <p:cNvPr id="13" name="Rounded Rectangle 12"/>
-          <p:cNvSpPr/>
-          <p:nvPr/>
-        </p:nvSpPr>
-        <p:spPr>
-          <a:xfrm>
-            <a:off x="8001000" y="1508760"/>
-            <a:ext cx="3291840" cy="1828800"/>
-          </a:xfrm>
-          <a:prstGeom prst="roundRect">
-            <a:avLst/>
-          </a:prstGeom>
-          <a:solidFill>
-            <a:srgbClr val="FFFFFF"/>
-          </a:solidFill>
-          <a:ln>
-            <a:solidFill>
-              <a:srgbClr val="DCE1E8"/>
-            </a:solidFill>
-          </a:ln>
-        </p:spPr>
-        <p:style>
-          <a:lnRef idx="1">
-            <a:schemeClr val="accent1"/>
-          </a:lnRef>
-          <a:fillRef idx="3">
-            <a:schemeClr val="accent1"/>
-          </a:fillRef>
-          <a:effectRef idx="2">
-            <a:schemeClr val="accent1"/>
-          </a:effectRef>
-          <a:fontRef idx="minor">
-            <a:schemeClr val="lt1"/>
-          </a:fontRef>
-        </p:style>
-        <p:txBody>
-          <a:bodyPr rtlCol="0" anchor="ctr"/>
-          <a:lstStyle/>
-          <a:p>
-            <a:pPr algn="ctr"/>
-            <a:endParaRPr/>
-          </a:p>
-        </p:txBody>
-      </p:sp>
-      <p:sp>
-        <p:nvSpPr>
-          <p:cNvPr id="14" name="Rectangle 13"/>
-          <p:cNvSpPr/>
-          <p:nvPr/>
-        </p:nvSpPr>
-        <p:spPr>
-          <a:xfrm>
-            <a:off x="8001000" y="1508760"/>
-            <a:ext cx="73152" cy="1828800"/>
-          </a:xfrm>
-          <a:prstGeom prst="rect">
-            <a:avLst/>
-          </a:prstGeom>
-          <a:solidFill>
-            <a:srgbClr val="E58F40"/>
-          </a:solidFill>
-          <a:ln>
-            <a:noFill/>
-          </a:ln>
-        </p:spPr>
-        <p:style>
-          <a:lnRef idx="1">
-            <a:schemeClr val="accent1"/>
-          </a:lnRef>
-          <a:fillRef idx="3">
-            <a:schemeClr val="accent1"/>
-          </a:fillRef>
-          <a:effectRef idx="2">
-            <a:schemeClr val="accent1"/>
-          </a:effectRef>
-          <a:fontRef idx="minor">
-            <a:schemeClr val="lt1"/>
-          </a:fontRef>
-        </p:style>
-        <p:txBody>
-          <a:bodyPr rtlCol="0" anchor="ctr"/>
-          <a:lstStyle/>
-          <a:p>
-            <a:pPr algn="ctr"/>
-            <a:endParaRPr/>
-          </a:p>
-        </p:txBody>
-      </p:sp>
-      <p:sp>
-        <p:nvSpPr>
-          <p:cNvPr id="15" name="TextBox 14"/>
-          <p:cNvSpPr txBox="1"/>
-          <p:nvPr/>
-        </p:nvSpPr>
-        <p:spPr>
-          <a:xfrm>
-            <a:off x="8229600" y="1691639"/>
-            <a:ext cx="2880360" cy="1508760"/>
-          </a:xfrm>
-          <a:prstGeom prst="rect">
-            <a:avLst/>
-          </a:prstGeom>
-          <a:noFill/>
-        </p:spPr>
-        <p:txBody>
-          <a:bodyPr wrap="square">
-            <a:spAutoFit/>
-          </a:bodyPr>
-          <a:lstStyle/>
-          <a:p>
-            <a:pPr>
-              <a:defRPr sz="1500" b="1">
-                <a:solidFill>
-                  <a:srgbClr val="0F2747"/>
-                </a:solidFill>
-                <a:latin typeface="Aptos"/>
-              </a:defRPr>
-            </a:pPr>
-            <a:r>
-              <a:t>Cautela metodológica</a:t>
-            </a:r>
-          </a:p>
-          <a:p>
-            <a:pPr>
-              <a:spcBef>
-                <a:spcPts val="600"/>
-              </a:spcBef>
-              <a:defRPr sz="1150">
-                <a:solidFill>
-                  <a:srgbClr val="1F2937"/>
-                </a:solidFill>
-                <a:latin typeface="Aptos"/>
-              </a:defRPr>
-            </a:pPr>
-            <a:r>
-              <a:t>Os status apresentam distribuição uniforme e não caracterizam claramente etapas sequenciais de um funil.</a:t>
-            </a:r>
-          </a:p>
-        </p:txBody>
-      </p:sp>
-      <p:sp>
-        <p:nvSpPr>
-          <p:cNvPr id="17" name="Rectangle 16"/>
-          <p:cNvSpPr/>
-          <p:nvPr/>
-        </p:nvSpPr>
-        <p:spPr>
-          <a:xfrm>
-            <a:off x="594360" y="6473952"/>
-            <a:ext cx="10972800" cy="13716"/>
-          </a:xfrm>
-          <a:prstGeom prst="rect">
-            <a:avLst/>
-          </a:prstGeom>
-          <a:solidFill>
-            <a:srgbClr val="DCE1E8"/>
-          </a:solidFill>
-          <a:ln>
-            <a:noFill/>
-          </a:ln>
-        </p:spPr>
-        <p:style>
-          <a:lnRef idx="1">
-            <a:schemeClr val="accent1"/>
-          </a:lnRef>
-          <a:fillRef idx="3">
-            <a:schemeClr val="accent1"/>
-          </a:fillRef>
-          <a:effectRef idx="2">
-            <a:schemeClr val="accent1"/>
-          </a:effectRef>
-          <a:fontRef idx="minor">
-            <a:schemeClr val="lt1"/>
-          </a:fontRef>
-        </p:style>
-        <p:txBody>
-          <a:bodyPr rtlCol="0" anchor="ctr"/>
-          <a:lstStyle/>
-          <a:p>
-            <a:pPr algn="ctr"/>
-            <a:endParaRPr/>
-          </a:p>
-        </p:txBody>
-      </p:sp>
-      <p:sp>
-        <p:nvSpPr>
-          <p:cNvPr id="18" name="TextBox 17"/>
-          <p:cNvSpPr txBox="1"/>
-          <p:nvPr/>
-        </p:nvSpPr>
-        <p:spPr>
-          <a:xfrm>
-            <a:off x="640080" y="6510528"/>
-            <a:ext cx="4572000" cy="201168"/>
-          </a:xfrm>
-          <a:prstGeom prst="rect">
-            <a:avLst/>
-          </a:prstGeom>
-          <a:noFill/>
-        </p:spPr>
-        <p:txBody>
-          <a:bodyPr wrap="none">
-            <a:spAutoFit/>
-          </a:bodyPr>
-          <a:lstStyle/>
-          <a:p>
-            <a:pPr>
-              <a:defRPr sz="800">
-                <a:solidFill>
-                  <a:srgbClr val="5D6978"/>
-                </a:solidFill>
-                <a:latin typeface="Aptos"/>
-              </a:defRPr>
-            </a:pPr>
-            <a:r>
-              <a:t>BanVic | Dashboard Comercial</a:t>
-            </a:r>
-          </a:p>
-        </p:txBody>
-      </p:sp>
-      <p:sp>
-        <p:nvSpPr>
-          <p:cNvPr id="20" name="TextBox 19">
-            <a:extLst>
-              <a:ext uri="{FF2B5EF4-FFF2-40B4-BE49-F238E27FC236}">
-                <a16:creationId xmlns:a16="http://schemas.microsoft.com/office/drawing/2014/main" id="{0FF3D601-4C0F-3E56-82AD-C7DA82E6C05E}"/>
-              </a:ext>
-            </a:extLst>
-          </p:cNvPr>
-          <p:cNvSpPr txBox="1"/>
-          <p:nvPr/>
-        </p:nvSpPr>
-        <p:spPr>
-          <a:xfrm>
-            <a:off x="786384" y="3977640"/>
-            <a:ext cx="10570464" cy="995144"/>
-          </a:xfrm>
-          <a:prstGeom prst="rect">
-            <a:avLst/>
-          </a:prstGeom>
-          <a:noFill/>
-        </p:spPr>
-        <p:txBody>
-          <a:bodyPr wrap="square">
-            <a:spAutoFit/>
-          </a:bodyPr>
-          <a:lstStyle/>
-          <a:p>
-            <a:pPr>
-              <a:defRPr sz="1600" b="1">
-                <a:solidFill>
-                  <a:srgbClr val="0F2747"/>
-                </a:solidFill>
-                <a:latin typeface="Aptos"/>
-              </a:defRPr>
-            </a:pPr>
-            <a:r>
-              <a:rPr dirty="0" err="1"/>
-              <a:t>Leitura</a:t>
-            </a:r>
-            <a:r>
-              <a:rPr dirty="0"/>
-              <a:t> </a:t>
-            </a:r>
-            <a:r>
-              <a:rPr dirty="0" err="1"/>
-              <a:t>comercial</a:t>
-            </a:r>
-            <a:r>
-              <a:rPr lang="pt-BR" dirty="0"/>
-              <a:t>:</a:t>
-            </a:r>
-            <a:endParaRPr dirty="0"/>
-          </a:p>
-          <a:p>
-            <a:pPr>
-              <a:spcBef>
-                <a:spcPts val="800"/>
-              </a:spcBef>
-              <a:defRPr sz="1800">
-                <a:solidFill>
-                  <a:srgbClr val="1F2937"/>
-                </a:solidFill>
-                <a:latin typeface="Aptos"/>
-              </a:defRPr>
-            </a:pPr>
-            <a:r>
-              <a:rPr lang="pt-BR" dirty="0"/>
-              <a:t>Oportunidade para acompanhar volume e aprovação de crédito como indicadores comerciais, evitando inferências de conversão entre etapas sem informações adicionais sobre o processo.</a:t>
-            </a:r>
-          </a:p>
-        </p:txBody>
-      </p:sp>
-    </p:spTree>
-  </p:cSld>
-  <p:clrMapOvr>
-    <a:masterClrMapping/>
-  </p:clrMapOvr>
 </p:sld>
 </file>
 
